--- a/LEC/lec09-databases-access-cont/Databases & Access (continued).pptx
+++ b/LEC/lec09-databases-access-cont/Databases & Access (continued).pptx
@@ -5,10 +5,10 @@
     <p:sldMasterId id="2147483660" r:id="rId1"/>
   </p:sldMasterIdLst>
   <p:notesMasterIdLst>
-    <p:notesMasterId r:id="rId40"/>
+    <p:notesMasterId r:id="rId44"/>
   </p:notesMasterIdLst>
   <p:handoutMasterIdLst>
-    <p:handoutMasterId r:id="rId41"/>
+    <p:handoutMasterId r:id="rId45"/>
   </p:handoutMasterIdLst>
   <p:sldIdLst>
     <p:sldId id="257" r:id="rId2"/>
@@ -35,20 +35,24 @@
     <p:sldId id="308" r:id="rId23"/>
     <p:sldId id="277" r:id="rId24"/>
     <p:sldId id="278" r:id="rId25"/>
-    <p:sldId id="279" r:id="rId26"/>
-    <p:sldId id="283" r:id="rId27"/>
-    <p:sldId id="284" r:id="rId28"/>
-    <p:sldId id="285" r:id="rId29"/>
-    <p:sldId id="288" r:id="rId30"/>
-    <p:sldId id="313" r:id="rId31"/>
-    <p:sldId id="314" r:id="rId32"/>
-    <p:sldId id="316" r:id="rId33"/>
-    <p:sldId id="317" r:id="rId34"/>
-    <p:sldId id="322" r:id="rId35"/>
-    <p:sldId id="325" r:id="rId36"/>
-    <p:sldId id="326" r:id="rId37"/>
-    <p:sldId id="323" r:id="rId38"/>
-    <p:sldId id="290" r:id="rId39"/>
+    <p:sldId id="281" r:id="rId26"/>
+    <p:sldId id="282" r:id="rId27"/>
+    <p:sldId id="280" r:id="rId28"/>
+    <p:sldId id="279" r:id="rId29"/>
+    <p:sldId id="283" r:id="rId30"/>
+    <p:sldId id="284" r:id="rId31"/>
+    <p:sldId id="285" r:id="rId32"/>
+    <p:sldId id="288" r:id="rId33"/>
+    <p:sldId id="313" r:id="rId34"/>
+    <p:sldId id="314" r:id="rId35"/>
+    <p:sldId id="316" r:id="rId36"/>
+    <p:sldId id="317" r:id="rId37"/>
+    <p:sldId id="322" r:id="rId38"/>
+    <p:sldId id="325" r:id="rId39"/>
+    <p:sldId id="326" r:id="rId40"/>
+    <p:sldId id="323" r:id="rId41"/>
+    <p:sldId id="331" r:id="rId42"/>
+    <p:sldId id="290" r:id="rId43"/>
   </p:sldIdLst>
   <p:sldSz cx="9144000" cy="6858000" type="screen4x3"/>
   <p:notesSz cx="6858000" cy="9144000"/>
@@ -166,15 +170,121 @@
 </p:presentation>
 </file>
 
+<file path=ppt/revisionInfo.xml><?xml version="1.0" encoding="utf-8"?>
+<p1510:revInfo xmlns:a="http://schemas.openxmlformats.org/drawingml/2006/main" xmlns:r="http://schemas.openxmlformats.org/officeDocument/2006/relationships" xmlns:p1510="http://schemas.microsoft.com/office/powerpoint/2015/10/main">
+  <p1510:revLst>
+    <p1510:client id="{A1B3BD73-169F-4674-90AA-19E9D113805A}" v="14" dt="2026-09-23T17:27:14.880"/>
+  </p1510:revLst>
+</p1510:revInfo>
+</file>
+
 <file path=ppt/changesInfos/changesInfo1.xml><?xml version="1.0" encoding="utf-8"?>
 <pc:chgInfo xmlns:a="http://schemas.openxmlformats.org/drawingml/2006/main" xmlns:r="http://schemas.openxmlformats.org/officeDocument/2006/relationships" xmlns:ac="http://schemas.microsoft.com/office/drawing/2013/main/command" xmlns:pc="http://schemas.microsoft.com/office/powerpoint/2013/main/command">
   <pc:docChgLst>
     <pc:chgData name="Frommer, Ian Dr. (EDU)" userId="28ca3ff0-544f-450a-928b-99e19cf49b89" providerId="ADAL" clId="{A3E8E5B1-0D91-4643-B70B-3D065C8674E0}"/>
-    <pc:docChg chg="custSel modSld">
-      <pc:chgData name="Frommer, Ian Dr. (EDU)" userId="28ca3ff0-544f-450a-928b-99e19cf49b89" providerId="ADAL" clId="{A3E8E5B1-0D91-4643-B70B-3D065C8674E0}" dt="2026-09-20T16:52:03.363" v="23" actId="1076"/>
+    <pc:docChg chg="undo redo custSel addSld delSld modSld">
+      <pc:chgData name="Frommer, Ian Dr. (EDU)" userId="28ca3ff0-544f-450a-928b-99e19cf49b89" providerId="ADAL" clId="{A3E8E5B1-0D91-4643-B70B-3D065C8674E0}" dt="2026-09-23T17:27:47.531" v="201" actId="1076"/>
       <pc:docMkLst>
         <pc:docMk/>
       </pc:docMkLst>
+      <pc:sldChg chg="modSp mod">
+        <pc:chgData name="Frommer, Ian Dr. (EDU)" userId="28ca3ff0-544f-450a-928b-99e19cf49b89" providerId="ADAL" clId="{A3E8E5B1-0D91-4643-B70B-3D065C8674E0}" dt="2026-09-23T16:27:41.364" v="39" actId="207"/>
+        <pc:sldMkLst>
+          <pc:docMk/>
+          <pc:sldMk cId="1093004934" sldId="274"/>
+        </pc:sldMkLst>
+        <pc:spChg chg="mod">
+          <ac:chgData name="Frommer, Ian Dr. (EDU)" userId="28ca3ff0-544f-450a-928b-99e19cf49b89" providerId="ADAL" clId="{A3E8E5B1-0D91-4643-B70B-3D065C8674E0}" dt="2026-09-23T16:27:41.364" v="39" actId="207"/>
+          <ac:spMkLst>
+            <pc:docMk/>
+            <pc:sldMk cId="1093004934" sldId="274"/>
+            <ac:spMk id="13" creationId="{00000000-0000-0000-0000-000000000000}"/>
+          </ac:spMkLst>
+        </pc:spChg>
+        <pc:spChg chg="mod">
+          <ac:chgData name="Frommer, Ian Dr. (EDU)" userId="28ca3ff0-544f-450a-928b-99e19cf49b89" providerId="ADAL" clId="{A3E8E5B1-0D91-4643-B70B-3D065C8674E0}" dt="2026-09-23T16:27:26.773" v="37" actId="207"/>
+          <ac:spMkLst>
+            <pc:docMk/>
+            <pc:sldMk cId="1093004934" sldId="274"/>
+            <ac:spMk id="16" creationId="{00000000-0000-0000-0000-000000000000}"/>
+          </ac:spMkLst>
+        </pc:spChg>
+        <pc:spChg chg="mod">
+          <ac:chgData name="Frommer, Ian Dr. (EDU)" userId="28ca3ff0-544f-450a-928b-99e19cf49b89" providerId="ADAL" clId="{A3E8E5B1-0D91-4643-B70B-3D065C8674E0}" dt="2026-09-23T16:26:56.155" v="32" actId="6549"/>
+          <ac:spMkLst>
+            <pc:docMk/>
+            <pc:sldMk cId="1093004934" sldId="274"/>
+            <ac:spMk id="20" creationId="{40B45056-9451-4586-BCFB-5D6D89883422}"/>
+          </ac:spMkLst>
+        </pc:spChg>
+        <pc:spChg chg="mod">
+          <ac:chgData name="Frommer, Ian Dr. (EDU)" userId="28ca3ff0-544f-450a-928b-99e19cf49b89" providerId="ADAL" clId="{A3E8E5B1-0D91-4643-B70B-3D065C8674E0}" dt="2026-09-23T16:26:59.069" v="33" actId="20577"/>
+          <ac:spMkLst>
+            <pc:docMk/>
+            <pc:sldMk cId="1093004934" sldId="274"/>
+            <ac:spMk id="33" creationId="{F582C484-1256-408A-BBF8-329FE8E00AA0}"/>
+          </ac:spMkLst>
+        </pc:spChg>
+        <pc:spChg chg="mod">
+          <ac:chgData name="Frommer, Ian Dr. (EDU)" userId="28ca3ff0-544f-450a-928b-99e19cf49b89" providerId="ADAL" clId="{A3E8E5B1-0D91-4643-B70B-3D065C8674E0}" dt="2026-09-23T16:27:18.378" v="36" actId="20577"/>
+          <ac:spMkLst>
+            <pc:docMk/>
+            <pc:sldMk cId="1093004934" sldId="274"/>
+            <ac:spMk id="37" creationId="{5FEBA28A-E8AF-46CE-8E6D-FEAC0D1DD535}"/>
+          </ac:spMkLst>
+        </pc:spChg>
+      </pc:sldChg>
+      <pc:sldChg chg="add del">
+        <pc:chgData name="Frommer, Ian Dr. (EDU)" userId="28ca3ff0-544f-450a-928b-99e19cf49b89" providerId="ADAL" clId="{A3E8E5B1-0D91-4643-B70B-3D065C8674E0}" dt="2026-09-23T16:37:43.473" v="44"/>
+        <pc:sldMkLst>
+          <pc:docMk/>
+          <pc:sldMk cId="655143150" sldId="278"/>
+        </pc:sldMkLst>
+      </pc:sldChg>
+      <pc:sldChg chg="addSp delSp modSp mod">
+        <pc:chgData name="Frommer, Ian Dr. (EDU)" userId="28ca3ff0-544f-450a-928b-99e19cf49b89" providerId="ADAL" clId="{A3E8E5B1-0D91-4643-B70B-3D065C8674E0}" dt="2026-09-23T16:37:28.901" v="43" actId="14100"/>
+        <pc:sldMkLst>
+          <pc:docMk/>
+          <pc:sldMk cId="3736434980" sldId="279"/>
+        </pc:sldMkLst>
+        <pc:spChg chg="add mod">
+          <ac:chgData name="Frommer, Ian Dr. (EDU)" userId="28ca3ff0-544f-450a-928b-99e19cf49b89" providerId="ADAL" clId="{A3E8E5B1-0D91-4643-B70B-3D065C8674E0}" dt="2026-09-23T16:37:28.901" v="43" actId="14100"/>
+          <ac:spMkLst>
+            <pc:docMk/>
+            <pc:sldMk cId="3736434980" sldId="279"/>
+            <ac:spMk id="5" creationId="{84C52F80-4932-E264-ADDE-27CEBA6F7C6C}"/>
+          </ac:spMkLst>
+        </pc:spChg>
+        <pc:spChg chg="del">
+          <ac:chgData name="Frommer, Ian Dr. (EDU)" userId="28ca3ff0-544f-450a-928b-99e19cf49b89" providerId="ADAL" clId="{A3E8E5B1-0D91-4643-B70B-3D065C8674E0}" dt="2026-09-23T16:28:47.878" v="40" actId="478"/>
+          <ac:spMkLst>
+            <pc:docMk/>
+            <pc:sldMk cId="3736434980" sldId="279"/>
+            <ac:spMk id="9" creationId="{00000000-0000-0000-0000-000000000000}"/>
+          </ac:spMkLst>
+        </pc:spChg>
+      </pc:sldChg>
+      <pc:sldChg chg="add">
+        <pc:chgData name="Frommer, Ian Dr. (EDU)" userId="28ca3ff0-544f-450a-928b-99e19cf49b89" providerId="ADAL" clId="{A3E8E5B1-0D91-4643-B70B-3D065C8674E0}" dt="2026-09-23T16:37:43.473" v="44"/>
+        <pc:sldMkLst>
+          <pc:docMk/>
+          <pc:sldMk cId="1977493954" sldId="280"/>
+        </pc:sldMkLst>
+      </pc:sldChg>
+      <pc:sldChg chg="add">
+        <pc:chgData name="Frommer, Ian Dr. (EDU)" userId="28ca3ff0-544f-450a-928b-99e19cf49b89" providerId="ADAL" clId="{A3E8E5B1-0D91-4643-B70B-3D065C8674E0}" dt="2026-09-23T16:37:43.473" v="44"/>
+        <pc:sldMkLst>
+          <pc:docMk/>
+          <pc:sldMk cId="4046738892" sldId="281"/>
+        </pc:sldMkLst>
+      </pc:sldChg>
+      <pc:sldChg chg="add">
+        <pc:chgData name="Frommer, Ian Dr. (EDU)" userId="28ca3ff0-544f-450a-928b-99e19cf49b89" providerId="ADAL" clId="{A3E8E5B1-0D91-4643-B70B-3D065C8674E0}" dt="2026-09-23T16:37:43.473" v="44"/>
+        <pc:sldMkLst>
+          <pc:docMk/>
+          <pc:sldMk cId="2630577512" sldId="282"/>
+        </pc:sldMkLst>
+      </pc:sldChg>
       <pc:sldChg chg="modSp mod">
         <pc:chgData name="Frommer, Ian Dr. (EDU)" userId="28ca3ff0-544f-450a-928b-99e19cf49b89" providerId="ADAL" clId="{A3E8E5B1-0D91-4643-B70B-3D065C8674E0}" dt="2026-09-20T16:38:45.654" v="21" actId="6549"/>
         <pc:sldMkLst>
@@ -205,6 +315,75 @@
           </ac:spMkLst>
         </pc:spChg>
       </pc:sldChg>
+      <pc:sldChg chg="addSp modSp new mod">
+        <pc:chgData name="Frommer, Ian Dr. (EDU)" userId="28ca3ff0-544f-450a-928b-99e19cf49b89" providerId="ADAL" clId="{A3E8E5B1-0D91-4643-B70B-3D065C8674E0}" dt="2026-09-23T17:27:47.531" v="201" actId="1076"/>
+        <pc:sldMkLst>
+          <pc:docMk/>
+          <pc:sldMk cId="2160823425" sldId="331"/>
+        </pc:sldMkLst>
+        <pc:spChg chg="mod">
+          <ac:chgData name="Frommer, Ian Dr. (EDU)" userId="28ca3ff0-544f-450a-928b-99e19cf49b89" providerId="ADAL" clId="{A3E8E5B1-0D91-4643-B70B-3D065C8674E0}" dt="2026-09-23T17:01:40.141" v="46"/>
+          <ac:spMkLst>
+            <pc:docMk/>
+            <pc:sldMk cId="2160823425" sldId="331"/>
+            <ac:spMk id="2" creationId="{959F58F2-5FC2-7962-1707-9824743F302A}"/>
+          </ac:spMkLst>
+        </pc:spChg>
+        <pc:spChg chg="mod">
+          <ac:chgData name="Frommer, Ian Dr. (EDU)" userId="28ca3ff0-544f-450a-928b-99e19cf49b89" providerId="ADAL" clId="{A3E8E5B1-0D91-4643-B70B-3D065C8674E0}" dt="2026-09-23T17:27:23.071" v="190" actId="14100"/>
+          <ac:spMkLst>
+            <pc:docMk/>
+            <pc:sldMk cId="2160823425" sldId="331"/>
+            <ac:spMk id="3" creationId="{54F74308-7247-2B5B-0181-75B75F9F1592}"/>
+          </ac:spMkLst>
+        </pc:spChg>
+        <pc:spChg chg="add mod">
+          <ac:chgData name="Frommer, Ian Dr. (EDU)" userId="28ca3ff0-544f-450a-928b-99e19cf49b89" providerId="ADAL" clId="{A3E8E5B1-0D91-4643-B70B-3D065C8674E0}" dt="2026-09-23T17:27:39.639" v="198" actId="27636"/>
+          <ac:spMkLst>
+            <pc:docMk/>
+            <pc:sldMk cId="2160823425" sldId="331"/>
+            <ac:spMk id="8" creationId="{CADD2F10-FA97-9DAD-652B-9AE781B21A7D}"/>
+          </ac:spMkLst>
+        </pc:spChg>
+        <pc:spChg chg="add mod">
+          <ac:chgData name="Frommer, Ian Dr. (EDU)" userId="28ca3ff0-544f-450a-928b-99e19cf49b89" providerId="ADAL" clId="{A3E8E5B1-0D91-4643-B70B-3D065C8674E0}" dt="2026-09-23T17:27:45.624" v="200" actId="1076"/>
+          <ac:spMkLst>
+            <pc:docMk/>
+            <pc:sldMk cId="2160823425" sldId="331"/>
+            <ac:spMk id="10" creationId="{3D92904E-C31A-76F4-04CA-CE6C1D63E92F}"/>
+          </ac:spMkLst>
+        </pc:spChg>
+        <pc:picChg chg="add">
+          <ac:chgData name="Frommer, Ian Dr. (EDU)" userId="28ca3ff0-544f-450a-928b-99e19cf49b89" providerId="ADAL" clId="{A3E8E5B1-0D91-4643-B70B-3D065C8674E0}" dt="2026-09-23T17:01:48.268" v="47" actId="22"/>
+          <ac:picMkLst>
+            <pc:docMk/>
+            <pc:sldMk cId="2160823425" sldId="331"/>
+            <ac:picMk id="6" creationId="{D3AFD333-2840-C627-1A0A-9C9720FFC923}"/>
+          </ac:picMkLst>
+        </pc:picChg>
+        <pc:picChg chg="add mod">
+          <ac:chgData name="Frommer, Ian Dr. (EDU)" userId="28ca3ff0-544f-450a-928b-99e19cf49b89" providerId="ADAL" clId="{A3E8E5B1-0D91-4643-B70B-3D065C8674E0}" dt="2026-09-23T17:27:47.531" v="201" actId="1076"/>
+          <ac:picMkLst>
+            <pc:docMk/>
+            <pc:sldMk cId="2160823425" sldId="331"/>
+            <ac:picMk id="7" creationId="{36061E42-F6E8-2F9D-EE6E-E5DBC13FDD7B}"/>
+          </ac:picMkLst>
+        </pc:picChg>
+      </pc:sldChg>
+      <pc:sldChg chg="add del">
+        <pc:chgData name="Frommer, Ian Dr. (EDU)" userId="28ca3ff0-544f-450a-928b-99e19cf49b89" providerId="ADAL" clId="{A3E8E5B1-0D91-4643-B70B-3D065C8674E0}" dt="2026-09-23T17:26:23.893" v="176" actId="47"/>
+        <pc:sldMkLst>
+          <pc:docMk/>
+          <pc:sldMk cId="3531109861" sldId="332"/>
+        </pc:sldMkLst>
+      </pc:sldChg>
+      <pc:sldChg chg="add del">
+        <pc:chgData name="Frommer, Ian Dr. (EDU)" userId="28ca3ff0-544f-450a-928b-99e19cf49b89" providerId="ADAL" clId="{A3E8E5B1-0D91-4643-B70B-3D065C8674E0}" dt="2026-09-23T17:26:56.132" v="180" actId="47"/>
+        <pc:sldMkLst>
+          <pc:docMk/>
+          <pc:sldMk cId="2148290662" sldId="333"/>
+        </pc:sldMkLst>
+      </pc:sldChg>
     </pc:docChg>
   </pc:docChgLst>
 </pc:chgInfo>
@@ -292,7 +471,7 @@
           <a:p>
             <a:fld id="{99A959E3-8550-42F9-8921-EBDBCF9A1669}" type="datetimeFigureOut">
               <a:rPr lang="en-US" smtClean="0"/>
-              <a:t>9/20/2026</a:t>
+              <a:t>9/23/2026</a:t>
             </a:fld>
             <a:endParaRPr lang="en-US"/>
           </a:p>
@@ -457,7 +636,7 @@
           <a:p>
             <a:fld id="{34EE5F19-4F90-8B48-A21B-2B05369B7F3C}" type="datetimeFigureOut">
               <a:rPr lang="en-US" smtClean="0"/>
-              <a:t>9/20/2026</a:t>
+              <a:t>9/23/2026</a:t>
             </a:fld>
             <a:endParaRPr lang="en-US"/>
           </a:p>
@@ -1760,185 +1939,12 @@
           <a:p>
             <a:r>
               <a:rPr lang="en-US" dirty="0"/>
-              <a:t>Wikipedia:  </a:t>
-            </a:r>
-            <a:r>
-              <a:rPr lang="en-US" sz="1200" b="1" i="0" kern="1200" dirty="0">
-                <a:solidFill>
-                  <a:schemeClr val="tx1"/>
-                </a:solidFill>
-                <a:effectLst/>
-                <a:latin typeface="+mn-lt"/>
-                <a:ea typeface="+mn-ea"/>
-                <a:cs typeface="+mn-cs"/>
-              </a:rPr>
-              <a:t>Database normalization</a:t>
-            </a:r>
-            <a:r>
-              <a:rPr lang="en-US" sz="1200" b="0" i="0" kern="1200" dirty="0">
-                <a:solidFill>
-                  <a:schemeClr val="tx1"/>
-                </a:solidFill>
-                <a:effectLst/>
-                <a:latin typeface="+mn-lt"/>
-                <a:ea typeface="+mn-ea"/>
-                <a:cs typeface="+mn-cs"/>
-              </a:rPr>
-              <a:t> is the process of structuring a </a:t>
-            </a:r>
-            <a:r>
-              <a:rPr lang="en-US" sz="1200" b="0" i="0" u="none" strike="noStrike" kern="1200" dirty="0">
-                <a:solidFill>
-                  <a:schemeClr val="tx1"/>
-                </a:solidFill>
-                <a:effectLst/>
-                <a:latin typeface="+mn-lt"/>
-                <a:ea typeface="+mn-ea"/>
-                <a:cs typeface="+mn-cs"/>
-                <a:hlinkClick r:id="rId3" tooltip="Relational database"/>
-              </a:rPr>
-              <a:t>relational database</a:t>
-            </a:r>
-            <a:r>
-              <a:rPr lang="en-US" sz="1200" b="0" i="0" kern="1200" dirty="0">
-                <a:solidFill>
-                  <a:schemeClr val="tx1"/>
-                </a:solidFill>
-                <a:effectLst/>
-                <a:latin typeface="+mn-lt"/>
-                <a:ea typeface="+mn-ea"/>
-                <a:cs typeface="+mn-cs"/>
-              </a:rPr>
-              <a:t> in accordance with a series of so-called </a:t>
-            </a:r>
-            <a:r>
-              <a:rPr lang="en-US" sz="1200" b="0" i="0" u="none" strike="noStrike" kern="1200" dirty="0">
-                <a:solidFill>
-                  <a:schemeClr val="tx1"/>
-                </a:solidFill>
-                <a:effectLst/>
-                <a:latin typeface="+mn-lt"/>
-                <a:ea typeface="+mn-ea"/>
-                <a:cs typeface="+mn-cs"/>
-                <a:hlinkClick r:id="rId4" tooltip="Database normalization"/>
-              </a:rPr>
-              <a:t>normal forms</a:t>
-            </a:r>
-            <a:r>
-              <a:rPr lang="en-US" sz="1200" b="0" i="0" kern="1200" dirty="0">
-                <a:solidFill>
-                  <a:schemeClr val="tx1"/>
-                </a:solidFill>
-                <a:effectLst/>
-                <a:latin typeface="+mn-lt"/>
-                <a:ea typeface="+mn-ea"/>
-                <a:cs typeface="+mn-cs"/>
-              </a:rPr>
-              <a:t> in order to reduce </a:t>
-            </a:r>
-            <a:r>
-              <a:rPr lang="en-US" sz="1200" b="0" i="0" u="none" strike="noStrike" kern="1200" dirty="0">
-                <a:solidFill>
-                  <a:schemeClr val="tx1"/>
-                </a:solidFill>
-                <a:effectLst/>
-                <a:latin typeface="+mn-lt"/>
-                <a:ea typeface="+mn-ea"/>
-                <a:cs typeface="+mn-cs"/>
-                <a:hlinkClick r:id="rId5" tooltip="Data redundancy"/>
-              </a:rPr>
-              <a:t>data redundancy</a:t>
-            </a:r>
-            <a:r>
-              <a:rPr lang="en-US" sz="1200" b="0" i="0" kern="1200" dirty="0">
-                <a:solidFill>
-                  <a:schemeClr val="tx1"/>
-                </a:solidFill>
-                <a:effectLst/>
-                <a:latin typeface="+mn-lt"/>
-                <a:ea typeface="+mn-ea"/>
-                <a:cs typeface="+mn-cs"/>
-              </a:rPr>
-              <a:t> and improve </a:t>
-            </a:r>
-            <a:r>
-              <a:rPr lang="en-US" sz="1200" b="0" i="0" u="none" strike="noStrike" kern="1200" dirty="0">
-                <a:solidFill>
-                  <a:schemeClr val="tx1"/>
-                </a:solidFill>
-                <a:effectLst/>
-                <a:latin typeface="+mn-lt"/>
-                <a:ea typeface="+mn-ea"/>
-                <a:cs typeface="+mn-cs"/>
-                <a:hlinkClick r:id="rId6" tooltip="Data integrity"/>
-              </a:rPr>
-              <a:t>data integrity</a:t>
-            </a:r>
-            <a:r>
-              <a:rPr lang="en-US" sz="1200" b="0" i="0" kern="1200" dirty="0">
-                <a:solidFill>
-                  <a:schemeClr val="tx1"/>
-                </a:solidFill>
-                <a:effectLst/>
-                <a:latin typeface="+mn-lt"/>
-                <a:ea typeface="+mn-ea"/>
-                <a:cs typeface="+mn-cs"/>
-              </a:rPr>
-              <a:t>. </a:t>
-            </a:r>
-          </a:p>
-          <a:p>
-            <a:endParaRPr lang="en-US" dirty="0"/>
-          </a:p>
-          <a:p>
-            <a:r>
-              <a:rPr lang="en-US" dirty="0"/>
-              <a:t>Via 1 of the links:</a:t>
-            </a:r>
-          </a:p>
-          <a:p>
-            <a:r>
-              <a:rPr lang="en-US" sz="1200" b="0" i="0" kern="1200" dirty="0">
-                <a:solidFill>
-                  <a:schemeClr val="tx1"/>
-                </a:solidFill>
-                <a:effectLst/>
-                <a:latin typeface="+mn-lt"/>
-                <a:ea typeface="+mn-ea"/>
-                <a:cs typeface="+mn-cs"/>
-              </a:rPr>
-              <a:t>A database is in third normal form if it satisfies the following conditions:</a:t>
-            </a:r>
-          </a:p>
-          <a:p>
-            <a:r>
-              <a:rPr lang="en-US" sz="1200" b="0" i="0" kern="1200" dirty="0">
-                <a:solidFill>
-                  <a:schemeClr val="tx1"/>
-                </a:solidFill>
-                <a:effectLst/>
-                <a:latin typeface="+mn-lt"/>
-                <a:ea typeface="+mn-ea"/>
-                <a:cs typeface="+mn-cs"/>
-              </a:rPr>
-              <a:t>It is in second normal form</a:t>
-            </a:r>
-          </a:p>
-          <a:p>
-            <a:r>
-              <a:rPr lang="en-US" sz="1200" b="0" i="0" kern="1200" dirty="0">
-                <a:solidFill>
-                  <a:schemeClr val="tx1"/>
-                </a:solidFill>
-                <a:effectLst/>
-                <a:latin typeface="+mn-lt"/>
-                <a:ea typeface="+mn-ea"/>
-                <a:cs typeface="+mn-cs"/>
-              </a:rPr>
-              <a:t>There is no transitive functional dependency - By transitive functional dependency, we mean we have the following relationships in the table: A is functionally dependent on B, and B is functionally dependent on C. In this case, C is transitively dependent on A via B.</a:t>
-            </a:r>
-          </a:p>
-          <a:p>
+              <a:t>All of the data for a given customer must be repeated when another sales rep</a:t>
+            </a:r>
+            <a:r>
+              <a:rPr lang="en-US" baseline="0" dirty="0"/>
+              <a:t> is assigned to that customer</a:t>
+            </a:r>
             <a:endParaRPr lang="en-US" dirty="0"/>
           </a:p>
         </p:txBody>
@@ -1958,18 +1964,29 @@
           <a:bodyPr/>
           <a:lstStyle/>
           <a:p>
-            <a:fld id="{49A7557B-27E6-714E-8DF7-07E79EF318B5}" type="slidenum">
-              <a:rPr lang="en-US" smtClean="0"/>
-              <a:t>26</a:t>
+            <a:fld id="{60DFA87B-D22B-4447-BB2F-F863025D4677}" type="slidenum">
+              <a:rPr lang="en-US" smtClean="0">
+                <a:solidFill>
+                  <a:prstClr val="black"/>
+                </a:solidFill>
+                <a:latin typeface="Calibri"/>
+              </a:rPr>
+              <a:pPr/>
+              <a:t>25</a:t>
             </a:fld>
-            <a:endParaRPr lang="en-US"/>
+            <a:endParaRPr lang="en-US">
+              <a:solidFill>
+                <a:prstClr val="black"/>
+              </a:solidFill>
+              <a:latin typeface="Calibri"/>
+            </a:endParaRPr>
           </a:p>
         </p:txBody>
       </p:sp>
     </p:spTree>
     <p:extLst>
       <p:ext uri="{BB962C8B-B14F-4D97-AF65-F5344CB8AC3E}">
-        <p14:creationId xmlns:p14="http://schemas.microsoft.com/office/powerpoint/2010/main" val="1463015562"/>
+        <p14:creationId xmlns:p14="http://schemas.microsoft.com/office/powerpoint/2010/main" val="2221482672"/>
       </p:ext>
     </p:extLst>
   </p:cSld>
@@ -2023,6 +2040,14 @@
           <a:bodyPr/>
           <a:lstStyle/>
           <a:p>
+            <a:r>
+              <a:rPr lang="en-US" dirty="0"/>
+              <a:t>If</a:t>
+            </a:r>
+            <a:r>
+              <a:rPr lang="en-US" baseline="0" dirty="0"/>
+              <a:t> lone star distributors change its name, then you’d have to update it in three spots</a:t>
+            </a:r>
             <a:endParaRPr lang="en-US" dirty="0"/>
           </a:p>
         </p:txBody>
@@ -2050,7 +2075,7 @@
                 <a:latin typeface="Calibri"/>
               </a:rPr>
               <a:pPr/>
-              <a:t>27</a:t>
+              <a:t>26</a:t>
             </a:fld>
             <a:endParaRPr lang="en-US">
               <a:solidFill>
@@ -2064,7 +2089,7 @@
     </p:spTree>
     <p:extLst>
       <p:ext uri="{BB962C8B-B14F-4D97-AF65-F5344CB8AC3E}">
-        <p14:creationId xmlns:p14="http://schemas.microsoft.com/office/powerpoint/2010/main" val="1188900813"/>
+        <p14:creationId xmlns:p14="http://schemas.microsoft.com/office/powerpoint/2010/main" val="2221482672"/>
       </p:ext>
     </p:extLst>
   </p:cSld>
@@ -2118,10 +2143,24 @@
           <a:bodyPr/>
           <a:lstStyle/>
           <a:p>
-            <a:pPr marL="0" indent="0">
-              <a:buNone/>
-            </a:pPr>
+            <a:r>
+              <a:rPr lang="en-US" dirty="0"/>
+              <a:t>Cannot enter</a:t>
+            </a:r>
+            <a:r>
+              <a:rPr lang="en-US" baseline="0" dirty="0"/>
+              <a:t> data for a new department until you have at least one employee assigned to the department</a:t>
+            </a:r>
+          </a:p>
+          <a:p>
             <a:endParaRPr lang="en-US" baseline="0" dirty="0"/>
+          </a:p>
+          <a:p>
+            <a:r>
+              <a:rPr lang="en-US" baseline="0" dirty="0"/>
+              <a:t>Cannot add a new employee unless you’re ready to assign him/her to a particular department</a:t>
+            </a:r>
+            <a:endParaRPr lang="en-US" dirty="0"/>
           </a:p>
         </p:txBody>
       </p:sp>
@@ -2148,7 +2187,7 @@
                 <a:latin typeface="Calibri"/>
               </a:rPr>
               <a:pPr/>
-              <a:t>28</a:t>
+              <a:t>27</a:t>
             </a:fld>
             <a:endParaRPr lang="en-US">
               <a:solidFill>
@@ -2162,7 +2201,7 @@
     </p:spTree>
     <p:extLst>
       <p:ext uri="{BB962C8B-B14F-4D97-AF65-F5344CB8AC3E}">
-        <p14:creationId xmlns:p14="http://schemas.microsoft.com/office/powerpoint/2010/main" val="1188900813"/>
+        <p14:creationId xmlns:p14="http://schemas.microsoft.com/office/powerpoint/2010/main" val="2651296320"/>
       </p:ext>
     </p:extLst>
   </p:cSld>
@@ -2277,10 +2316,188 @@
           <a:bodyPr/>
           <a:lstStyle/>
           <a:p>
-            <a:endParaRPr lang="en-US" baseline="0" dirty="0"/>
-          </a:p>
-          <a:p>
-            <a:endParaRPr lang="en-US" baseline="0" dirty="0"/>
+            <a:r>
+              <a:rPr lang="en-US" dirty="0"/>
+              <a:t>Wikipedia:  </a:t>
+            </a:r>
+            <a:r>
+              <a:rPr lang="en-US" sz="1200" b="1" i="0" kern="1200" dirty="0">
+                <a:solidFill>
+                  <a:schemeClr val="tx1"/>
+                </a:solidFill>
+                <a:effectLst/>
+                <a:latin typeface="+mn-lt"/>
+                <a:ea typeface="+mn-ea"/>
+                <a:cs typeface="+mn-cs"/>
+              </a:rPr>
+              <a:t>Database normalization</a:t>
+            </a:r>
+            <a:r>
+              <a:rPr lang="en-US" sz="1200" b="0" i="0" kern="1200" dirty="0">
+                <a:solidFill>
+                  <a:schemeClr val="tx1"/>
+                </a:solidFill>
+                <a:effectLst/>
+                <a:latin typeface="+mn-lt"/>
+                <a:ea typeface="+mn-ea"/>
+                <a:cs typeface="+mn-cs"/>
+              </a:rPr>
+              <a:t> is the process of structuring a </a:t>
+            </a:r>
+            <a:r>
+              <a:rPr lang="en-US" sz="1200" b="0" i="0" u="none" strike="noStrike" kern="1200" dirty="0">
+                <a:solidFill>
+                  <a:schemeClr val="tx1"/>
+                </a:solidFill>
+                <a:effectLst/>
+                <a:latin typeface="+mn-lt"/>
+                <a:ea typeface="+mn-ea"/>
+                <a:cs typeface="+mn-cs"/>
+                <a:hlinkClick r:id="rId3" tooltip="Relational database"/>
+              </a:rPr>
+              <a:t>relational database</a:t>
+            </a:r>
+            <a:r>
+              <a:rPr lang="en-US" sz="1200" b="0" i="0" kern="1200" dirty="0">
+                <a:solidFill>
+                  <a:schemeClr val="tx1"/>
+                </a:solidFill>
+                <a:effectLst/>
+                <a:latin typeface="+mn-lt"/>
+                <a:ea typeface="+mn-ea"/>
+                <a:cs typeface="+mn-cs"/>
+              </a:rPr>
+              <a:t> in accordance with a series of so-called </a:t>
+            </a:r>
+            <a:r>
+              <a:rPr lang="en-US" sz="1200" b="0" i="0" u="none" strike="noStrike" kern="1200" dirty="0">
+                <a:solidFill>
+                  <a:schemeClr val="tx1"/>
+                </a:solidFill>
+                <a:effectLst/>
+                <a:latin typeface="+mn-lt"/>
+                <a:ea typeface="+mn-ea"/>
+                <a:cs typeface="+mn-cs"/>
+                <a:hlinkClick r:id="rId4" tooltip="Database normalization"/>
+              </a:rPr>
+              <a:t>normal forms</a:t>
+            </a:r>
+            <a:r>
+              <a:rPr lang="en-US" sz="1200" b="0" i="0" kern="1200" dirty="0">
+                <a:solidFill>
+                  <a:schemeClr val="tx1"/>
+                </a:solidFill>
+                <a:effectLst/>
+                <a:latin typeface="+mn-lt"/>
+                <a:ea typeface="+mn-ea"/>
+                <a:cs typeface="+mn-cs"/>
+              </a:rPr>
+              <a:t> in order to reduce </a:t>
+            </a:r>
+            <a:r>
+              <a:rPr lang="en-US" sz="1200" b="0" i="0" u="none" strike="noStrike" kern="1200" dirty="0">
+                <a:solidFill>
+                  <a:schemeClr val="tx1"/>
+                </a:solidFill>
+                <a:effectLst/>
+                <a:latin typeface="+mn-lt"/>
+                <a:ea typeface="+mn-ea"/>
+                <a:cs typeface="+mn-cs"/>
+                <a:hlinkClick r:id="rId5" tooltip="Data redundancy"/>
+              </a:rPr>
+              <a:t>data redundancy</a:t>
+            </a:r>
+            <a:r>
+              <a:rPr lang="en-US" sz="1200" b="0" i="0" kern="1200" dirty="0">
+                <a:solidFill>
+                  <a:schemeClr val="tx1"/>
+                </a:solidFill>
+                <a:effectLst/>
+                <a:latin typeface="+mn-lt"/>
+                <a:ea typeface="+mn-ea"/>
+                <a:cs typeface="+mn-cs"/>
+              </a:rPr>
+              <a:t> and improve </a:t>
+            </a:r>
+            <a:r>
+              <a:rPr lang="en-US" sz="1200" b="0" i="0" u="none" strike="noStrike" kern="1200" dirty="0">
+                <a:solidFill>
+                  <a:schemeClr val="tx1"/>
+                </a:solidFill>
+                <a:effectLst/>
+                <a:latin typeface="+mn-lt"/>
+                <a:ea typeface="+mn-ea"/>
+                <a:cs typeface="+mn-cs"/>
+                <a:hlinkClick r:id="rId6" tooltip="Data integrity"/>
+              </a:rPr>
+              <a:t>data integrity</a:t>
+            </a:r>
+            <a:r>
+              <a:rPr lang="en-US" sz="1200" b="0" i="0" kern="1200" dirty="0">
+                <a:solidFill>
+                  <a:schemeClr val="tx1"/>
+                </a:solidFill>
+                <a:effectLst/>
+                <a:latin typeface="+mn-lt"/>
+                <a:ea typeface="+mn-ea"/>
+                <a:cs typeface="+mn-cs"/>
+              </a:rPr>
+              <a:t>. </a:t>
+            </a:r>
+          </a:p>
+          <a:p>
+            <a:endParaRPr lang="en-US" dirty="0"/>
+          </a:p>
+          <a:p>
+            <a:r>
+              <a:rPr lang="en-US" dirty="0"/>
+              <a:t>Via 1 of the links:</a:t>
+            </a:r>
+          </a:p>
+          <a:p>
+            <a:r>
+              <a:rPr lang="en-US" sz="1200" b="0" i="0" kern="1200" dirty="0">
+                <a:solidFill>
+                  <a:schemeClr val="tx1"/>
+                </a:solidFill>
+                <a:effectLst/>
+                <a:latin typeface="+mn-lt"/>
+                <a:ea typeface="+mn-ea"/>
+                <a:cs typeface="+mn-cs"/>
+              </a:rPr>
+              <a:t>A database is in third normal form if it satisfies the following conditions:</a:t>
+            </a:r>
+          </a:p>
+          <a:p>
+            <a:r>
+              <a:rPr lang="en-US" sz="1200" b="0" i="0" kern="1200" dirty="0">
+                <a:solidFill>
+                  <a:schemeClr val="tx1"/>
+                </a:solidFill>
+                <a:effectLst/>
+                <a:latin typeface="+mn-lt"/>
+                <a:ea typeface="+mn-ea"/>
+                <a:cs typeface="+mn-cs"/>
+              </a:rPr>
+              <a:t>It is in second normal form</a:t>
+            </a:r>
+          </a:p>
+          <a:p>
+            <a:r>
+              <a:rPr lang="en-US" sz="1200" b="0" i="0" kern="1200" dirty="0">
+                <a:solidFill>
+                  <a:schemeClr val="tx1"/>
+                </a:solidFill>
+                <a:effectLst/>
+                <a:latin typeface="+mn-lt"/>
+                <a:ea typeface="+mn-ea"/>
+                <a:cs typeface="+mn-cs"/>
+              </a:rPr>
+              <a:t>There is no transitive functional dependency - By transitive functional dependency, we mean we have the following relationships in the table: A is functionally dependent on B, and B is functionally dependent on C. In this case, C is transitively dependent on A via B.</a:t>
+            </a:r>
+          </a:p>
+          <a:p>
+            <a:endParaRPr lang="en-US" dirty="0"/>
           </a:p>
         </p:txBody>
       </p:sp>
@@ -2299,29 +2516,18 @@
           <a:bodyPr/>
           <a:lstStyle/>
           <a:p>
-            <a:fld id="{60DFA87B-D22B-4447-BB2F-F863025D4677}" type="slidenum">
-              <a:rPr lang="en-US" smtClean="0">
-                <a:solidFill>
-                  <a:prstClr val="black"/>
-                </a:solidFill>
-                <a:latin typeface="Calibri"/>
-              </a:rPr>
-              <a:pPr/>
+            <a:fld id="{49A7557B-27E6-714E-8DF7-07E79EF318B5}" type="slidenum">
+              <a:rPr lang="en-US" smtClean="0"/>
               <a:t>29</a:t>
             </a:fld>
-            <a:endParaRPr lang="en-US">
-              <a:solidFill>
-                <a:prstClr val="black"/>
-              </a:solidFill>
-              <a:latin typeface="Calibri"/>
-            </a:endParaRPr>
+            <a:endParaRPr lang="en-US"/>
           </a:p>
         </p:txBody>
       </p:sp>
     </p:spTree>
     <p:extLst>
       <p:ext uri="{BB962C8B-B14F-4D97-AF65-F5344CB8AC3E}">
-        <p14:creationId xmlns:p14="http://schemas.microsoft.com/office/powerpoint/2010/main" val="1188900813"/>
+        <p14:creationId xmlns:p14="http://schemas.microsoft.com/office/powerpoint/2010/main" val="1463015562"/>
       </p:ext>
     </p:extLst>
   </p:cSld>
@@ -2375,14 +2581,6 @@
           <a:bodyPr/>
           <a:lstStyle/>
           <a:p>
-            <a:r>
-              <a:rPr lang="en-US" dirty="0"/>
-              <a:t>Anytime you see grumpy cat, we’ll visit</a:t>
-            </a:r>
-            <a:r>
-              <a:rPr lang="en-US" baseline="0" dirty="0"/>
-              <a:t> this example</a:t>
-            </a:r>
             <a:endParaRPr lang="en-US" dirty="0"/>
           </a:p>
         </p:txBody>
@@ -2402,18 +2600,29 @@
           <a:bodyPr/>
           <a:lstStyle/>
           <a:p>
-            <a:fld id="{49A7557B-27E6-714E-8DF7-07E79EF318B5}" type="slidenum">
-              <a:rPr lang="en-US" smtClean="0"/>
-              <a:t>32</a:t>
+            <a:fld id="{60DFA87B-D22B-4447-BB2F-F863025D4677}" type="slidenum">
+              <a:rPr lang="en-US" smtClean="0">
+                <a:solidFill>
+                  <a:prstClr val="black"/>
+                </a:solidFill>
+                <a:latin typeface="Calibri"/>
+              </a:rPr>
+              <a:pPr/>
+              <a:t>30</a:t>
             </a:fld>
-            <a:endParaRPr lang="en-US"/>
+            <a:endParaRPr lang="en-US">
+              <a:solidFill>
+                <a:prstClr val="black"/>
+              </a:solidFill>
+              <a:latin typeface="Calibri"/>
+            </a:endParaRPr>
           </a:p>
         </p:txBody>
       </p:sp>
     </p:spTree>
     <p:extLst>
       <p:ext uri="{BB962C8B-B14F-4D97-AF65-F5344CB8AC3E}">
-        <p14:creationId xmlns:p14="http://schemas.microsoft.com/office/powerpoint/2010/main" val="4254824889"/>
+        <p14:creationId xmlns:p14="http://schemas.microsoft.com/office/powerpoint/2010/main" val="1188900813"/>
       </p:ext>
     </p:extLst>
   </p:cSld>
@@ -2442,47 +2651,76 @@
       </p:grpSpPr>
       <p:sp>
         <p:nvSpPr>
-          <p:cNvPr id="76802" name="Rectangle 2"/>
+          <p:cNvPr id="2" name="Slide Image Placeholder 1"/>
           <p:cNvSpPr>
-            <a:spLocks noGrp="1" noRot="1" noChangeAspect="1" noChangeArrowheads="1" noTextEdit="1"/>
+            <a:spLocks noGrp="1" noRot="1" noChangeAspect="1"/>
           </p:cNvSpPr>
           <p:nvPr>
             <p:ph type="sldImg"/>
           </p:nvPr>
         </p:nvSpPr>
-        <p:spPr>
-          <a:ln/>
-        </p:spPr>
-      </p:sp>
-      <p:sp>
-        <p:nvSpPr>
-          <p:cNvPr id="76803" name="Rectangle 3"/>
+        <p:spPr/>
+      </p:sp>
+      <p:sp>
+        <p:nvSpPr>
+          <p:cNvPr id="3" name="Notes Placeholder 2"/>
           <p:cNvSpPr>
-            <a:spLocks noGrp="1" noChangeArrowheads="1"/>
+            <a:spLocks noGrp="1"/>
           </p:cNvSpPr>
           <p:nvPr>
             <p:ph type="body" idx="1"/>
           </p:nvPr>
         </p:nvSpPr>
-        <p:spPr>
-          <a:noFill/>
-          <a:ln/>
-        </p:spPr>
+        <p:spPr/>
         <p:txBody>
           <a:bodyPr/>
           <a:lstStyle/>
           <a:p>
-            <a:r>
-              <a:rPr lang="en-US" dirty="0"/>
-              <a:t>Run through this process in class</a:t>
-            </a:r>
+            <a:pPr marL="0" indent="0">
+              <a:buNone/>
+            </a:pPr>
+            <a:endParaRPr lang="en-US" baseline="0" dirty="0"/>
+          </a:p>
+        </p:txBody>
+      </p:sp>
+      <p:sp>
+        <p:nvSpPr>
+          <p:cNvPr id="4" name="Slide Number Placeholder 3"/>
+          <p:cNvSpPr>
+            <a:spLocks noGrp="1"/>
+          </p:cNvSpPr>
+          <p:nvPr>
+            <p:ph type="sldNum" sz="quarter" idx="10"/>
+          </p:nvPr>
+        </p:nvSpPr>
+        <p:spPr/>
+        <p:txBody>
+          <a:bodyPr/>
+          <a:lstStyle/>
+          <a:p>
+            <a:fld id="{60DFA87B-D22B-4447-BB2F-F863025D4677}" type="slidenum">
+              <a:rPr lang="en-US" smtClean="0">
+                <a:solidFill>
+                  <a:prstClr val="black"/>
+                </a:solidFill>
+                <a:latin typeface="Calibri"/>
+              </a:rPr>
+              <a:pPr/>
+              <a:t>31</a:t>
+            </a:fld>
+            <a:endParaRPr lang="en-US">
+              <a:solidFill>
+                <a:prstClr val="black"/>
+              </a:solidFill>
+              <a:latin typeface="Calibri"/>
+            </a:endParaRPr>
           </a:p>
         </p:txBody>
       </p:sp>
     </p:spTree>
     <p:extLst>
       <p:ext uri="{BB962C8B-B14F-4D97-AF65-F5344CB8AC3E}">
-        <p14:creationId xmlns:p14="http://schemas.microsoft.com/office/powerpoint/2010/main" val="732395676"/>
+        <p14:creationId xmlns:p14="http://schemas.microsoft.com/office/powerpoint/2010/main" val="1188900813"/>
       </p:ext>
     </p:extLst>
   </p:cSld>
@@ -2536,10 +2774,10 @@
           <a:bodyPr/>
           <a:lstStyle/>
           <a:p>
-            <a:r>
-              <a:rPr lang="en-US" dirty="0"/>
-              <a:t>See notes / do on whiteboard</a:t>
-            </a:r>
+            <a:endParaRPr lang="en-US" baseline="0" dirty="0"/>
+          </a:p>
+          <a:p>
+            <a:endParaRPr lang="en-US" baseline="0" dirty="0"/>
           </a:p>
         </p:txBody>
       </p:sp>
@@ -2558,9 +2796,268 @@
           <a:bodyPr/>
           <a:lstStyle/>
           <a:p>
+            <a:fld id="{60DFA87B-D22B-4447-BB2F-F863025D4677}" type="slidenum">
+              <a:rPr lang="en-US" smtClean="0">
+                <a:solidFill>
+                  <a:prstClr val="black"/>
+                </a:solidFill>
+                <a:latin typeface="Calibri"/>
+              </a:rPr>
+              <a:pPr/>
+              <a:t>32</a:t>
+            </a:fld>
+            <a:endParaRPr lang="en-US">
+              <a:solidFill>
+                <a:prstClr val="black"/>
+              </a:solidFill>
+              <a:latin typeface="Calibri"/>
+            </a:endParaRPr>
+          </a:p>
+        </p:txBody>
+      </p:sp>
+    </p:spTree>
+    <p:extLst>
+      <p:ext uri="{BB962C8B-B14F-4D97-AF65-F5344CB8AC3E}">
+        <p14:creationId xmlns:p14="http://schemas.microsoft.com/office/powerpoint/2010/main" val="1188900813"/>
+      </p:ext>
+    </p:extLst>
+  </p:cSld>
+  <p:clrMapOvr>
+    <a:masterClrMapping/>
+  </p:clrMapOvr>
+</p:notes>
+</file>
+
+<file path=ppt/notesSlides/notesSlide24.xml><?xml version="1.0" encoding="utf-8"?>
+<p:notes xmlns:a="http://schemas.openxmlformats.org/drawingml/2006/main" xmlns:r="http://schemas.openxmlformats.org/officeDocument/2006/relationships" xmlns:p="http://schemas.openxmlformats.org/presentationml/2006/main">
+  <p:cSld>
+    <p:spTree>
+      <p:nvGrpSpPr>
+        <p:cNvPr id="1" name=""/>
+        <p:cNvGrpSpPr/>
+        <p:nvPr/>
+      </p:nvGrpSpPr>
+      <p:grpSpPr>
+        <a:xfrm>
+          <a:off x="0" y="0"/>
+          <a:ext cx="0" cy="0"/>
+          <a:chOff x="0" y="0"/>
+          <a:chExt cx="0" cy="0"/>
+        </a:xfrm>
+      </p:grpSpPr>
+      <p:sp>
+        <p:nvSpPr>
+          <p:cNvPr id="2" name="Slide Image Placeholder 1"/>
+          <p:cNvSpPr>
+            <a:spLocks noGrp="1" noRot="1" noChangeAspect="1"/>
+          </p:cNvSpPr>
+          <p:nvPr>
+            <p:ph type="sldImg"/>
+          </p:nvPr>
+        </p:nvSpPr>
+        <p:spPr/>
+      </p:sp>
+      <p:sp>
+        <p:nvSpPr>
+          <p:cNvPr id="3" name="Notes Placeholder 2"/>
+          <p:cNvSpPr>
+            <a:spLocks noGrp="1"/>
+          </p:cNvSpPr>
+          <p:nvPr>
+            <p:ph type="body" idx="1"/>
+          </p:nvPr>
+        </p:nvSpPr>
+        <p:spPr/>
+        <p:txBody>
+          <a:bodyPr/>
+          <a:lstStyle/>
+          <a:p>
+            <a:r>
+              <a:rPr lang="en-US" dirty="0"/>
+              <a:t>Anytime you see grumpy cat, we’ll visit</a:t>
+            </a:r>
+            <a:r>
+              <a:rPr lang="en-US" baseline="0" dirty="0"/>
+              <a:t> this example</a:t>
+            </a:r>
+            <a:endParaRPr lang="en-US" dirty="0"/>
+          </a:p>
+        </p:txBody>
+      </p:sp>
+      <p:sp>
+        <p:nvSpPr>
+          <p:cNvPr id="4" name="Slide Number Placeholder 3"/>
+          <p:cNvSpPr>
+            <a:spLocks noGrp="1"/>
+          </p:cNvSpPr>
+          <p:nvPr>
+            <p:ph type="sldNum" sz="quarter" idx="10"/>
+          </p:nvPr>
+        </p:nvSpPr>
+        <p:spPr/>
+        <p:txBody>
+          <a:bodyPr/>
+          <a:lstStyle/>
+          <a:p>
             <a:fld id="{49A7557B-27E6-714E-8DF7-07E79EF318B5}" type="slidenum">
               <a:rPr lang="en-US" smtClean="0"/>
-              <a:t>34</a:t>
+              <a:t>35</a:t>
+            </a:fld>
+            <a:endParaRPr lang="en-US"/>
+          </a:p>
+        </p:txBody>
+      </p:sp>
+    </p:spTree>
+    <p:extLst>
+      <p:ext uri="{BB962C8B-B14F-4D97-AF65-F5344CB8AC3E}">
+        <p14:creationId xmlns:p14="http://schemas.microsoft.com/office/powerpoint/2010/main" val="4254824889"/>
+      </p:ext>
+    </p:extLst>
+  </p:cSld>
+  <p:clrMapOvr>
+    <a:masterClrMapping/>
+  </p:clrMapOvr>
+</p:notes>
+</file>
+
+<file path=ppt/notesSlides/notesSlide25.xml><?xml version="1.0" encoding="utf-8"?>
+<p:notes xmlns:a="http://schemas.openxmlformats.org/drawingml/2006/main" xmlns:r="http://schemas.openxmlformats.org/officeDocument/2006/relationships" xmlns:p="http://schemas.openxmlformats.org/presentationml/2006/main">
+  <p:cSld>
+    <p:spTree>
+      <p:nvGrpSpPr>
+        <p:cNvPr id="1" name=""/>
+        <p:cNvGrpSpPr/>
+        <p:nvPr/>
+      </p:nvGrpSpPr>
+      <p:grpSpPr>
+        <a:xfrm>
+          <a:off x="0" y="0"/>
+          <a:ext cx="0" cy="0"/>
+          <a:chOff x="0" y="0"/>
+          <a:chExt cx="0" cy="0"/>
+        </a:xfrm>
+      </p:grpSpPr>
+      <p:sp>
+        <p:nvSpPr>
+          <p:cNvPr id="76802" name="Rectangle 2"/>
+          <p:cNvSpPr>
+            <a:spLocks noGrp="1" noRot="1" noChangeAspect="1" noChangeArrowheads="1" noTextEdit="1"/>
+          </p:cNvSpPr>
+          <p:nvPr>
+            <p:ph type="sldImg"/>
+          </p:nvPr>
+        </p:nvSpPr>
+        <p:spPr>
+          <a:ln/>
+        </p:spPr>
+      </p:sp>
+      <p:sp>
+        <p:nvSpPr>
+          <p:cNvPr id="76803" name="Rectangle 3"/>
+          <p:cNvSpPr>
+            <a:spLocks noGrp="1" noChangeArrowheads="1"/>
+          </p:cNvSpPr>
+          <p:nvPr>
+            <p:ph type="body" idx="1"/>
+          </p:nvPr>
+        </p:nvSpPr>
+        <p:spPr>
+          <a:noFill/>
+          <a:ln/>
+        </p:spPr>
+        <p:txBody>
+          <a:bodyPr/>
+          <a:lstStyle/>
+          <a:p>
+            <a:r>
+              <a:rPr lang="en-US" dirty="0"/>
+              <a:t>Run through this process in class</a:t>
+            </a:r>
+          </a:p>
+        </p:txBody>
+      </p:sp>
+    </p:spTree>
+    <p:extLst>
+      <p:ext uri="{BB962C8B-B14F-4D97-AF65-F5344CB8AC3E}">
+        <p14:creationId xmlns:p14="http://schemas.microsoft.com/office/powerpoint/2010/main" val="732395676"/>
+      </p:ext>
+    </p:extLst>
+  </p:cSld>
+  <p:clrMapOvr>
+    <a:masterClrMapping/>
+  </p:clrMapOvr>
+</p:notes>
+</file>
+
+<file path=ppt/notesSlides/notesSlide26.xml><?xml version="1.0" encoding="utf-8"?>
+<p:notes xmlns:a="http://schemas.openxmlformats.org/drawingml/2006/main" xmlns:r="http://schemas.openxmlformats.org/officeDocument/2006/relationships" xmlns:p="http://schemas.openxmlformats.org/presentationml/2006/main">
+  <p:cSld>
+    <p:spTree>
+      <p:nvGrpSpPr>
+        <p:cNvPr id="1" name=""/>
+        <p:cNvGrpSpPr/>
+        <p:nvPr/>
+      </p:nvGrpSpPr>
+      <p:grpSpPr>
+        <a:xfrm>
+          <a:off x="0" y="0"/>
+          <a:ext cx="0" cy="0"/>
+          <a:chOff x="0" y="0"/>
+          <a:chExt cx="0" cy="0"/>
+        </a:xfrm>
+      </p:grpSpPr>
+      <p:sp>
+        <p:nvSpPr>
+          <p:cNvPr id="2" name="Slide Image Placeholder 1"/>
+          <p:cNvSpPr>
+            <a:spLocks noGrp="1" noRot="1" noChangeAspect="1"/>
+          </p:cNvSpPr>
+          <p:nvPr>
+            <p:ph type="sldImg"/>
+          </p:nvPr>
+        </p:nvSpPr>
+        <p:spPr/>
+      </p:sp>
+      <p:sp>
+        <p:nvSpPr>
+          <p:cNvPr id="3" name="Notes Placeholder 2"/>
+          <p:cNvSpPr>
+            <a:spLocks noGrp="1"/>
+          </p:cNvSpPr>
+          <p:nvPr>
+            <p:ph type="body" idx="1"/>
+          </p:nvPr>
+        </p:nvSpPr>
+        <p:spPr/>
+        <p:txBody>
+          <a:bodyPr/>
+          <a:lstStyle/>
+          <a:p>
+            <a:r>
+              <a:rPr lang="en-US" dirty="0"/>
+              <a:t>See notes / do on whiteboard</a:t>
+            </a:r>
+          </a:p>
+        </p:txBody>
+      </p:sp>
+      <p:sp>
+        <p:nvSpPr>
+          <p:cNvPr id="4" name="Slide Number Placeholder 3"/>
+          <p:cNvSpPr>
+            <a:spLocks noGrp="1"/>
+          </p:cNvSpPr>
+          <p:nvPr>
+            <p:ph type="sldNum" sz="quarter" idx="10"/>
+          </p:nvPr>
+        </p:nvSpPr>
+        <p:spPr/>
+        <p:txBody>
+          <a:bodyPr/>
+          <a:lstStyle/>
+          <a:p>
+            <a:fld id="{49A7557B-27E6-714E-8DF7-07E79EF318B5}" type="slidenum">
+              <a:rPr lang="en-US" smtClean="0"/>
+              <a:t>37</a:t>
             </a:fld>
             <a:endParaRPr lang="en-US"/>
           </a:p>
@@ -3436,7 +3933,7 @@
                 <a:latin typeface="Arial"/>
               </a:rPr>
               <a:pPr/>
-              <a:t>9/20/2026</a:t>
+              <a:t>9/23/2026</a:t>
             </a:fld>
             <a:endParaRPr lang="en-US">
               <a:latin typeface="Arial"/>
@@ -3651,7 +4148,7 @@
                 <a:latin typeface="Arial"/>
               </a:rPr>
               <a:pPr/>
-              <a:t>9/20/2026</a:t>
+              <a:t>9/23/2026</a:t>
             </a:fld>
             <a:endParaRPr lang="en-US">
               <a:latin typeface="Arial"/>
@@ -3846,7 +4343,7 @@
                 <a:latin typeface="Arial"/>
               </a:rPr>
               <a:pPr/>
-              <a:t>9/20/2026</a:t>
+              <a:t>9/23/2026</a:t>
             </a:fld>
             <a:endParaRPr lang="en-US">
               <a:latin typeface="Arial"/>
@@ -4029,7 +4526,7 @@
                 <a:latin typeface="Arial"/>
               </a:rPr>
               <a:pPr/>
-              <a:t>9/20/2026</a:t>
+              <a:t>9/23/2026</a:t>
             </a:fld>
             <a:endParaRPr lang="en-US">
               <a:latin typeface="Arial"/>
@@ -4294,7 +4791,7 @@
                 <a:latin typeface="Arial"/>
               </a:rPr>
               <a:pPr/>
-              <a:t>9/20/2026</a:t>
+              <a:t>9/23/2026</a:t>
             </a:fld>
             <a:endParaRPr lang="en-US">
               <a:latin typeface="Arial"/>
@@ -4631,7 +5128,7 @@
                 <a:latin typeface="Arial"/>
               </a:rPr>
               <a:pPr/>
-              <a:t>9/20/2026</a:t>
+              <a:t>9/23/2026</a:t>
             </a:fld>
             <a:endParaRPr lang="en-US">
               <a:latin typeface="Arial"/>
@@ -5117,7 +5614,7 @@
                 <a:latin typeface="Arial"/>
               </a:rPr>
               <a:pPr/>
-              <a:t>9/20/2026</a:t>
+              <a:t>9/23/2026</a:t>
             </a:fld>
             <a:endParaRPr lang="en-US">
               <a:latin typeface="Arial"/>
@@ -5284,7 +5781,7 @@
                 <a:latin typeface="Arial"/>
               </a:rPr>
               <a:pPr/>
-              <a:t>9/20/2026</a:t>
+              <a:t>9/23/2026</a:t>
             </a:fld>
             <a:endParaRPr lang="en-US">
               <a:latin typeface="Arial"/>
@@ -5394,7 +5891,7 @@
                 <a:latin typeface="Arial"/>
               </a:rPr>
               <a:pPr/>
-              <a:t>9/20/2026</a:t>
+              <a:t>9/23/2026</a:t>
             </a:fld>
             <a:endParaRPr lang="en-US">
               <a:latin typeface="Arial"/>
@@ -5688,7 +6185,7 @@
                 <a:latin typeface="Arial"/>
               </a:rPr>
               <a:pPr/>
-              <a:t>9/20/2026</a:t>
+              <a:t>9/23/2026</a:t>
             </a:fld>
             <a:endParaRPr lang="en-US">
               <a:latin typeface="Arial"/>
@@ -6013,7 +6510,7 @@
                 <a:latin typeface="Arial"/>
               </a:rPr>
               <a:pPr/>
-              <a:t>9/20/2026</a:t>
+              <a:t>9/23/2026</a:t>
             </a:fld>
             <a:endParaRPr lang="en-US">
               <a:latin typeface="Arial"/>
@@ -6342,7 +6839,7 @@
                 <a:latin typeface="Arial"/>
               </a:rPr>
               <a:pPr defTabSz="914400"/>
-              <a:t>9/20/2026</a:t>
+              <a:t>9/23/2026</a:t>
             </a:fld>
             <a:endParaRPr lang="en-US">
               <a:latin typeface="Arial"/>
@@ -16763,9 +17260,7 @@
             <a:r>
               <a:rPr lang="en-US" sz="3100" dirty="0">
                 <a:solidFill>
-                  <a:schemeClr val="accent6">
-                    <a:lumMod val="50000"/>
-                  </a:schemeClr>
+                  <a:srgbClr val="0070C0"/>
                 </a:solidFill>
                 <a:latin typeface="Arial"/>
               </a:rPr>
@@ -16773,9 +17268,7 @@
             </a:r>
             <a:endParaRPr lang="en-US" dirty="0">
               <a:solidFill>
-                <a:schemeClr val="accent6">
-                  <a:lumMod val="50000"/>
-                </a:schemeClr>
+                <a:srgbClr val="0070C0"/>
               </a:solidFill>
               <a:latin typeface="Arial"/>
             </a:endParaRPr>
@@ -16870,7 +17363,7 @@
                 </a:solidFill>
                 <a:latin typeface="Arial"/>
               </a:rPr>
-              <a:t>salutation</a:t>
+              <a:t>Salutation</a:t>
             </a:r>
           </a:p>
           <a:p>
@@ -17272,7 +17765,7 @@
                 </a:solidFill>
                 <a:latin typeface="Arial"/>
               </a:rPr>
-              <a:t>address</a:t>
+              <a:t>Address</a:t>
             </a:r>
           </a:p>
           <a:p>
@@ -17468,7 +17961,7 @@
                 </a:solidFill>
                 <a:latin typeface="Arial"/>
               </a:rPr>
-              <a:t>total</a:t>
+              <a:t>Total</a:t>
             </a:r>
           </a:p>
           <a:p>
@@ -23687,8 +24180,8 @@
           </a:p>
         </p:txBody>
       </p:sp>
-      <mc:AlternateContent xmlns:mc="http://schemas.openxmlformats.org/markup-compatibility/2006">
-        <mc:Choice xmlns:a14="http://schemas.microsoft.com/office/drawing/2010/main" Requires="a14">
+      <mc:AlternateContent xmlns:mc="http://schemas.openxmlformats.org/markup-compatibility/2006" xmlns:a14="http://schemas.microsoft.com/office/drawing/2010/main">
+        <mc:Choice Requires="a14">
           <p:sp>
             <p:nvSpPr>
               <p:cNvPr id="6" name="TextBox 5">
@@ -23736,7 +24229,7 @@
             </p:txBody>
           </p:sp>
         </mc:Choice>
-        <mc:Fallback>
+        <mc:Fallback xmlns="">
           <p:sp>
             <p:nvSpPr>
               <p:cNvPr id="6" name="TextBox 5">
@@ -24706,42 +25199,65 @@
         </p:nvSpPr>
         <p:spPr>
           <a:xfrm>
-            <a:off x="457200" y="3192334"/>
-            <a:ext cx="8458200" cy="1862267"/>
+            <a:off x="394137" y="1820917"/>
+            <a:ext cx="8229600" cy="4419600"/>
           </a:xfrm>
         </p:spPr>
         <p:txBody>
           <a:bodyPr>
-            <a:normAutofit/>
+            <a:noAutofit/>
           </a:bodyPr>
           <a:lstStyle/>
           <a:p>
-            <a:pPr marL="0" indent="0">
-              <a:buNone/>
-            </a:pPr>
             <a:r>
               <a:rPr lang="en-US" sz="2800" dirty="0"/>
-              <a:t>We will cover most of this material next time</a:t>
+              <a:t>Is/are there any:</a:t>
+            </a:r>
+          </a:p>
+          <a:p>
+            <a:pPr lvl="1"/>
+            <a:r>
+              <a:rPr lang="en-US" sz="2400" dirty="0"/>
+              <a:t>columns you forgot?</a:t>
+            </a:r>
+          </a:p>
+          <a:p>
+            <a:pPr lvl="1"/>
+            <a:r>
+              <a:rPr lang="en-US" sz="2400" dirty="0"/>
+              <a:t>unnecessary columns?</a:t>
+            </a:r>
+          </a:p>
+          <a:p>
+            <a:pPr lvl="1"/>
+            <a:r>
+              <a:rPr lang="en-US" sz="2400" dirty="0"/>
+              <a:t>duplicate or redundant information?</a:t>
+            </a:r>
+          </a:p>
+          <a:p>
+            <a:pPr lvl="1"/>
+            <a:r>
+              <a:rPr lang="en-US" sz="2400" dirty="0"/>
+              <a:t>tables with many empty fields?</a:t>
             </a:r>
           </a:p>
           <a:p>
             <a:endParaRPr lang="en-US" sz="2800" dirty="0"/>
           </a:p>
           <a:p>
-            <a:pPr marL="0" indent="0">
-              <a:buNone/>
-            </a:pPr>
             <a:r>
               <a:rPr lang="en-US" sz="2800" dirty="0"/>
-              <a:t>But we will cover </a:t>
-            </a:r>
-            <a:r>
-              <a:rPr lang="en-US" sz="2800" b="1" dirty="0"/>
-              <a:t>normal forms </a:t>
-            </a:r>
+              <a:t>Is information divided into smallest useful parts?</a:t>
+            </a:r>
+          </a:p>
+          <a:p>
+            <a:endParaRPr lang="en-US" sz="2800" dirty="0"/>
+          </a:p>
+          <a:p>
             <a:r>
               <a:rPr lang="en-US" sz="2800" dirty="0"/>
-              <a:t>today (it’s on HW 4)</a:t>
+              <a:t>Does each column contain a fact about the table’s subject?</a:t>
             </a:r>
           </a:p>
         </p:txBody>
@@ -24776,7 +25292,71 @@
       </p:sp>
       <p:sp>
         <p:nvSpPr>
-          <p:cNvPr id="9" name="Title 1"/>
+          <p:cNvPr id="6" name="Title 1"/>
+          <p:cNvSpPr>
+            <a:spLocks noGrp="1"/>
+          </p:cNvSpPr>
+          <p:nvPr>
+            <p:ph type="title"/>
+          </p:nvPr>
+        </p:nvSpPr>
+        <p:spPr>
+          <a:xfrm>
+            <a:off x="196850" y="558800"/>
+            <a:ext cx="4737100" cy="1371600"/>
+          </a:xfrm>
+        </p:spPr>
+        <p:txBody>
+          <a:bodyPr>
+            <a:noAutofit/>
+          </a:bodyPr>
+          <a:lstStyle/>
+          <a:p>
+            <a:r>
+              <a:rPr lang="en-US" sz="3600" dirty="0">
+                <a:solidFill>
+                  <a:srgbClr val="D2533C"/>
+                </a:solidFill>
+              </a:rPr>
+              <a:t>IV.</a:t>
+            </a:r>
+            <a:r>
+              <a:rPr lang="en-US" sz="3600" dirty="0"/>
+              <a:t> </a:t>
+            </a:r>
+            <a:r>
+              <a:rPr lang="en-US" sz="3600" dirty="0">
+                <a:solidFill>
+                  <a:srgbClr val="D2533C"/>
+                </a:solidFill>
+              </a:rPr>
+              <a:t>Refine your design</a:t>
+            </a:r>
+            <a:br>
+              <a:rPr lang="en-US" sz="2800" dirty="0">
+                <a:solidFill>
+                  <a:srgbClr val="D2533C"/>
+                </a:solidFill>
+              </a:rPr>
+            </a:br>
+            <a:br>
+              <a:rPr lang="en-US" sz="2800" dirty="0">
+                <a:solidFill>
+                  <a:srgbClr val="D2533C"/>
+                </a:solidFill>
+              </a:rPr>
+            </a:br>
+            <a:endParaRPr lang="en-US" sz="2800" dirty="0">
+              <a:solidFill>
+                <a:srgbClr val="D2533C"/>
+              </a:solidFill>
+            </a:endParaRPr>
+          </a:p>
+        </p:txBody>
+      </p:sp>
+      <p:sp>
+        <p:nvSpPr>
+          <p:cNvPr id="7" name="Content Placeholder 2"/>
           <p:cNvSpPr txBox="1">
             <a:spLocks/>
           </p:cNvSpPr>
@@ -24784,133 +25364,7 @@
         </p:nvSpPr>
         <p:spPr>
           <a:xfrm>
-            <a:off x="711200" y="2819400"/>
-            <a:ext cx="4572000" cy="1600200"/>
-          </a:xfrm>
-          <a:prstGeom prst="rect">
-            <a:avLst/>
-          </a:prstGeom>
-        </p:spPr>
-        <p:txBody>
-          <a:bodyPr vert="horz" lIns="91440" tIns="45720" rIns="91440" bIns="45720" rtlCol="0" anchor="ctr">
-            <a:normAutofit fontScale="97500"/>
-          </a:bodyPr>
-          <a:lstStyle>
-            <a:lvl1pPr algn="l" defTabSz="914400" rtl="0" eaLnBrk="1" latinLnBrk="0" hangingPunct="1">
-              <a:spcBef>
-                <a:spcPct val="0"/>
-              </a:spcBef>
-              <a:buNone/>
-              <a:defRPr sz="4000" kern="1200" spc="-100" baseline="0">
-                <a:solidFill>
-                  <a:schemeClr val="tx2"/>
-                </a:solidFill>
-                <a:latin typeface="+mj-lt"/>
-                <a:ea typeface="+mj-ea"/>
-                <a:cs typeface="+mj-cs"/>
-              </a:defRPr>
-            </a:lvl1pPr>
-          </a:lstStyle>
-          <a:p>
-            <a:endParaRPr lang="en-US" dirty="0">
-              <a:solidFill>
-                <a:srgbClr val="D2533C"/>
-              </a:solidFill>
-              <a:latin typeface="Arial"/>
-            </a:endParaRPr>
-          </a:p>
-        </p:txBody>
-      </p:sp>
-      <p:sp>
-        <p:nvSpPr>
-          <p:cNvPr id="10" name="Title 1"/>
-          <p:cNvSpPr txBox="1">
-            <a:spLocks/>
-          </p:cNvSpPr>
-          <p:nvPr/>
-        </p:nvSpPr>
-        <p:spPr>
-          <a:xfrm>
-            <a:off x="139700" y="440395"/>
-            <a:ext cx="5016500" cy="1744003"/>
-          </a:xfrm>
-          <a:prstGeom prst="rect">
-            <a:avLst/>
-          </a:prstGeom>
-        </p:spPr>
-        <p:txBody>
-          <a:bodyPr vert="horz" lIns="91440" tIns="45720" rIns="91440" bIns="45720" rtlCol="0" anchor="ctr">
-            <a:normAutofit fontScale="90000"/>
-          </a:bodyPr>
-          <a:lstStyle>
-            <a:lvl1pPr algn="l" defTabSz="914400" rtl="0" eaLnBrk="1" latinLnBrk="0" hangingPunct="1">
-              <a:spcBef>
-                <a:spcPct val="0"/>
-              </a:spcBef>
-              <a:buNone/>
-              <a:defRPr sz="4000" kern="1200" spc="-100" baseline="0">
-                <a:solidFill>
-                  <a:schemeClr val="tx2"/>
-                </a:solidFill>
-                <a:latin typeface="+mj-lt"/>
-                <a:ea typeface="+mj-ea"/>
-                <a:cs typeface="+mj-cs"/>
-              </a:defRPr>
-            </a:lvl1pPr>
-          </a:lstStyle>
-          <a:p>
-            <a:r>
-              <a:rPr lang="en-US" sz="3600" dirty="0">
-                <a:solidFill>
-                  <a:srgbClr val="D2533C"/>
-                </a:solidFill>
-                <a:latin typeface="Arial"/>
-              </a:rPr>
-              <a:t>IV.</a:t>
-            </a:r>
-            <a:r>
-              <a:rPr lang="en-US" sz="3600" dirty="0"/>
-              <a:t> </a:t>
-            </a:r>
-            <a:r>
-              <a:rPr lang="en-US" sz="3600" dirty="0">
-                <a:solidFill>
-                  <a:srgbClr val="D2533C"/>
-                </a:solidFill>
-              </a:rPr>
-              <a:t>Refine your design</a:t>
-            </a:r>
-          </a:p>
-          <a:p>
-            <a:endParaRPr lang="en-US" sz="3600" dirty="0">
-              <a:solidFill>
-                <a:srgbClr val="D2533C"/>
-              </a:solidFill>
-            </a:endParaRPr>
-          </a:p>
-          <a:p>
-            <a:r>
-              <a:rPr lang="en-US" sz="3600" dirty="0">
-                <a:solidFill>
-                  <a:srgbClr val="D2533C"/>
-                </a:solidFill>
-              </a:rPr>
-              <a:t>V. Apply normalization rules</a:t>
-            </a:r>
-          </a:p>
-        </p:txBody>
-      </p:sp>
-      <p:sp>
-        <p:nvSpPr>
-          <p:cNvPr id="11" name="Content Placeholder 2"/>
-          <p:cNvSpPr txBox="1">
-            <a:spLocks/>
-          </p:cNvSpPr>
-          <p:nvPr/>
-        </p:nvSpPr>
-        <p:spPr>
-          <a:xfrm>
-            <a:off x="4944731" y="474789"/>
+            <a:off x="4933950" y="558800"/>
             <a:ext cx="5372100" cy="1905000"/>
           </a:xfrm>
           <a:prstGeom prst="rect">
@@ -25194,14 +25648,14 @@
       </p:sp>
       <p:sp>
         <p:nvSpPr>
-          <p:cNvPr id="12" name="Rectangle 11"/>
+          <p:cNvPr id="8" name="Rectangle 7"/>
           <p:cNvSpPr/>
           <p:nvPr/>
         </p:nvSpPr>
         <p:spPr>
           <a:xfrm>
-            <a:off x="4944731" y="1482724"/>
-            <a:ext cx="4207938" cy="701675"/>
+            <a:off x="4933950" y="1587500"/>
+            <a:ext cx="4083050" cy="342900"/>
           </a:xfrm>
           <a:prstGeom prst="rect">
             <a:avLst/>
@@ -25250,6 +25704,134 @@
   <p:clrMapOvr>
     <a:masterClrMapping/>
   </p:clrMapOvr>
+  <p:timing>
+    <p:tnLst>
+      <p:par>
+        <p:cTn id="1" dur="indefinite" restart="never" nodeType="tmRoot">
+          <p:childTnLst>
+            <p:seq concurrent="1" nextAc="seek">
+              <p:cTn id="2" dur="indefinite" nodeType="mainSeq">
+                <p:childTnLst>
+                  <p:par>
+                    <p:cTn id="3" fill="hold">
+                      <p:stCondLst>
+                        <p:cond delay="indefinite"/>
+                      </p:stCondLst>
+                      <p:childTnLst>
+                        <p:par>
+                          <p:cTn id="4" fill="hold">
+                            <p:stCondLst>
+                              <p:cond delay="0"/>
+                            </p:stCondLst>
+                            <p:childTnLst>
+                              <p:par>
+                                <p:cTn id="5" presetID="1" presetClass="entr" presetSubtype="0" fill="hold" nodeType="clickEffect">
+                                  <p:stCondLst>
+                                    <p:cond delay="0"/>
+                                  </p:stCondLst>
+                                  <p:childTnLst>
+                                    <p:set>
+                                      <p:cBhvr>
+                                        <p:cTn id="6" dur="1" fill="hold">
+                                          <p:stCondLst>
+                                            <p:cond delay="0"/>
+                                          </p:stCondLst>
+                                        </p:cTn>
+                                        <p:tgtEl>
+                                          <p:spTgt spid="3">
+                                            <p:txEl>
+                                              <p:pRg st="6" end="6"/>
+                                            </p:txEl>
+                                          </p:spTgt>
+                                        </p:tgtEl>
+                                        <p:attrNameLst>
+                                          <p:attrName>style.visibility</p:attrName>
+                                        </p:attrNameLst>
+                                      </p:cBhvr>
+                                      <p:to>
+                                        <p:strVal val="visible"/>
+                                      </p:to>
+                                    </p:set>
+                                  </p:childTnLst>
+                                </p:cTn>
+                              </p:par>
+                            </p:childTnLst>
+                          </p:cTn>
+                        </p:par>
+                      </p:childTnLst>
+                    </p:cTn>
+                  </p:par>
+                  <p:par>
+                    <p:cTn id="7" fill="hold">
+                      <p:stCondLst>
+                        <p:cond delay="indefinite"/>
+                      </p:stCondLst>
+                      <p:childTnLst>
+                        <p:par>
+                          <p:cTn id="8" fill="hold">
+                            <p:stCondLst>
+                              <p:cond delay="0"/>
+                            </p:stCondLst>
+                            <p:childTnLst>
+                              <p:par>
+                                <p:cTn id="9" presetID="1" presetClass="entr" presetSubtype="0" fill="hold" nodeType="clickEffect">
+                                  <p:stCondLst>
+                                    <p:cond delay="0"/>
+                                  </p:stCondLst>
+                                  <p:childTnLst>
+                                    <p:set>
+                                      <p:cBhvr>
+                                        <p:cTn id="10" dur="1" fill="hold">
+                                          <p:stCondLst>
+                                            <p:cond delay="0"/>
+                                          </p:stCondLst>
+                                        </p:cTn>
+                                        <p:tgtEl>
+                                          <p:spTgt spid="3">
+                                            <p:txEl>
+                                              <p:pRg st="8" end="8"/>
+                                            </p:txEl>
+                                          </p:spTgt>
+                                        </p:tgtEl>
+                                        <p:attrNameLst>
+                                          <p:attrName>style.visibility</p:attrName>
+                                        </p:attrNameLst>
+                                      </p:cBhvr>
+                                      <p:to>
+                                        <p:strVal val="visible"/>
+                                      </p:to>
+                                    </p:set>
+                                  </p:childTnLst>
+                                </p:cTn>
+                              </p:par>
+                            </p:childTnLst>
+                          </p:cTn>
+                        </p:par>
+                      </p:childTnLst>
+                    </p:cTn>
+                  </p:par>
+                </p:childTnLst>
+              </p:cTn>
+              <p:prevCondLst>
+                <p:cond evt="onPrev" delay="0">
+                  <p:tgtEl>
+                    <p:sldTgt/>
+                  </p:tgtEl>
+                </p:cond>
+              </p:prevCondLst>
+              <p:nextCondLst>
+                <p:cond evt="onNext" delay="0">
+                  <p:tgtEl>
+                    <p:sldTgt/>
+                  </p:tgtEl>
+                </p:cond>
+              </p:nextCondLst>
+            </p:seq>
+          </p:childTnLst>
+        </p:cTn>
+      </p:par>
+    </p:tnLst>
+  </p:timing>
 </p:sld>
 </file>
 
@@ -25272,76 +25854,25 @@
       </p:grpSpPr>
       <p:sp>
         <p:nvSpPr>
-          <p:cNvPr id="3" name="Content Placeholder 2"/>
+          <p:cNvPr id="2" name="Title 1"/>
           <p:cNvSpPr>
             <a:spLocks noGrp="1"/>
           </p:cNvSpPr>
           <p:nvPr>
-            <p:ph idx="1"/>
+            <p:ph type="title"/>
           </p:nvPr>
         </p:nvSpPr>
-        <p:spPr>
-          <a:xfrm>
-            <a:off x="457200" y="2608706"/>
-            <a:ext cx="8229600" cy="3728594"/>
-          </a:xfrm>
-        </p:spPr>
+        <p:spPr/>
         <p:txBody>
           <a:bodyPr>
             <a:normAutofit/>
           </a:bodyPr>
           <a:lstStyle/>
           <a:p>
-            <a:pPr marL="0" indent="0">
-              <a:buNone/>
-            </a:pPr>
-            <a:r>
-              <a:rPr lang="en-US" b="1" dirty="0"/>
-              <a:t>Goals of Normalization:</a:t>
-            </a:r>
-          </a:p>
-          <a:p>
             <a:r>
               <a:rPr lang="en-US" dirty="0"/>
-              <a:t>information retrieved from the database is accurate and reliable</a:t>
-            </a:r>
-          </a:p>
-          <a:p>
-            <a:r>
-              <a:rPr lang="en-US" dirty="0"/>
-              <a:t>database can be efficiently updated and managed</a:t>
-            </a:r>
-          </a:p>
-          <a:p>
-            <a:pPr marL="0" indent="0">
-              <a:buNone/>
-            </a:pPr>
-            <a:endParaRPr lang="en-US" b="1" dirty="0"/>
-          </a:p>
-          <a:p>
-            <a:pPr marL="0" indent="0">
-              <a:buNone/>
-            </a:pPr>
-            <a:r>
-              <a:rPr lang="en-US" b="1" dirty="0"/>
-              <a:t>Normalization achieves this through:</a:t>
-            </a:r>
-          </a:p>
-          <a:p>
-            <a:r>
-              <a:rPr lang="en-US" dirty="0"/>
-              <a:t>Imposing efficient database structure using rules</a:t>
-            </a:r>
-          </a:p>
-          <a:p>
-            <a:pPr lvl="1"/>
-            <a:r>
-              <a:rPr lang="en-US" dirty="0"/>
-              <a:t>e.g. Minimizing amount of redundant data, and other approaches</a:t>
-            </a:r>
-          </a:p>
-          <a:p>
-            <a:endParaRPr lang="en-US" dirty="0"/>
+              <a:t>Minimize redundant data</a:t>
+            </a:r>
           </a:p>
         </p:txBody>
       </p:sp>
@@ -25373,367 +25904,105 @@
           </a:p>
         </p:txBody>
       </p:sp>
-      <p:sp>
-        <p:nvSpPr>
-          <p:cNvPr id="7" name="Title 1"/>
-          <p:cNvSpPr txBox="1">
-            <a:spLocks/>
-          </p:cNvSpPr>
-          <p:nvPr/>
-        </p:nvSpPr>
+      <p:pic>
+        <p:nvPicPr>
+          <p:cNvPr id="6" name="Content Placeholder 5" descr="Screen Shot 2018-02-18 at 8.04.43 AM.png"/>
+          <p:cNvPicPr>
+            <a:picLocks noGrp="1" noChangeAspect="1"/>
+          </p:cNvPicPr>
+          <p:nvPr>
+            <p:ph idx="1"/>
+          </p:nvPr>
+        </p:nvPicPr>
+        <p:blipFill>
+          <a:blip r:embed="rId3">
+            <a:extLst>
+              <a:ext uri="{28A0092B-C50C-407E-A947-70E740481C1C}">
+                <a14:useLocalDpi xmlns:a14="http://schemas.microsoft.com/office/drawing/2010/main" val="0"/>
+              </a:ext>
+            </a:extLst>
+          </a:blip>
+          <a:srcRect t="-84585" b="-84585"/>
+          <a:stretch>
+            <a:fillRect/>
+          </a:stretch>
+        </p:blipFill>
         <p:spPr>
           <a:xfrm>
-            <a:off x="139700" y="440395"/>
-            <a:ext cx="4419600" cy="1744003"/>
+            <a:off x="457200" y="1498602"/>
+            <a:ext cx="8229600" cy="4876800"/>
+          </a:xfrm>
+        </p:spPr>
+      </p:pic>
+      <p:sp>
+        <p:nvSpPr>
+          <p:cNvPr id="5" name="TextBox 4"/>
+          <p:cNvSpPr txBox="1"/>
+          <p:nvPr/>
+        </p:nvSpPr>
+        <p:spPr>
+          <a:xfrm>
+            <a:off x="316398" y="1988458"/>
+            <a:ext cx="6139822" cy="3785652"/>
           </a:xfrm>
           <a:prstGeom prst="rect">
             <a:avLst/>
           </a:prstGeom>
+          <a:noFill/>
         </p:spPr>
         <p:txBody>
-          <a:bodyPr vert="horz" lIns="91440" tIns="45720" rIns="91440" bIns="45720" rtlCol="0" anchor="ctr">
-            <a:normAutofit fontScale="97500"/>
+          <a:bodyPr wrap="none" rtlCol="0">
+            <a:spAutoFit/>
           </a:bodyPr>
-          <a:lstStyle>
-            <a:lvl1pPr algn="l" defTabSz="914400" rtl="0" eaLnBrk="1" latinLnBrk="0" hangingPunct="1">
-              <a:spcBef>
-                <a:spcPct val="0"/>
-              </a:spcBef>
-              <a:buNone/>
-              <a:defRPr sz="4000" kern="1200" spc="-100" baseline="0">
-                <a:solidFill>
-                  <a:schemeClr val="tx2"/>
-                </a:solidFill>
-                <a:latin typeface="+mj-lt"/>
-                <a:ea typeface="+mj-ea"/>
-                <a:cs typeface="+mj-cs"/>
-              </a:defRPr>
-            </a:lvl1pPr>
-          </a:lstStyle>
-          <a:p>
-            <a:r>
-              <a:rPr lang="en-US" sz="3600" dirty="0">
-                <a:solidFill>
-                  <a:srgbClr val="D2533C"/>
-                </a:solidFill>
-              </a:rPr>
-              <a:t>V. Apply normalization </a:t>
-            </a:r>
-          </a:p>
-          <a:p>
-            <a:r>
-              <a:rPr lang="en-US" sz="3600" dirty="0">
-                <a:solidFill>
-                  <a:srgbClr val="D2533C"/>
-                </a:solidFill>
-              </a:rPr>
-              <a:t>  rules</a:t>
+          <a:lstStyle/>
+          <a:p>
+            <a:r>
+              <a:rPr lang="en-US" sz="2400" b="1" dirty="0"/>
+              <a:t>Example:</a:t>
+            </a:r>
+          </a:p>
+          <a:p>
+            <a:endParaRPr lang="en-US" sz="2400" b="1" dirty="0"/>
+          </a:p>
+          <a:p>
+            <a:endParaRPr lang="en-US" sz="2400" b="1" dirty="0"/>
+          </a:p>
+          <a:p>
+            <a:endParaRPr lang="en-US" sz="2400" b="1" dirty="0"/>
+          </a:p>
+          <a:p>
+            <a:endParaRPr lang="en-US" sz="2400" b="1" dirty="0"/>
+          </a:p>
+          <a:p>
+            <a:endParaRPr lang="en-US" sz="2400" b="1" dirty="0"/>
+          </a:p>
+          <a:p>
+            <a:endParaRPr lang="en-US" sz="2400" b="1" dirty="0"/>
+          </a:p>
+          <a:p>
+            <a:endParaRPr lang="en-US" sz="2400" b="1" dirty="0"/>
+          </a:p>
+          <a:p>
+            <a:endParaRPr lang="en-US" sz="2400" b="1" dirty="0"/>
+          </a:p>
+          <a:p>
+            <a:r>
+              <a:rPr lang="en-US" sz="2400" dirty="0"/>
+              <a:t>   What is wrong with using a table like this?</a:t>
             </a:r>
           </a:p>
         </p:txBody>
       </p:sp>
       <p:sp>
         <p:nvSpPr>
-          <p:cNvPr id="8" name="Content Placeholder 2"/>
-          <p:cNvSpPr txBox="1">
-            <a:spLocks/>
-          </p:cNvSpPr>
+          <p:cNvPr id="7" name="Rectangle 6"/>
+          <p:cNvSpPr/>
           <p:nvPr/>
         </p:nvSpPr>
         <p:spPr>
           <a:xfrm>
-            <a:off x="4944731" y="474789"/>
-            <a:ext cx="5372100" cy="1905000"/>
-          </a:xfrm>
-          <a:prstGeom prst="rect">
-            <a:avLst/>
-          </a:prstGeom>
-        </p:spPr>
-        <p:txBody>
-          <a:bodyPr vert="horz" lIns="91440" tIns="45720" rIns="91440" bIns="45720" rtlCol="0">
-            <a:normAutofit fontScale="55000" lnSpcReduction="20000"/>
-          </a:bodyPr>
-          <a:lstStyle>
-            <a:lvl1pPr marL="182880" indent="-182880" algn="l" defTabSz="914400" rtl="0" eaLnBrk="1" latinLnBrk="0" hangingPunct="1">
-              <a:spcBef>
-                <a:spcPct val="20000"/>
-              </a:spcBef>
-              <a:buClr>
-                <a:schemeClr val="accent1"/>
-              </a:buClr>
-              <a:buSzPct val="85000"/>
-              <a:buFont typeface="Arial" pitchFamily="34" charset="0"/>
-              <a:buChar char="•"/>
-              <a:defRPr sz="2400" kern="1200">
-                <a:solidFill>
-                  <a:schemeClr val="tx1"/>
-                </a:solidFill>
-                <a:latin typeface="+mn-lt"/>
-                <a:ea typeface="+mn-ea"/>
-                <a:cs typeface="+mn-cs"/>
-              </a:defRPr>
-            </a:lvl1pPr>
-            <a:lvl2pPr marL="457200" indent="-182880" algn="l" defTabSz="914400" rtl="0" eaLnBrk="1" latinLnBrk="0" hangingPunct="1">
-              <a:spcBef>
-                <a:spcPct val="20000"/>
-              </a:spcBef>
-              <a:buClr>
-                <a:schemeClr val="accent1"/>
-              </a:buClr>
-              <a:buSzPct val="85000"/>
-              <a:buFont typeface="Arial" pitchFamily="34" charset="0"/>
-              <a:buChar char="•"/>
-              <a:defRPr sz="2000" kern="1200">
-                <a:solidFill>
-                  <a:schemeClr val="tx1"/>
-                </a:solidFill>
-                <a:latin typeface="+mn-lt"/>
-                <a:ea typeface="+mn-ea"/>
-                <a:cs typeface="+mn-cs"/>
-              </a:defRPr>
-            </a:lvl2pPr>
-            <a:lvl3pPr marL="731520" indent="-182880" algn="l" defTabSz="914400" rtl="0" eaLnBrk="1" latinLnBrk="0" hangingPunct="1">
-              <a:spcBef>
-                <a:spcPct val="20000"/>
-              </a:spcBef>
-              <a:buClr>
-                <a:schemeClr val="accent1"/>
-              </a:buClr>
-              <a:buSzPct val="90000"/>
-              <a:buFont typeface="Arial" pitchFamily="34" charset="0"/>
-              <a:buChar char="•"/>
-              <a:defRPr sz="1800" kern="1200">
-                <a:solidFill>
-                  <a:schemeClr val="tx1"/>
-                </a:solidFill>
-                <a:latin typeface="+mn-lt"/>
-                <a:ea typeface="+mn-ea"/>
-                <a:cs typeface="+mn-cs"/>
-              </a:defRPr>
-            </a:lvl3pPr>
-            <a:lvl4pPr marL="1005840" indent="-182880" algn="l" defTabSz="914400" rtl="0" eaLnBrk="1" latinLnBrk="0" hangingPunct="1">
-              <a:spcBef>
-                <a:spcPct val="20000"/>
-              </a:spcBef>
-              <a:buClr>
-                <a:schemeClr val="accent1"/>
-              </a:buClr>
-              <a:buFont typeface="Arial" pitchFamily="34" charset="0"/>
-              <a:buChar char="•"/>
-              <a:defRPr sz="1600" kern="1200">
-                <a:solidFill>
-                  <a:schemeClr val="tx1"/>
-                </a:solidFill>
-                <a:latin typeface="+mn-lt"/>
-                <a:ea typeface="+mn-ea"/>
-                <a:cs typeface="+mn-cs"/>
-              </a:defRPr>
-            </a:lvl4pPr>
-            <a:lvl5pPr marL="1188720" indent="-137160" algn="l" defTabSz="914400" rtl="0" eaLnBrk="1" latinLnBrk="0" hangingPunct="1">
-              <a:spcBef>
-                <a:spcPct val="20000"/>
-              </a:spcBef>
-              <a:buClr>
-                <a:schemeClr val="accent1"/>
-              </a:buClr>
-              <a:buSzPct val="100000"/>
-              <a:buFont typeface="Arial" pitchFamily="34" charset="0"/>
-              <a:buChar char="•"/>
-              <a:defRPr sz="1400" kern="1200" baseline="0">
-                <a:solidFill>
-                  <a:schemeClr val="tx1"/>
-                </a:solidFill>
-                <a:latin typeface="+mn-lt"/>
-                <a:ea typeface="+mn-ea"/>
-                <a:cs typeface="+mn-cs"/>
-              </a:defRPr>
-            </a:lvl5pPr>
-            <a:lvl6pPr marL="1371600" indent="-182880" algn="l" defTabSz="914400" rtl="0" eaLnBrk="1" latinLnBrk="0" hangingPunct="1">
-              <a:spcBef>
-                <a:spcPct val="20000"/>
-              </a:spcBef>
-              <a:buClr>
-                <a:schemeClr val="accent1"/>
-              </a:buClr>
-              <a:buFont typeface="Arial" pitchFamily="34" charset="0"/>
-              <a:buChar char="•"/>
-              <a:defRPr sz="1300" kern="1200">
-                <a:solidFill>
-                  <a:schemeClr val="tx1"/>
-                </a:solidFill>
-                <a:latin typeface="+mn-lt"/>
-                <a:ea typeface="+mn-ea"/>
-                <a:cs typeface="+mn-cs"/>
-              </a:defRPr>
-            </a:lvl6pPr>
-            <a:lvl7pPr marL="1554480" indent="-182880" algn="l" defTabSz="914400" rtl="0" eaLnBrk="1" latinLnBrk="0" hangingPunct="1">
-              <a:spcBef>
-                <a:spcPct val="20000"/>
-              </a:spcBef>
-              <a:buClr>
-                <a:schemeClr val="accent1"/>
-              </a:buClr>
-              <a:buFont typeface="Arial" pitchFamily="34" charset="0"/>
-              <a:buChar char="•"/>
-              <a:defRPr sz="1300" kern="1200">
-                <a:solidFill>
-                  <a:schemeClr val="tx1"/>
-                </a:solidFill>
-                <a:latin typeface="+mn-lt"/>
-                <a:ea typeface="+mn-ea"/>
-                <a:cs typeface="+mn-cs"/>
-              </a:defRPr>
-            </a:lvl7pPr>
-            <a:lvl8pPr marL="1737360" indent="-182880" algn="l" defTabSz="914400" rtl="0" eaLnBrk="1" latinLnBrk="0" hangingPunct="1">
-              <a:spcBef>
-                <a:spcPct val="20000"/>
-              </a:spcBef>
-              <a:buClr>
-                <a:schemeClr val="accent1"/>
-              </a:buClr>
-              <a:buFont typeface="Arial" pitchFamily="34" charset="0"/>
-              <a:buChar char="•"/>
-              <a:defRPr sz="1300" kern="1200">
-                <a:solidFill>
-                  <a:schemeClr val="tx1"/>
-                </a:solidFill>
-                <a:latin typeface="+mn-lt"/>
-                <a:ea typeface="+mn-ea"/>
-                <a:cs typeface="+mn-cs"/>
-              </a:defRPr>
-            </a:lvl8pPr>
-            <a:lvl9pPr marL="1920240" indent="-182880" algn="l" defTabSz="914400" rtl="0" eaLnBrk="1" latinLnBrk="0" hangingPunct="1">
-              <a:spcBef>
-                <a:spcPct val="20000"/>
-              </a:spcBef>
-              <a:buClr>
-                <a:schemeClr val="accent1"/>
-              </a:buClr>
-              <a:buFont typeface="Arial" pitchFamily="34" charset="0"/>
-              <a:buChar char="•"/>
-              <a:defRPr sz="1300" kern="1200">
-                <a:solidFill>
-                  <a:schemeClr val="tx1"/>
-                </a:solidFill>
-                <a:latin typeface="+mn-lt"/>
-                <a:ea typeface="+mn-ea"/>
-                <a:cs typeface="+mn-cs"/>
-              </a:defRPr>
-            </a:lvl9pPr>
-          </a:lstStyle>
-          <a:p>
-            <a:pPr marL="514350" indent="-514350">
-              <a:lnSpc>
-                <a:spcPct val="150000"/>
-              </a:lnSpc>
-              <a:buFont typeface="+mj-lt"/>
-              <a:buAutoNum type="romanUcPeriod"/>
-            </a:pPr>
-            <a:r>
-              <a:rPr lang="en-US" sz="2800" dirty="0"/>
-              <a:t>Determine </a:t>
-            </a:r>
-            <a:r>
-              <a:rPr lang="en-US" sz="2800" b="1" dirty="0"/>
-              <a:t>purpose </a:t>
-            </a:r>
-            <a:r>
-              <a:rPr lang="en-US" sz="2800" dirty="0"/>
-              <a:t>of database</a:t>
-            </a:r>
-          </a:p>
-          <a:p>
-            <a:pPr marL="514350" indent="-514350">
-              <a:lnSpc>
-                <a:spcPct val="150000"/>
-              </a:lnSpc>
-              <a:buFont typeface="+mj-lt"/>
-              <a:buAutoNum type="romanUcPeriod"/>
-            </a:pPr>
-            <a:r>
-              <a:rPr lang="en-US" sz="2800" dirty="0"/>
-              <a:t>Find &amp; organize </a:t>
-            </a:r>
-            <a:r>
-              <a:rPr lang="en-US" sz="2800" b="1" dirty="0"/>
-              <a:t>information </a:t>
-            </a:r>
-            <a:r>
-              <a:rPr lang="en-US" sz="2800" dirty="0"/>
-              <a:t>required</a:t>
-            </a:r>
-          </a:p>
-          <a:p>
-            <a:pPr marL="514350" indent="-514350">
-              <a:lnSpc>
-                <a:spcPct val="150000"/>
-              </a:lnSpc>
-              <a:buFont typeface="+mj-lt"/>
-              <a:buAutoNum type="romanUcPeriod"/>
-            </a:pPr>
-            <a:r>
-              <a:rPr lang="en-US" sz="2800" dirty="0"/>
-              <a:t>Create </a:t>
-            </a:r>
-            <a:r>
-              <a:rPr lang="en-US" sz="2800" b="1" dirty="0"/>
-              <a:t>Entity-Relationship </a:t>
-            </a:r>
-            <a:r>
-              <a:rPr lang="en-US" sz="2800" dirty="0"/>
-              <a:t>(E-R) diagram</a:t>
-            </a:r>
-          </a:p>
-          <a:p>
-            <a:pPr marL="514350" indent="-514350">
-              <a:lnSpc>
-                <a:spcPct val="150000"/>
-              </a:lnSpc>
-              <a:buFont typeface="+mj-lt"/>
-              <a:buAutoNum type="romanUcPeriod"/>
-            </a:pPr>
-            <a:r>
-              <a:rPr lang="en-US" sz="2800" b="1" dirty="0"/>
-              <a:t>Refine </a:t>
-            </a:r>
-            <a:r>
-              <a:rPr lang="en-US" sz="2800" dirty="0"/>
-              <a:t>design</a:t>
-            </a:r>
-          </a:p>
-          <a:p>
-            <a:pPr marL="514350" indent="-514350">
-              <a:lnSpc>
-                <a:spcPct val="150000"/>
-              </a:lnSpc>
-              <a:buFont typeface="+mj-lt"/>
-              <a:buAutoNum type="romanUcPeriod"/>
-            </a:pPr>
-            <a:r>
-              <a:rPr lang="en-US" sz="2800" dirty="0"/>
-              <a:t>Apply </a:t>
-            </a:r>
-            <a:r>
-              <a:rPr lang="en-US" sz="2800" b="1" dirty="0"/>
-              <a:t>normalization </a:t>
-            </a:r>
-            <a:r>
-              <a:rPr lang="en-US" sz="2800" dirty="0"/>
-              <a:t>rules</a:t>
-            </a:r>
-          </a:p>
-        </p:txBody>
-      </p:sp>
-      <p:sp>
-        <p:nvSpPr>
-          <p:cNvPr id="9" name="Rectangle 8"/>
-          <p:cNvSpPr/>
-          <p:nvPr/>
-        </p:nvSpPr>
-        <p:spPr>
-          <a:xfrm>
-            <a:off x="4944731" y="1905000"/>
-            <a:ext cx="4207938" cy="279399"/>
+            <a:off x="488949" y="4393762"/>
+            <a:ext cx="8087491" cy="342900"/>
           </a:xfrm>
           <a:prstGeom prst="rect">
             <a:avLst/>
@@ -25775,13 +26044,91 @@
     </p:spTree>
     <p:extLst>
       <p:ext uri="{BB962C8B-B14F-4D97-AF65-F5344CB8AC3E}">
-        <p14:creationId xmlns:p14="http://schemas.microsoft.com/office/powerpoint/2010/main" val="3736434980"/>
+        <p14:creationId xmlns:p14="http://schemas.microsoft.com/office/powerpoint/2010/main" val="4046738892"/>
       </p:ext>
     </p:extLst>
   </p:cSld>
   <p:clrMapOvr>
     <a:masterClrMapping/>
   </p:clrMapOvr>
+  <p:timing>
+    <p:tnLst>
+      <p:par>
+        <p:cTn id="1" dur="indefinite" restart="never" nodeType="tmRoot">
+          <p:childTnLst>
+            <p:seq concurrent="1" nextAc="seek">
+              <p:cTn id="2" dur="indefinite" nodeType="mainSeq">
+                <p:childTnLst>
+                  <p:par>
+                    <p:cTn id="3" fill="hold">
+                      <p:stCondLst>
+                        <p:cond delay="indefinite"/>
+                      </p:stCondLst>
+                      <p:childTnLst>
+                        <p:par>
+                          <p:cTn id="4" fill="hold">
+                            <p:stCondLst>
+                              <p:cond delay="0"/>
+                            </p:stCondLst>
+                            <p:childTnLst>
+                              <p:par>
+                                <p:cTn id="5" presetID="1" presetClass="entr" presetSubtype="0" fill="hold" grpId="0" nodeType="clickEffect">
+                                  <p:stCondLst>
+                                    <p:cond delay="0"/>
+                                  </p:stCondLst>
+                                  <p:childTnLst>
+                                    <p:set>
+                                      <p:cBhvr>
+                                        <p:cTn id="6" dur="1" fill="hold">
+                                          <p:stCondLst>
+                                            <p:cond delay="0"/>
+                                          </p:stCondLst>
+                                        </p:cTn>
+                                        <p:tgtEl>
+                                          <p:spTgt spid="7"/>
+                                        </p:tgtEl>
+                                        <p:attrNameLst>
+                                          <p:attrName>style.visibility</p:attrName>
+                                        </p:attrNameLst>
+                                      </p:cBhvr>
+                                      <p:to>
+                                        <p:strVal val="visible"/>
+                                      </p:to>
+                                    </p:set>
+                                  </p:childTnLst>
+                                </p:cTn>
+                              </p:par>
+                            </p:childTnLst>
+                          </p:cTn>
+                        </p:par>
+                      </p:childTnLst>
+                    </p:cTn>
+                  </p:par>
+                </p:childTnLst>
+              </p:cTn>
+              <p:prevCondLst>
+                <p:cond evt="onPrev" delay="0">
+                  <p:tgtEl>
+                    <p:sldTgt/>
+                  </p:tgtEl>
+                </p:cond>
+              </p:prevCondLst>
+              <p:nextCondLst>
+                <p:cond evt="onNext" delay="0">
+                  <p:tgtEl>
+                    <p:sldTgt/>
+                  </p:tgtEl>
+                </p:cond>
+              </p:nextCondLst>
+            </p:seq>
+          </p:childTnLst>
+        </p:cTn>
+      </p:par>
+    </p:tnLst>
+    <p:bldLst>
+      <p:bldP spid="7" grpId="0" animBg="1"/>
+    </p:bldLst>
+  </p:timing>
 </p:sld>
 </file>
 
@@ -25804,6 +26151,1133 @@
       </p:grpSpPr>
       <p:sp>
         <p:nvSpPr>
+          <p:cNvPr id="2" name="Title 1"/>
+          <p:cNvSpPr>
+            <a:spLocks noGrp="1"/>
+          </p:cNvSpPr>
+          <p:nvPr>
+            <p:ph type="title"/>
+          </p:nvPr>
+        </p:nvSpPr>
+        <p:spPr/>
+        <p:txBody>
+          <a:bodyPr>
+            <a:normAutofit/>
+          </a:bodyPr>
+          <a:lstStyle/>
+          <a:p>
+            <a:r>
+              <a:rPr lang="en-US" dirty="0"/>
+              <a:t>another example</a:t>
+            </a:r>
+          </a:p>
+        </p:txBody>
+      </p:sp>
+      <p:sp>
+        <p:nvSpPr>
+          <p:cNvPr id="4" name="Slide Number Placeholder 3"/>
+          <p:cNvSpPr>
+            <a:spLocks noGrp="1"/>
+          </p:cNvSpPr>
+          <p:nvPr>
+            <p:ph type="sldNum" sz="quarter" idx="12"/>
+          </p:nvPr>
+        </p:nvSpPr>
+        <p:spPr/>
+        <p:txBody>
+          <a:bodyPr/>
+          <a:lstStyle/>
+          <a:p>
+            <a:fld id="{E345EAD5-4C19-43E8-92AC-D4AD00C5745A}" type="slidenum">
+              <a:rPr lang="en-US" smtClean="0">
+                <a:latin typeface="Arial"/>
+              </a:rPr>
+              <a:pPr/>
+              <a:t>26</a:t>
+            </a:fld>
+            <a:endParaRPr lang="en-US">
+              <a:latin typeface="Arial"/>
+            </a:endParaRPr>
+          </a:p>
+        </p:txBody>
+      </p:sp>
+      <p:pic>
+        <p:nvPicPr>
+          <p:cNvPr id="5" name="Content Placeholder 4" descr="Screen Shot 2018-02-18 at 8.09.31 AM.png"/>
+          <p:cNvPicPr>
+            <a:picLocks noGrp="1" noChangeAspect="1"/>
+          </p:cNvPicPr>
+          <p:nvPr>
+            <p:ph idx="1"/>
+          </p:nvPr>
+        </p:nvPicPr>
+        <p:blipFill>
+          <a:blip r:embed="rId3">
+            <a:extLst>
+              <a:ext uri="{28A0092B-C50C-407E-A947-70E740481C1C}">
+                <a14:useLocalDpi xmlns:a14="http://schemas.microsoft.com/office/drawing/2010/main" val="0"/>
+              </a:ext>
+            </a:extLst>
+          </a:blip>
+          <a:srcRect t="-42260" b="-42260"/>
+          <a:stretch>
+            <a:fillRect/>
+          </a:stretch>
+        </p:blipFill>
+        <p:spPr>
+          <a:xfrm>
+            <a:off x="457200" y="1524000"/>
+            <a:ext cx="8229600" cy="4876800"/>
+          </a:xfrm>
+        </p:spPr>
+      </p:pic>
+      <p:sp>
+        <p:nvSpPr>
+          <p:cNvPr id="6" name="Rectangle 5"/>
+          <p:cNvSpPr/>
+          <p:nvPr/>
+        </p:nvSpPr>
+        <p:spPr>
+          <a:xfrm>
+            <a:off x="3885543" y="3447832"/>
+            <a:ext cx="2263009" cy="242153"/>
+          </a:xfrm>
+          <a:prstGeom prst="rect">
+            <a:avLst/>
+          </a:prstGeom>
+          <a:solidFill>
+            <a:srgbClr val="FFFF00">
+              <a:alpha val="27000"/>
+            </a:srgbClr>
+          </a:solidFill>
+          <a:ln>
+            <a:noFill/>
+          </a:ln>
+        </p:spPr>
+        <p:style>
+          <a:lnRef idx="2">
+            <a:schemeClr val="accent1">
+              <a:shade val="50000"/>
+            </a:schemeClr>
+          </a:lnRef>
+          <a:fillRef idx="1">
+            <a:schemeClr val="accent1"/>
+          </a:fillRef>
+          <a:effectRef idx="0">
+            <a:schemeClr val="accent1"/>
+          </a:effectRef>
+          <a:fontRef idx="minor">
+            <a:schemeClr val="lt1"/>
+          </a:fontRef>
+        </p:style>
+        <p:txBody>
+          <a:bodyPr rtlCol="0" anchor="ctr"/>
+          <a:lstStyle/>
+          <a:p>
+            <a:pPr algn="ctr"/>
+            <a:endParaRPr lang="en-US"/>
+          </a:p>
+        </p:txBody>
+      </p:sp>
+      <p:sp>
+        <p:nvSpPr>
+          <p:cNvPr id="7" name="Rectangle 6"/>
+          <p:cNvSpPr/>
+          <p:nvPr/>
+        </p:nvSpPr>
+        <p:spPr>
+          <a:xfrm>
+            <a:off x="3885542" y="4025047"/>
+            <a:ext cx="2263009" cy="242153"/>
+          </a:xfrm>
+          <a:prstGeom prst="rect">
+            <a:avLst/>
+          </a:prstGeom>
+          <a:solidFill>
+            <a:srgbClr val="FFFF00">
+              <a:alpha val="27000"/>
+            </a:srgbClr>
+          </a:solidFill>
+          <a:ln>
+            <a:noFill/>
+          </a:ln>
+        </p:spPr>
+        <p:style>
+          <a:lnRef idx="2">
+            <a:schemeClr val="accent1">
+              <a:shade val="50000"/>
+            </a:schemeClr>
+          </a:lnRef>
+          <a:fillRef idx="1">
+            <a:schemeClr val="accent1"/>
+          </a:fillRef>
+          <a:effectRef idx="0">
+            <a:schemeClr val="accent1"/>
+          </a:effectRef>
+          <a:fontRef idx="minor">
+            <a:schemeClr val="lt1"/>
+          </a:fontRef>
+        </p:style>
+        <p:txBody>
+          <a:bodyPr rtlCol="0" anchor="ctr"/>
+          <a:lstStyle/>
+          <a:p>
+            <a:pPr algn="ctr"/>
+            <a:endParaRPr lang="en-US"/>
+          </a:p>
+        </p:txBody>
+      </p:sp>
+      <p:sp>
+        <p:nvSpPr>
+          <p:cNvPr id="8" name="Rectangle 7"/>
+          <p:cNvSpPr/>
+          <p:nvPr/>
+        </p:nvSpPr>
+        <p:spPr>
+          <a:xfrm>
+            <a:off x="3885541" y="4608820"/>
+            <a:ext cx="2263009" cy="242153"/>
+          </a:xfrm>
+          <a:prstGeom prst="rect">
+            <a:avLst/>
+          </a:prstGeom>
+          <a:solidFill>
+            <a:srgbClr val="FFFF00">
+              <a:alpha val="27000"/>
+            </a:srgbClr>
+          </a:solidFill>
+          <a:ln>
+            <a:noFill/>
+          </a:ln>
+        </p:spPr>
+        <p:style>
+          <a:lnRef idx="2">
+            <a:schemeClr val="accent1">
+              <a:shade val="50000"/>
+            </a:schemeClr>
+          </a:lnRef>
+          <a:fillRef idx="1">
+            <a:schemeClr val="accent1"/>
+          </a:fillRef>
+          <a:effectRef idx="0">
+            <a:schemeClr val="accent1"/>
+          </a:effectRef>
+          <a:fontRef idx="minor">
+            <a:schemeClr val="lt1"/>
+          </a:fontRef>
+        </p:style>
+        <p:txBody>
+          <a:bodyPr rtlCol="0" anchor="ctr"/>
+          <a:lstStyle/>
+          <a:p>
+            <a:pPr algn="ctr"/>
+            <a:endParaRPr lang="en-US"/>
+          </a:p>
+        </p:txBody>
+      </p:sp>
+      <p:sp>
+        <p:nvSpPr>
+          <p:cNvPr id="3" name="Rectangle 2"/>
+          <p:cNvSpPr/>
+          <p:nvPr/>
+        </p:nvSpPr>
+        <p:spPr>
+          <a:xfrm>
+            <a:off x="561979" y="5604411"/>
+            <a:ext cx="5884944" cy="461665"/>
+          </a:xfrm>
+          <a:prstGeom prst="rect">
+            <a:avLst/>
+          </a:prstGeom>
+        </p:spPr>
+        <p:txBody>
+          <a:bodyPr wrap="none">
+            <a:spAutoFit/>
+          </a:bodyPr>
+          <a:lstStyle/>
+          <a:p>
+            <a:r>
+              <a:rPr lang="en-US" sz="2400" dirty="0"/>
+              <a:t>What is wrong with using a table like this?</a:t>
+            </a:r>
+          </a:p>
+        </p:txBody>
+      </p:sp>
+    </p:spTree>
+    <p:extLst>
+      <p:ext uri="{BB962C8B-B14F-4D97-AF65-F5344CB8AC3E}">
+        <p14:creationId xmlns:p14="http://schemas.microsoft.com/office/powerpoint/2010/main" val="2630577512"/>
+      </p:ext>
+    </p:extLst>
+  </p:cSld>
+  <p:clrMapOvr>
+    <a:masterClrMapping/>
+  </p:clrMapOvr>
+  <p:timing>
+    <p:tnLst>
+      <p:par>
+        <p:cTn id="1" dur="indefinite" restart="never" nodeType="tmRoot">
+          <p:childTnLst>
+            <p:seq concurrent="1" nextAc="seek">
+              <p:cTn id="2" dur="indefinite" nodeType="mainSeq">
+                <p:childTnLst>
+                  <p:par>
+                    <p:cTn id="3" fill="hold">
+                      <p:stCondLst>
+                        <p:cond delay="indefinite"/>
+                      </p:stCondLst>
+                      <p:childTnLst>
+                        <p:par>
+                          <p:cTn id="4" fill="hold">
+                            <p:stCondLst>
+                              <p:cond delay="0"/>
+                            </p:stCondLst>
+                            <p:childTnLst>
+                              <p:par>
+                                <p:cTn id="5" presetID="1" presetClass="entr" presetSubtype="0" fill="hold" grpId="0" nodeType="clickEffect">
+                                  <p:stCondLst>
+                                    <p:cond delay="0"/>
+                                  </p:stCondLst>
+                                  <p:childTnLst>
+                                    <p:set>
+                                      <p:cBhvr>
+                                        <p:cTn id="6" dur="1" fill="hold">
+                                          <p:stCondLst>
+                                            <p:cond delay="0"/>
+                                          </p:stCondLst>
+                                        </p:cTn>
+                                        <p:tgtEl>
+                                          <p:spTgt spid="6"/>
+                                        </p:tgtEl>
+                                        <p:attrNameLst>
+                                          <p:attrName>style.visibility</p:attrName>
+                                        </p:attrNameLst>
+                                      </p:cBhvr>
+                                      <p:to>
+                                        <p:strVal val="visible"/>
+                                      </p:to>
+                                    </p:set>
+                                  </p:childTnLst>
+                                </p:cTn>
+                              </p:par>
+                              <p:par>
+                                <p:cTn id="7" presetID="1" presetClass="entr" presetSubtype="0" fill="hold" grpId="0" nodeType="withEffect">
+                                  <p:stCondLst>
+                                    <p:cond delay="0"/>
+                                  </p:stCondLst>
+                                  <p:childTnLst>
+                                    <p:set>
+                                      <p:cBhvr>
+                                        <p:cTn id="8" dur="1" fill="hold">
+                                          <p:stCondLst>
+                                            <p:cond delay="0"/>
+                                          </p:stCondLst>
+                                        </p:cTn>
+                                        <p:tgtEl>
+                                          <p:spTgt spid="7"/>
+                                        </p:tgtEl>
+                                        <p:attrNameLst>
+                                          <p:attrName>style.visibility</p:attrName>
+                                        </p:attrNameLst>
+                                      </p:cBhvr>
+                                      <p:to>
+                                        <p:strVal val="visible"/>
+                                      </p:to>
+                                    </p:set>
+                                  </p:childTnLst>
+                                </p:cTn>
+                              </p:par>
+                              <p:par>
+                                <p:cTn id="9" presetID="1" presetClass="entr" presetSubtype="0" fill="hold" grpId="0" nodeType="withEffect">
+                                  <p:stCondLst>
+                                    <p:cond delay="0"/>
+                                  </p:stCondLst>
+                                  <p:childTnLst>
+                                    <p:set>
+                                      <p:cBhvr>
+                                        <p:cTn id="10" dur="1" fill="hold">
+                                          <p:stCondLst>
+                                            <p:cond delay="0"/>
+                                          </p:stCondLst>
+                                        </p:cTn>
+                                        <p:tgtEl>
+                                          <p:spTgt spid="8"/>
+                                        </p:tgtEl>
+                                        <p:attrNameLst>
+                                          <p:attrName>style.visibility</p:attrName>
+                                        </p:attrNameLst>
+                                      </p:cBhvr>
+                                      <p:to>
+                                        <p:strVal val="visible"/>
+                                      </p:to>
+                                    </p:set>
+                                  </p:childTnLst>
+                                </p:cTn>
+                              </p:par>
+                            </p:childTnLst>
+                          </p:cTn>
+                        </p:par>
+                      </p:childTnLst>
+                    </p:cTn>
+                  </p:par>
+                </p:childTnLst>
+              </p:cTn>
+              <p:prevCondLst>
+                <p:cond evt="onPrev" delay="0">
+                  <p:tgtEl>
+                    <p:sldTgt/>
+                  </p:tgtEl>
+                </p:cond>
+              </p:prevCondLst>
+              <p:nextCondLst>
+                <p:cond evt="onNext" delay="0">
+                  <p:tgtEl>
+                    <p:sldTgt/>
+                  </p:tgtEl>
+                </p:cond>
+              </p:nextCondLst>
+            </p:seq>
+          </p:childTnLst>
+        </p:cTn>
+      </p:par>
+    </p:tnLst>
+    <p:bldLst>
+      <p:bldP spid="6" grpId="0" animBg="1"/>
+      <p:bldP spid="7" grpId="0" animBg="1"/>
+      <p:bldP spid="8" grpId="0" animBg="1"/>
+    </p:bldLst>
+  </p:timing>
+</p:sld>
+</file>
+
+<file path=ppt/slides/slide27.xml><?xml version="1.0" encoding="utf-8"?>
+<p:sld xmlns:a="http://schemas.openxmlformats.org/drawingml/2006/main" xmlns:r="http://schemas.openxmlformats.org/officeDocument/2006/relationships" xmlns:p="http://schemas.openxmlformats.org/presentationml/2006/main">
+  <p:cSld>
+    <p:spTree>
+      <p:nvGrpSpPr>
+        <p:cNvPr id="1" name=""/>
+        <p:cNvGrpSpPr/>
+        <p:nvPr/>
+      </p:nvGrpSpPr>
+      <p:grpSpPr>
+        <a:xfrm>
+          <a:off x="0" y="0"/>
+          <a:ext cx="0" cy="0"/>
+          <a:chOff x="0" y="0"/>
+          <a:chExt cx="0" cy="0"/>
+        </a:xfrm>
+      </p:grpSpPr>
+      <p:sp>
+        <p:nvSpPr>
+          <p:cNvPr id="2" name="Title 1"/>
+          <p:cNvSpPr>
+            <a:spLocks noGrp="1"/>
+          </p:cNvSpPr>
+          <p:nvPr>
+            <p:ph type="title"/>
+          </p:nvPr>
+        </p:nvSpPr>
+        <p:spPr/>
+        <p:txBody>
+          <a:bodyPr>
+            <a:normAutofit fontScale="90000"/>
+          </a:bodyPr>
+          <a:lstStyle/>
+          <a:p>
+            <a:r>
+              <a:rPr lang="en-US" dirty="0"/>
+              <a:t>Divide information into its smallest usable components</a:t>
+            </a:r>
+          </a:p>
+        </p:txBody>
+      </p:sp>
+      <p:pic>
+        <p:nvPicPr>
+          <p:cNvPr id="5" name="Content Placeholder 4" descr="Screen Shot 2018-02-18 at 8.04.04 AM.png"/>
+          <p:cNvPicPr>
+            <a:picLocks noGrp="1" noChangeAspect="1"/>
+          </p:cNvPicPr>
+          <p:nvPr>
+            <p:ph idx="1"/>
+          </p:nvPr>
+        </p:nvPicPr>
+        <p:blipFill>
+          <a:blip r:embed="rId3">
+            <a:extLst>
+              <a:ext uri="{28A0092B-C50C-407E-A947-70E740481C1C}">
+                <a14:useLocalDpi xmlns:a14="http://schemas.microsoft.com/office/drawing/2010/main" val="0"/>
+              </a:ext>
+            </a:extLst>
+          </a:blip>
+          <a:srcRect t="-54509" b="-54509"/>
+          <a:stretch>
+            <a:fillRect/>
+          </a:stretch>
+        </p:blipFill>
+        <p:spPr>
+          <a:xfrm>
+            <a:off x="457200" y="1498602"/>
+            <a:ext cx="8229600" cy="4876800"/>
+          </a:xfrm>
+        </p:spPr>
+      </p:pic>
+      <p:sp>
+        <p:nvSpPr>
+          <p:cNvPr id="4" name="Slide Number Placeholder 3"/>
+          <p:cNvSpPr>
+            <a:spLocks noGrp="1"/>
+          </p:cNvSpPr>
+          <p:nvPr>
+            <p:ph type="sldNum" sz="quarter" idx="12"/>
+          </p:nvPr>
+        </p:nvSpPr>
+        <p:spPr/>
+        <p:txBody>
+          <a:bodyPr/>
+          <a:lstStyle/>
+          <a:p>
+            <a:fld id="{E345EAD5-4C19-43E8-92AC-D4AD00C5745A}" type="slidenum">
+              <a:rPr lang="en-US" smtClean="0">
+                <a:latin typeface="Arial"/>
+              </a:rPr>
+              <a:pPr/>
+              <a:t>27</a:t>
+            </a:fld>
+            <a:endParaRPr lang="en-US">
+              <a:latin typeface="Arial"/>
+            </a:endParaRPr>
+          </a:p>
+        </p:txBody>
+      </p:sp>
+      <p:sp>
+        <p:nvSpPr>
+          <p:cNvPr id="3" name="TextBox 2"/>
+          <p:cNvSpPr txBox="1"/>
+          <p:nvPr/>
+        </p:nvSpPr>
+        <p:spPr>
+          <a:xfrm>
+            <a:off x="316398" y="1988458"/>
+            <a:ext cx="7303602" cy="3785652"/>
+          </a:xfrm>
+          <a:prstGeom prst="rect">
+            <a:avLst/>
+          </a:prstGeom>
+          <a:noFill/>
+        </p:spPr>
+        <p:txBody>
+          <a:bodyPr wrap="none" rtlCol="0">
+            <a:spAutoFit/>
+          </a:bodyPr>
+          <a:lstStyle/>
+          <a:p>
+            <a:r>
+              <a:rPr lang="en-US" sz="2400" b="1" dirty="0"/>
+              <a:t>Example:</a:t>
+            </a:r>
+          </a:p>
+          <a:p>
+            <a:endParaRPr lang="en-US" sz="2400" b="1" dirty="0"/>
+          </a:p>
+          <a:p>
+            <a:endParaRPr lang="en-US" sz="2400" b="1" dirty="0"/>
+          </a:p>
+          <a:p>
+            <a:endParaRPr lang="en-US" sz="2400" b="1" dirty="0"/>
+          </a:p>
+          <a:p>
+            <a:endParaRPr lang="en-US" sz="2400" b="1" dirty="0"/>
+          </a:p>
+          <a:p>
+            <a:endParaRPr lang="en-US" sz="2400" b="1" dirty="0"/>
+          </a:p>
+          <a:p>
+            <a:endParaRPr lang="en-US" sz="2400" b="1" dirty="0"/>
+          </a:p>
+          <a:p>
+            <a:endParaRPr lang="en-US" sz="2400" b="1" dirty="0"/>
+          </a:p>
+          <a:p>
+            <a:endParaRPr lang="en-US" sz="2400" b="1" dirty="0"/>
+          </a:p>
+          <a:p>
+            <a:r>
+              <a:rPr lang="en-US" sz="2400" dirty="0"/>
+              <a:t>   What are the problems with using a table like this?</a:t>
+            </a:r>
+          </a:p>
+        </p:txBody>
+      </p:sp>
+    </p:spTree>
+    <p:extLst>
+      <p:ext uri="{BB962C8B-B14F-4D97-AF65-F5344CB8AC3E}">
+        <p14:creationId xmlns:p14="http://schemas.microsoft.com/office/powerpoint/2010/main" val="1977493954"/>
+      </p:ext>
+    </p:extLst>
+  </p:cSld>
+  <p:clrMapOvr>
+    <a:masterClrMapping/>
+  </p:clrMapOvr>
+</p:sld>
+</file>
+
+<file path=ppt/slides/slide28.xml><?xml version="1.0" encoding="utf-8"?>
+<p:sld xmlns:a="http://schemas.openxmlformats.org/drawingml/2006/main" xmlns:r="http://schemas.openxmlformats.org/officeDocument/2006/relationships" xmlns:p="http://schemas.openxmlformats.org/presentationml/2006/main">
+  <p:cSld>
+    <p:spTree>
+      <p:nvGrpSpPr>
+        <p:cNvPr id="1" name=""/>
+        <p:cNvGrpSpPr/>
+        <p:nvPr/>
+      </p:nvGrpSpPr>
+      <p:grpSpPr>
+        <a:xfrm>
+          <a:off x="0" y="0"/>
+          <a:ext cx="0" cy="0"/>
+          <a:chOff x="0" y="0"/>
+          <a:chExt cx="0" cy="0"/>
+        </a:xfrm>
+      </p:grpSpPr>
+      <p:sp>
+        <p:nvSpPr>
+          <p:cNvPr id="3" name="Content Placeholder 2"/>
+          <p:cNvSpPr>
+            <a:spLocks noGrp="1"/>
+          </p:cNvSpPr>
+          <p:nvPr>
+            <p:ph idx="1"/>
+          </p:nvPr>
+        </p:nvSpPr>
+        <p:spPr>
+          <a:xfrm>
+            <a:off x="457200" y="2608706"/>
+            <a:ext cx="8229600" cy="3728594"/>
+          </a:xfrm>
+        </p:spPr>
+        <p:txBody>
+          <a:bodyPr>
+            <a:normAutofit/>
+          </a:bodyPr>
+          <a:lstStyle/>
+          <a:p>
+            <a:pPr marL="0" indent="0">
+              <a:buNone/>
+            </a:pPr>
+            <a:r>
+              <a:rPr lang="en-US" b="1" dirty="0"/>
+              <a:t>Goals of Normalization:</a:t>
+            </a:r>
+          </a:p>
+          <a:p>
+            <a:r>
+              <a:rPr lang="en-US" dirty="0"/>
+              <a:t>information retrieved from the database is accurate and reliable</a:t>
+            </a:r>
+          </a:p>
+          <a:p>
+            <a:r>
+              <a:rPr lang="en-US" dirty="0"/>
+              <a:t>database can be efficiently updated and managed</a:t>
+            </a:r>
+          </a:p>
+          <a:p>
+            <a:pPr marL="0" indent="0">
+              <a:buNone/>
+            </a:pPr>
+            <a:endParaRPr lang="en-US" b="1" dirty="0"/>
+          </a:p>
+          <a:p>
+            <a:pPr marL="0" indent="0">
+              <a:buNone/>
+            </a:pPr>
+            <a:r>
+              <a:rPr lang="en-US" b="1" dirty="0"/>
+              <a:t>Normalization achieves this through:</a:t>
+            </a:r>
+          </a:p>
+          <a:p>
+            <a:r>
+              <a:rPr lang="en-US" dirty="0"/>
+              <a:t>Imposing efficient database structure using rules</a:t>
+            </a:r>
+          </a:p>
+          <a:p>
+            <a:pPr lvl="1"/>
+            <a:r>
+              <a:rPr lang="en-US" dirty="0"/>
+              <a:t>e.g. Minimizing amount of redundant data, and other approaches</a:t>
+            </a:r>
+          </a:p>
+          <a:p>
+            <a:endParaRPr lang="en-US" dirty="0"/>
+          </a:p>
+        </p:txBody>
+      </p:sp>
+      <p:sp>
+        <p:nvSpPr>
+          <p:cNvPr id="4" name="Slide Number Placeholder 3"/>
+          <p:cNvSpPr>
+            <a:spLocks noGrp="1"/>
+          </p:cNvSpPr>
+          <p:nvPr>
+            <p:ph type="sldNum" sz="quarter" idx="12"/>
+          </p:nvPr>
+        </p:nvSpPr>
+        <p:spPr/>
+        <p:txBody>
+          <a:bodyPr/>
+          <a:lstStyle/>
+          <a:p>
+            <a:fld id="{E345EAD5-4C19-43E8-92AC-D4AD00C5745A}" type="slidenum">
+              <a:rPr lang="en-US" smtClean="0">
+                <a:latin typeface="Arial"/>
+              </a:rPr>
+              <a:pPr/>
+              <a:t>28</a:t>
+            </a:fld>
+            <a:endParaRPr lang="en-US">
+              <a:latin typeface="Arial"/>
+            </a:endParaRPr>
+          </a:p>
+        </p:txBody>
+      </p:sp>
+      <p:sp>
+        <p:nvSpPr>
+          <p:cNvPr id="7" name="Title 1"/>
+          <p:cNvSpPr txBox="1">
+            <a:spLocks/>
+          </p:cNvSpPr>
+          <p:nvPr/>
+        </p:nvSpPr>
+        <p:spPr>
+          <a:xfrm>
+            <a:off x="139700" y="440395"/>
+            <a:ext cx="4419600" cy="1744003"/>
+          </a:xfrm>
+          <a:prstGeom prst="rect">
+            <a:avLst/>
+          </a:prstGeom>
+        </p:spPr>
+        <p:txBody>
+          <a:bodyPr vert="horz" lIns="91440" tIns="45720" rIns="91440" bIns="45720" rtlCol="0" anchor="ctr">
+            <a:normAutofit fontScale="97500"/>
+          </a:bodyPr>
+          <a:lstStyle>
+            <a:lvl1pPr algn="l" defTabSz="914400" rtl="0" eaLnBrk="1" latinLnBrk="0" hangingPunct="1">
+              <a:spcBef>
+                <a:spcPct val="0"/>
+              </a:spcBef>
+              <a:buNone/>
+              <a:defRPr sz="4000" kern="1200" spc="-100" baseline="0">
+                <a:solidFill>
+                  <a:schemeClr val="tx2"/>
+                </a:solidFill>
+                <a:latin typeface="+mj-lt"/>
+                <a:ea typeface="+mj-ea"/>
+                <a:cs typeface="+mj-cs"/>
+              </a:defRPr>
+            </a:lvl1pPr>
+          </a:lstStyle>
+          <a:p>
+            <a:r>
+              <a:rPr lang="en-US" sz="3600" dirty="0">
+                <a:solidFill>
+                  <a:srgbClr val="D2533C"/>
+                </a:solidFill>
+              </a:rPr>
+              <a:t>V. Apply normalization </a:t>
+            </a:r>
+          </a:p>
+          <a:p>
+            <a:r>
+              <a:rPr lang="en-US" sz="3600" dirty="0">
+                <a:solidFill>
+                  <a:srgbClr val="D2533C"/>
+                </a:solidFill>
+              </a:rPr>
+              <a:t>  rules</a:t>
+            </a:r>
+          </a:p>
+        </p:txBody>
+      </p:sp>
+      <p:sp>
+        <p:nvSpPr>
+          <p:cNvPr id="8" name="Content Placeholder 2"/>
+          <p:cNvSpPr txBox="1">
+            <a:spLocks/>
+          </p:cNvSpPr>
+          <p:nvPr/>
+        </p:nvSpPr>
+        <p:spPr>
+          <a:xfrm>
+            <a:off x="4944731" y="474789"/>
+            <a:ext cx="5372100" cy="1905000"/>
+          </a:xfrm>
+          <a:prstGeom prst="rect">
+            <a:avLst/>
+          </a:prstGeom>
+        </p:spPr>
+        <p:txBody>
+          <a:bodyPr vert="horz" lIns="91440" tIns="45720" rIns="91440" bIns="45720" rtlCol="0">
+            <a:normAutofit fontScale="55000" lnSpcReduction="20000"/>
+          </a:bodyPr>
+          <a:lstStyle>
+            <a:lvl1pPr marL="182880" indent="-182880" algn="l" defTabSz="914400" rtl="0" eaLnBrk="1" latinLnBrk="0" hangingPunct="1">
+              <a:spcBef>
+                <a:spcPct val="20000"/>
+              </a:spcBef>
+              <a:buClr>
+                <a:schemeClr val="accent1"/>
+              </a:buClr>
+              <a:buSzPct val="85000"/>
+              <a:buFont typeface="Arial" pitchFamily="34" charset="0"/>
+              <a:buChar char="•"/>
+              <a:defRPr sz="2400" kern="1200">
+                <a:solidFill>
+                  <a:schemeClr val="tx1"/>
+                </a:solidFill>
+                <a:latin typeface="+mn-lt"/>
+                <a:ea typeface="+mn-ea"/>
+                <a:cs typeface="+mn-cs"/>
+              </a:defRPr>
+            </a:lvl1pPr>
+            <a:lvl2pPr marL="457200" indent="-182880" algn="l" defTabSz="914400" rtl="0" eaLnBrk="1" latinLnBrk="0" hangingPunct="1">
+              <a:spcBef>
+                <a:spcPct val="20000"/>
+              </a:spcBef>
+              <a:buClr>
+                <a:schemeClr val="accent1"/>
+              </a:buClr>
+              <a:buSzPct val="85000"/>
+              <a:buFont typeface="Arial" pitchFamily="34" charset="0"/>
+              <a:buChar char="•"/>
+              <a:defRPr sz="2000" kern="1200">
+                <a:solidFill>
+                  <a:schemeClr val="tx1"/>
+                </a:solidFill>
+                <a:latin typeface="+mn-lt"/>
+                <a:ea typeface="+mn-ea"/>
+                <a:cs typeface="+mn-cs"/>
+              </a:defRPr>
+            </a:lvl2pPr>
+            <a:lvl3pPr marL="731520" indent="-182880" algn="l" defTabSz="914400" rtl="0" eaLnBrk="1" latinLnBrk="0" hangingPunct="1">
+              <a:spcBef>
+                <a:spcPct val="20000"/>
+              </a:spcBef>
+              <a:buClr>
+                <a:schemeClr val="accent1"/>
+              </a:buClr>
+              <a:buSzPct val="90000"/>
+              <a:buFont typeface="Arial" pitchFamily="34" charset="0"/>
+              <a:buChar char="•"/>
+              <a:defRPr sz="1800" kern="1200">
+                <a:solidFill>
+                  <a:schemeClr val="tx1"/>
+                </a:solidFill>
+                <a:latin typeface="+mn-lt"/>
+                <a:ea typeface="+mn-ea"/>
+                <a:cs typeface="+mn-cs"/>
+              </a:defRPr>
+            </a:lvl3pPr>
+            <a:lvl4pPr marL="1005840" indent="-182880" algn="l" defTabSz="914400" rtl="0" eaLnBrk="1" latinLnBrk="0" hangingPunct="1">
+              <a:spcBef>
+                <a:spcPct val="20000"/>
+              </a:spcBef>
+              <a:buClr>
+                <a:schemeClr val="accent1"/>
+              </a:buClr>
+              <a:buFont typeface="Arial" pitchFamily="34" charset="0"/>
+              <a:buChar char="•"/>
+              <a:defRPr sz="1600" kern="1200">
+                <a:solidFill>
+                  <a:schemeClr val="tx1"/>
+                </a:solidFill>
+                <a:latin typeface="+mn-lt"/>
+                <a:ea typeface="+mn-ea"/>
+                <a:cs typeface="+mn-cs"/>
+              </a:defRPr>
+            </a:lvl4pPr>
+            <a:lvl5pPr marL="1188720" indent="-137160" algn="l" defTabSz="914400" rtl="0" eaLnBrk="1" latinLnBrk="0" hangingPunct="1">
+              <a:spcBef>
+                <a:spcPct val="20000"/>
+              </a:spcBef>
+              <a:buClr>
+                <a:schemeClr val="accent1"/>
+              </a:buClr>
+              <a:buSzPct val="100000"/>
+              <a:buFont typeface="Arial" pitchFamily="34" charset="0"/>
+              <a:buChar char="•"/>
+              <a:defRPr sz="1400" kern="1200" baseline="0">
+                <a:solidFill>
+                  <a:schemeClr val="tx1"/>
+                </a:solidFill>
+                <a:latin typeface="+mn-lt"/>
+                <a:ea typeface="+mn-ea"/>
+                <a:cs typeface="+mn-cs"/>
+              </a:defRPr>
+            </a:lvl5pPr>
+            <a:lvl6pPr marL="1371600" indent="-182880" algn="l" defTabSz="914400" rtl="0" eaLnBrk="1" latinLnBrk="0" hangingPunct="1">
+              <a:spcBef>
+                <a:spcPct val="20000"/>
+              </a:spcBef>
+              <a:buClr>
+                <a:schemeClr val="accent1"/>
+              </a:buClr>
+              <a:buFont typeface="Arial" pitchFamily="34" charset="0"/>
+              <a:buChar char="•"/>
+              <a:defRPr sz="1300" kern="1200">
+                <a:solidFill>
+                  <a:schemeClr val="tx1"/>
+                </a:solidFill>
+                <a:latin typeface="+mn-lt"/>
+                <a:ea typeface="+mn-ea"/>
+                <a:cs typeface="+mn-cs"/>
+              </a:defRPr>
+            </a:lvl6pPr>
+            <a:lvl7pPr marL="1554480" indent="-182880" algn="l" defTabSz="914400" rtl="0" eaLnBrk="1" latinLnBrk="0" hangingPunct="1">
+              <a:spcBef>
+                <a:spcPct val="20000"/>
+              </a:spcBef>
+              <a:buClr>
+                <a:schemeClr val="accent1"/>
+              </a:buClr>
+              <a:buFont typeface="Arial" pitchFamily="34" charset="0"/>
+              <a:buChar char="•"/>
+              <a:defRPr sz="1300" kern="1200">
+                <a:solidFill>
+                  <a:schemeClr val="tx1"/>
+                </a:solidFill>
+                <a:latin typeface="+mn-lt"/>
+                <a:ea typeface="+mn-ea"/>
+                <a:cs typeface="+mn-cs"/>
+              </a:defRPr>
+            </a:lvl7pPr>
+            <a:lvl8pPr marL="1737360" indent="-182880" algn="l" defTabSz="914400" rtl="0" eaLnBrk="1" latinLnBrk="0" hangingPunct="1">
+              <a:spcBef>
+                <a:spcPct val="20000"/>
+              </a:spcBef>
+              <a:buClr>
+                <a:schemeClr val="accent1"/>
+              </a:buClr>
+              <a:buFont typeface="Arial" pitchFamily="34" charset="0"/>
+              <a:buChar char="•"/>
+              <a:defRPr sz="1300" kern="1200">
+                <a:solidFill>
+                  <a:schemeClr val="tx1"/>
+                </a:solidFill>
+                <a:latin typeface="+mn-lt"/>
+                <a:ea typeface="+mn-ea"/>
+                <a:cs typeface="+mn-cs"/>
+              </a:defRPr>
+            </a:lvl8pPr>
+            <a:lvl9pPr marL="1920240" indent="-182880" algn="l" defTabSz="914400" rtl="0" eaLnBrk="1" latinLnBrk="0" hangingPunct="1">
+              <a:spcBef>
+                <a:spcPct val="20000"/>
+              </a:spcBef>
+              <a:buClr>
+                <a:schemeClr val="accent1"/>
+              </a:buClr>
+              <a:buFont typeface="Arial" pitchFamily="34" charset="0"/>
+              <a:buChar char="•"/>
+              <a:defRPr sz="1300" kern="1200">
+                <a:solidFill>
+                  <a:schemeClr val="tx1"/>
+                </a:solidFill>
+                <a:latin typeface="+mn-lt"/>
+                <a:ea typeface="+mn-ea"/>
+                <a:cs typeface="+mn-cs"/>
+              </a:defRPr>
+            </a:lvl9pPr>
+          </a:lstStyle>
+          <a:p>
+            <a:pPr marL="514350" indent="-514350">
+              <a:lnSpc>
+                <a:spcPct val="150000"/>
+              </a:lnSpc>
+              <a:buFont typeface="+mj-lt"/>
+              <a:buAutoNum type="romanUcPeriod"/>
+            </a:pPr>
+            <a:r>
+              <a:rPr lang="en-US" sz="2800" dirty="0"/>
+              <a:t>Determine </a:t>
+            </a:r>
+            <a:r>
+              <a:rPr lang="en-US" sz="2800" b="1" dirty="0"/>
+              <a:t>purpose </a:t>
+            </a:r>
+            <a:r>
+              <a:rPr lang="en-US" sz="2800" dirty="0"/>
+              <a:t>of database</a:t>
+            </a:r>
+          </a:p>
+          <a:p>
+            <a:pPr marL="514350" indent="-514350">
+              <a:lnSpc>
+                <a:spcPct val="150000"/>
+              </a:lnSpc>
+              <a:buFont typeface="+mj-lt"/>
+              <a:buAutoNum type="romanUcPeriod"/>
+            </a:pPr>
+            <a:r>
+              <a:rPr lang="en-US" sz="2800" dirty="0"/>
+              <a:t>Find &amp; organize </a:t>
+            </a:r>
+            <a:r>
+              <a:rPr lang="en-US" sz="2800" b="1" dirty="0"/>
+              <a:t>information </a:t>
+            </a:r>
+            <a:r>
+              <a:rPr lang="en-US" sz="2800" dirty="0"/>
+              <a:t>required</a:t>
+            </a:r>
+          </a:p>
+          <a:p>
+            <a:pPr marL="514350" indent="-514350">
+              <a:lnSpc>
+                <a:spcPct val="150000"/>
+              </a:lnSpc>
+              <a:buFont typeface="+mj-lt"/>
+              <a:buAutoNum type="romanUcPeriod"/>
+            </a:pPr>
+            <a:r>
+              <a:rPr lang="en-US" sz="2800" dirty="0"/>
+              <a:t>Create </a:t>
+            </a:r>
+            <a:r>
+              <a:rPr lang="en-US" sz="2800" b="1" dirty="0"/>
+              <a:t>Entity-Relationship </a:t>
+            </a:r>
+            <a:r>
+              <a:rPr lang="en-US" sz="2800" dirty="0"/>
+              <a:t>(E-R) diagram</a:t>
+            </a:r>
+          </a:p>
+          <a:p>
+            <a:pPr marL="514350" indent="-514350">
+              <a:lnSpc>
+                <a:spcPct val="150000"/>
+              </a:lnSpc>
+              <a:buFont typeface="+mj-lt"/>
+              <a:buAutoNum type="romanUcPeriod"/>
+            </a:pPr>
+            <a:r>
+              <a:rPr lang="en-US" sz="2800" b="1" dirty="0"/>
+              <a:t>Refine </a:t>
+            </a:r>
+            <a:r>
+              <a:rPr lang="en-US" sz="2800" dirty="0"/>
+              <a:t>design</a:t>
+            </a:r>
+          </a:p>
+          <a:p>
+            <a:pPr marL="514350" indent="-514350">
+              <a:lnSpc>
+                <a:spcPct val="150000"/>
+              </a:lnSpc>
+              <a:buFont typeface="+mj-lt"/>
+              <a:buAutoNum type="romanUcPeriod"/>
+            </a:pPr>
+            <a:r>
+              <a:rPr lang="en-US" sz="2800" dirty="0"/>
+              <a:t>Apply </a:t>
+            </a:r>
+            <a:r>
+              <a:rPr lang="en-US" sz="2800" b="1" dirty="0"/>
+              <a:t>normalization </a:t>
+            </a:r>
+            <a:r>
+              <a:rPr lang="en-US" sz="2800" dirty="0"/>
+              <a:t>rules</a:t>
+            </a:r>
+          </a:p>
+        </p:txBody>
+      </p:sp>
+      <p:sp>
+        <p:nvSpPr>
+          <p:cNvPr id="5" name="Rectangle 4">
+            <a:extLst>
+              <a:ext uri="{FF2B5EF4-FFF2-40B4-BE49-F238E27FC236}">
+                <a16:creationId xmlns:a16="http://schemas.microsoft.com/office/drawing/2014/main" id="{84C52F80-4932-E264-ADDE-27CEBA6F7C6C}"/>
+              </a:ext>
+            </a:extLst>
+          </p:cNvPr>
+          <p:cNvSpPr/>
+          <p:nvPr/>
+        </p:nvSpPr>
+        <p:spPr>
+          <a:xfrm>
+            <a:off x="4944731" y="1871932"/>
+            <a:ext cx="4207938" cy="312467"/>
+          </a:xfrm>
+          <a:prstGeom prst="rect">
+            <a:avLst/>
+          </a:prstGeom>
+          <a:solidFill>
+            <a:srgbClr val="FFFF00">
+              <a:alpha val="27000"/>
+            </a:srgbClr>
+          </a:solidFill>
+          <a:ln>
+            <a:noFill/>
+          </a:ln>
+        </p:spPr>
+        <p:style>
+          <a:lnRef idx="2">
+            <a:schemeClr val="accent1">
+              <a:shade val="50000"/>
+            </a:schemeClr>
+          </a:lnRef>
+          <a:fillRef idx="1">
+            <a:schemeClr val="accent1"/>
+          </a:fillRef>
+          <a:effectRef idx="0">
+            <a:schemeClr val="accent1"/>
+          </a:effectRef>
+          <a:fontRef idx="minor">
+            <a:schemeClr val="lt1"/>
+          </a:fontRef>
+        </p:style>
+        <p:txBody>
+          <a:bodyPr rtlCol="0" anchor="ctr"/>
+          <a:lstStyle/>
+          <a:p>
+            <a:pPr algn="ctr"/>
+            <a:endParaRPr lang="en-US"/>
+          </a:p>
+        </p:txBody>
+      </p:sp>
+    </p:spTree>
+    <p:extLst>
+      <p:ext uri="{BB962C8B-B14F-4D97-AF65-F5344CB8AC3E}">
+        <p14:creationId xmlns:p14="http://schemas.microsoft.com/office/powerpoint/2010/main" val="3736434980"/>
+      </p:ext>
+    </p:extLst>
+  </p:cSld>
+  <p:clrMapOvr>
+    <a:masterClrMapping/>
+  </p:clrMapOvr>
+</p:sld>
+</file>
+
+<file path=ppt/slides/slide29.xml><?xml version="1.0" encoding="utf-8"?>
+<p:sld xmlns:a="http://schemas.openxmlformats.org/drawingml/2006/main" xmlns:r="http://schemas.openxmlformats.org/officeDocument/2006/relationships" xmlns:p="http://schemas.openxmlformats.org/presentationml/2006/main">
+  <p:cSld>
+    <p:spTree>
+      <p:nvGrpSpPr>
+        <p:cNvPr id="1" name=""/>
+        <p:cNvGrpSpPr/>
+        <p:nvPr/>
+      </p:nvGrpSpPr>
+      <p:grpSpPr>
+        <a:xfrm>
+          <a:off x="0" y="0"/>
+          <a:ext cx="0" cy="0"/>
+          <a:chOff x="0" y="0"/>
+          <a:chExt cx="0" cy="0"/>
+        </a:xfrm>
+      </p:grpSpPr>
+      <p:sp>
+        <p:nvSpPr>
           <p:cNvPr id="3" name="Content Placeholder 2"/>
           <p:cNvSpPr>
             <a:spLocks noGrp="1"/>
@@ -25956,7 +27430,7 @@
                 <a:latin typeface="Arial"/>
               </a:rPr>
               <a:pPr/>
-              <a:t>26</a:t>
+              <a:t>29</a:t>
             </a:fld>
             <a:endParaRPr lang="en-US">
               <a:latin typeface="Arial"/>
@@ -26646,7 +28120,7 @@
 </p:sld>
 </file>
 
-<file path=ppt/slides/slide27.xml><?xml version="1.0" encoding="utf-8"?>
+<file path=ppt/slides/slide3.xml><?xml version="1.0" encoding="utf-8"?>
 <p:sld xmlns:a="http://schemas.openxmlformats.org/drawingml/2006/main" xmlns:r="http://schemas.openxmlformats.org/officeDocument/2006/relationships" xmlns:p="http://schemas.openxmlformats.org/presentationml/2006/main">
   <p:cSld>
     <p:spTree>
@@ -26665,6 +28139,186 @@
       </p:grpSpPr>
       <p:sp>
         <p:nvSpPr>
+          <p:cNvPr id="2" name="Title 1">
+            <a:extLst>
+              <a:ext uri="{FF2B5EF4-FFF2-40B4-BE49-F238E27FC236}">
+                <a16:creationId xmlns:a16="http://schemas.microsoft.com/office/drawing/2014/main" id="{EA27F824-7FF4-F985-8CFF-AA095251D966}"/>
+              </a:ext>
+            </a:extLst>
+          </p:cNvPr>
+          <p:cNvSpPr>
+            <a:spLocks noGrp="1"/>
+          </p:cNvSpPr>
+          <p:nvPr>
+            <p:ph type="title"/>
+          </p:nvPr>
+        </p:nvSpPr>
+        <p:spPr/>
+        <p:txBody>
+          <a:bodyPr/>
+          <a:lstStyle/>
+          <a:p>
+            <a:endParaRPr lang="en-US"/>
+          </a:p>
+        </p:txBody>
+      </p:sp>
+      <p:sp>
+        <p:nvSpPr>
+          <p:cNvPr id="3" name="Content Placeholder 2">
+            <a:extLst>
+              <a:ext uri="{FF2B5EF4-FFF2-40B4-BE49-F238E27FC236}">
+                <a16:creationId xmlns:a16="http://schemas.microsoft.com/office/drawing/2014/main" id="{99CF83EF-C188-02F1-A320-A2C8E65D7099}"/>
+              </a:ext>
+            </a:extLst>
+          </p:cNvPr>
+          <p:cNvSpPr>
+            <a:spLocks noGrp="1"/>
+          </p:cNvSpPr>
+          <p:nvPr>
+            <p:ph idx="1"/>
+          </p:nvPr>
+        </p:nvSpPr>
+        <p:spPr/>
+        <p:txBody>
+          <a:bodyPr/>
+          <a:lstStyle/>
+          <a:p>
+            <a:r>
+              <a:rPr lang="en-US" sz="2400" dirty="0"/>
+              <a:t>Create </a:t>
+            </a:r>
+            <a:r>
+              <a:rPr lang="en-US" sz="2400" b="1" dirty="0"/>
+              <a:t>Entity-Relationship </a:t>
+            </a:r>
+            <a:r>
+              <a:rPr lang="en-US" sz="2400" dirty="0"/>
+              <a:t>(E-R) diagram</a:t>
+            </a:r>
+          </a:p>
+          <a:p>
+            <a:endParaRPr lang="en-US" dirty="0"/>
+          </a:p>
+        </p:txBody>
+      </p:sp>
+      <p:sp>
+        <p:nvSpPr>
+          <p:cNvPr id="4" name="Slide Number Placeholder 3">
+            <a:extLst>
+              <a:ext uri="{FF2B5EF4-FFF2-40B4-BE49-F238E27FC236}">
+                <a16:creationId xmlns:a16="http://schemas.microsoft.com/office/drawing/2014/main" id="{3C65BE6B-53A8-5C31-3B01-A96EE789C616}"/>
+              </a:ext>
+            </a:extLst>
+          </p:cNvPr>
+          <p:cNvSpPr>
+            <a:spLocks noGrp="1"/>
+          </p:cNvSpPr>
+          <p:nvPr>
+            <p:ph type="sldNum" sz="quarter" idx="12"/>
+          </p:nvPr>
+        </p:nvSpPr>
+        <p:spPr/>
+        <p:txBody>
+          <a:bodyPr/>
+          <a:lstStyle/>
+          <a:p>
+            <a:fld id="{E345EAD5-4C19-43E8-92AC-D4AD00C5745A}" type="slidenum">
+              <a:rPr lang="en-US" smtClean="0">
+                <a:latin typeface="Arial"/>
+              </a:rPr>
+              <a:pPr/>
+              <a:t>3</a:t>
+            </a:fld>
+            <a:endParaRPr lang="en-US">
+              <a:latin typeface="Arial"/>
+            </a:endParaRPr>
+          </a:p>
+        </p:txBody>
+      </p:sp>
+      <p:pic>
+        <p:nvPicPr>
+          <p:cNvPr id="6" name="Picture 5">
+            <a:extLst>
+              <a:ext uri="{FF2B5EF4-FFF2-40B4-BE49-F238E27FC236}">
+                <a16:creationId xmlns:a16="http://schemas.microsoft.com/office/drawing/2014/main" id="{007CEF3A-1281-C9E4-DACF-7DE4457DC32F}"/>
+              </a:ext>
+            </a:extLst>
+          </p:cNvPr>
+          <p:cNvPicPr>
+            <a:picLocks noChangeAspect="1"/>
+          </p:cNvPicPr>
+          <p:nvPr/>
+        </p:nvPicPr>
+        <p:blipFill>
+          <a:blip r:embed="rId2"/>
+          <a:stretch>
+            <a:fillRect/>
+          </a:stretch>
+        </p:blipFill>
+        <p:spPr>
+          <a:xfrm>
+            <a:off x="941479" y="2696086"/>
+            <a:ext cx="7068536" cy="3439005"/>
+          </a:xfrm>
+          <a:prstGeom prst="rect">
+            <a:avLst/>
+          </a:prstGeom>
+          <a:ln>
+            <a:noFill/>
+          </a:ln>
+          <a:effectLst>
+            <a:outerShdw blurRad="184150" dist="241300" dir="11520000" sx="110000" sy="110000" algn="ctr">
+              <a:srgbClr val="000000">
+                <a:alpha val="18000"/>
+              </a:srgbClr>
+            </a:outerShdw>
+          </a:effectLst>
+          <a:scene3d>
+            <a:camera prst="perspectiveFront" fov="5100000">
+              <a:rot lat="0" lon="2100000" rev="0"/>
+            </a:camera>
+            <a:lightRig rig="flood" dir="t">
+              <a:rot lat="0" lon="0" rev="13800000"/>
+            </a:lightRig>
+          </a:scene3d>
+          <a:sp3d extrusionH="107950" prstMaterial="plastic">
+            <a:bevelT w="82550" h="63500" prst="divot"/>
+            <a:bevelB/>
+          </a:sp3d>
+        </p:spPr>
+      </p:pic>
+    </p:spTree>
+    <p:extLst>
+      <p:ext uri="{BB962C8B-B14F-4D97-AF65-F5344CB8AC3E}">
+        <p14:creationId xmlns:p14="http://schemas.microsoft.com/office/powerpoint/2010/main" val="2784182489"/>
+      </p:ext>
+    </p:extLst>
+  </p:cSld>
+  <p:clrMapOvr>
+    <a:masterClrMapping/>
+  </p:clrMapOvr>
+</p:sld>
+</file>
+
+<file path=ppt/slides/slide30.xml><?xml version="1.0" encoding="utf-8"?>
+<p:sld xmlns:a="http://schemas.openxmlformats.org/drawingml/2006/main" xmlns:r="http://schemas.openxmlformats.org/officeDocument/2006/relationships" xmlns:p="http://schemas.openxmlformats.org/presentationml/2006/main">
+  <p:cSld>
+    <p:spTree>
+      <p:nvGrpSpPr>
+        <p:cNvPr id="1" name=""/>
+        <p:cNvGrpSpPr/>
+        <p:nvPr/>
+      </p:nvGrpSpPr>
+      <p:grpSpPr>
+        <a:xfrm>
+          <a:off x="0" y="0"/>
+          <a:ext cx="0" cy="0"/>
+          <a:chOff x="0" y="0"/>
+          <a:chExt cx="0" cy="0"/>
+        </a:xfrm>
+      </p:grpSpPr>
+      <p:sp>
+        <p:nvSpPr>
           <p:cNvPr id="2" name="Title 1"/>
           <p:cNvSpPr>
             <a:spLocks noGrp="1"/>
@@ -26780,7 +28434,7 @@
                 <a:latin typeface="Arial"/>
               </a:rPr>
               <a:pPr/>
-              <a:t>27</a:t>
+              <a:t>30</a:t>
             </a:fld>
             <a:endParaRPr lang="en-US">
               <a:latin typeface="Arial"/>
@@ -27492,7 +29146,7 @@
 </p:sld>
 </file>
 
-<file path=ppt/slides/slide28.xml><?xml version="1.0" encoding="utf-8"?>
+<file path=ppt/slides/slide31.xml><?xml version="1.0" encoding="utf-8"?>
 <p:sld xmlns:a="http://schemas.openxmlformats.org/drawingml/2006/main" xmlns:r="http://schemas.openxmlformats.org/officeDocument/2006/relationships" xmlns:p="http://schemas.openxmlformats.org/presentationml/2006/main">
   <p:cSld>
     <p:spTree>
@@ -27558,7 +29212,7 @@
                 <a:latin typeface="Arial"/>
               </a:rPr>
               <a:pPr/>
-              <a:t>28</a:t>
+              <a:t>31</a:t>
             </a:fld>
             <a:endParaRPr lang="en-US">
               <a:latin typeface="Arial"/>
@@ -28505,7 +30159,7 @@
 </p:sld>
 </file>
 
-<file path=ppt/slides/slide29.xml><?xml version="1.0" encoding="utf-8"?>
+<file path=ppt/slides/slide32.xml><?xml version="1.0" encoding="utf-8"?>
 <p:sld xmlns:a="http://schemas.openxmlformats.org/drawingml/2006/main" xmlns:r="http://schemas.openxmlformats.org/officeDocument/2006/relationships" xmlns:p="http://schemas.openxmlformats.org/presentationml/2006/main">
   <p:cSld>
     <p:spTree>
@@ -28571,7 +30225,7 @@
                 <a:latin typeface="Arial"/>
               </a:rPr>
               <a:pPr/>
-              <a:t>29</a:t>
+              <a:t>32</a:t>
             </a:fld>
             <a:endParaRPr lang="en-US">
               <a:latin typeface="Arial"/>
@@ -29366,7 +31020,7 @@
 </p:sld>
 </file>
 
-<file path=ppt/slides/slide3.xml><?xml version="1.0" encoding="utf-8"?>
+<file path=ppt/slides/slide33.xml><?xml version="1.0" encoding="utf-8"?>
 <p:sld xmlns:a="http://schemas.openxmlformats.org/drawingml/2006/main" xmlns:r="http://schemas.openxmlformats.org/officeDocument/2006/relationships" xmlns:p="http://schemas.openxmlformats.org/presentationml/2006/main">
   <p:cSld>
     <p:spTree>
@@ -29385,13 +31039,7 @@
       </p:grpSpPr>
       <p:sp>
         <p:nvSpPr>
-          <p:cNvPr id="2" name="Title 1">
-            <a:extLst>
-              <a:ext uri="{FF2B5EF4-FFF2-40B4-BE49-F238E27FC236}">
-                <a16:creationId xmlns:a16="http://schemas.microsoft.com/office/drawing/2014/main" id="{EA27F824-7FF4-F985-8CFF-AA095251D966}"/>
-              </a:ext>
-            </a:extLst>
-          </p:cNvPr>
+          <p:cNvPr id="2" name="Title 1"/>
           <p:cNvSpPr>
             <a:spLocks noGrp="1"/>
           </p:cNvSpPr>
@@ -29401,22 +31049,36 @@
         </p:nvSpPr>
         <p:spPr/>
         <p:txBody>
-          <a:bodyPr/>
+          <a:bodyPr>
+            <a:normAutofit fontScale="90000"/>
+          </a:bodyPr>
           <a:lstStyle/>
           <a:p>
-            <a:endParaRPr lang="en-US"/>
+            <a:r>
+              <a:rPr lang="en-US" dirty="0"/>
+              <a:t>Design a Database: </a:t>
+            </a:r>
+            <a:br>
+              <a:rPr lang="en-US" dirty="0"/>
+            </a:br>
+            <a:r>
+              <a:rPr lang="en-US" dirty="0"/>
+              <a:t> Feline Novelties Example</a:t>
+            </a:r>
+            <a:br>
+              <a:rPr lang="en-US" dirty="0"/>
+            </a:br>
+            <a:r>
+              <a:rPr lang="en-US" sz="2700" dirty="0"/>
+              <a:t>Variation of Case 1 from textbook</a:t>
+            </a:r>
+            <a:endParaRPr lang="en-US" dirty="0"/>
           </a:p>
         </p:txBody>
       </p:sp>
       <p:sp>
         <p:nvSpPr>
-          <p:cNvPr id="3" name="Content Placeholder 2">
-            <a:extLst>
-              <a:ext uri="{FF2B5EF4-FFF2-40B4-BE49-F238E27FC236}">
-                <a16:creationId xmlns:a16="http://schemas.microsoft.com/office/drawing/2014/main" id="{99CF83EF-C188-02F1-A320-A2C8E65D7099}"/>
-              </a:ext>
-            </a:extLst>
-          </p:cNvPr>
+          <p:cNvPr id="3" name="Content Placeholder 2"/>
           <p:cNvSpPr>
             <a:spLocks noGrp="1"/>
           </p:cNvSpPr>
@@ -29424,38 +31086,50 @@
             <p:ph idx="1"/>
           </p:nvPr>
         </p:nvSpPr>
-        <p:spPr/>
+        <p:spPr>
+          <a:xfrm>
+            <a:off x="457200" y="1917700"/>
+            <a:ext cx="8229600" cy="4559300"/>
+          </a:xfrm>
+        </p:spPr>
         <p:txBody>
-          <a:bodyPr/>
+          <a:bodyPr>
+            <a:normAutofit/>
+          </a:bodyPr>
           <a:lstStyle/>
           <a:p>
-            <a:r>
-              <a:rPr lang="en-US" sz="2400" dirty="0"/>
-              <a:t>Create </a:t>
-            </a:r>
-            <a:r>
-              <a:rPr lang="en-US" sz="2400" b="1" dirty="0"/>
-              <a:t>Entity-Relationship </a:t>
-            </a:r>
-            <a:r>
-              <a:rPr lang="en-US" sz="2400" dirty="0"/>
-              <a:t>(E-R) diagram</a:t>
-            </a:r>
-          </a:p>
-          <a:p>
+            <a:pPr marL="0" indent="0">
+              <a:buNone/>
+            </a:pPr>
+            <a:r>
+              <a:rPr lang="en-US" dirty="0"/>
+              <a:t>We’ll follow this example for each step in the design process.  </a:t>
+            </a:r>
+          </a:p>
+          <a:p>
+            <a:pPr marL="0" indent="0">
+              <a:buNone/>
+            </a:pPr>
             <a:endParaRPr lang="en-US" dirty="0"/>
           </a:p>
+          <a:p>
+            <a:pPr marL="0" indent="0">
+              <a:buNone/>
+            </a:pPr>
+            <a:r>
+              <a:rPr lang="en-US" b="1" dirty="0"/>
+              <a:t>Background</a:t>
+            </a:r>
+            <a:r>
+              <a:rPr lang="en-US" dirty="0"/>
+              <a:t>:  Your friend, Michelle, has approached you about a start-up business she has created.  Michelle has always been a cat lover and knows that many of her friends share her love of felines.  She has always wanted to be her own boss and has begun to sell specialty cat toys and treats on a monthly basis to her friends locally.  The initial reaction to her business has been strong, and she has enlisted your help to computerize her ordering system.</a:t>
+            </a:r>
+          </a:p>
         </p:txBody>
       </p:sp>
       <p:sp>
         <p:nvSpPr>
-          <p:cNvPr id="4" name="Slide Number Placeholder 3">
-            <a:extLst>
-              <a:ext uri="{FF2B5EF4-FFF2-40B4-BE49-F238E27FC236}">
-                <a16:creationId xmlns:a16="http://schemas.microsoft.com/office/drawing/2014/main" id="{3C65BE6B-53A8-5C31-3B01-A96EE789C616}"/>
-              </a:ext>
-            </a:extLst>
-          </p:cNvPr>
+          <p:cNvPr id="4" name="Slide Number Placeholder 3"/>
           <p:cNvSpPr>
             <a:spLocks noGrp="1"/>
           </p:cNvSpPr>
@@ -29473,7 +31147,7 @@
                 <a:latin typeface="Arial"/>
               </a:rPr>
               <a:pPr/>
-              <a:t>3</a:t>
+              <a:t>33</a:t>
             </a:fld>
             <a:endParaRPr lang="en-US">
               <a:latin typeface="Arial"/>
@@ -29481,62 +31155,10 @@
           </a:p>
         </p:txBody>
       </p:sp>
-      <p:pic>
-        <p:nvPicPr>
-          <p:cNvPr id="6" name="Picture 5">
-            <a:extLst>
-              <a:ext uri="{FF2B5EF4-FFF2-40B4-BE49-F238E27FC236}">
-                <a16:creationId xmlns:a16="http://schemas.microsoft.com/office/drawing/2014/main" id="{007CEF3A-1281-C9E4-DACF-7DE4457DC32F}"/>
-              </a:ext>
-            </a:extLst>
-          </p:cNvPr>
-          <p:cNvPicPr>
-            <a:picLocks noChangeAspect="1"/>
-          </p:cNvPicPr>
-          <p:nvPr/>
-        </p:nvPicPr>
-        <p:blipFill>
-          <a:blip r:embed="rId2"/>
-          <a:stretch>
-            <a:fillRect/>
-          </a:stretch>
-        </p:blipFill>
-        <p:spPr>
-          <a:xfrm>
-            <a:off x="941479" y="2696086"/>
-            <a:ext cx="7068536" cy="3439005"/>
-          </a:xfrm>
-          <a:prstGeom prst="rect">
-            <a:avLst/>
-          </a:prstGeom>
-          <a:ln>
-            <a:noFill/>
-          </a:ln>
-          <a:effectLst>
-            <a:outerShdw blurRad="184150" dist="241300" dir="11520000" sx="110000" sy="110000" algn="ctr">
-              <a:srgbClr val="000000">
-                <a:alpha val="18000"/>
-              </a:srgbClr>
-            </a:outerShdw>
-          </a:effectLst>
-          <a:scene3d>
-            <a:camera prst="perspectiveFront" fov="5100000">
-              <a:rot lat="0" lon="2100000" rev="0"/>
-            </a:camera>
-            <a:lightRig rig="flood" dir="t">
-              <a:rot lat="0" lon="0" rev="13800000"/>
-            </a:lightRig>
-          </a:scene3d>
-          <a:sp3d extrusionH="107950" prstMaterial="plastic">
-            <a:bevelT w="82550" h="63500" prst="divot"/>
-            <a:bevelB/>
-          </a:sp3d>
-        </p:spPr>
-      </p:pic>
     </p:spTree>
     <p:extLst>
       <p:ext uri="{BB962C8B-B14F-4D97-AF65-F5344CB8AC3E}">
-        <p14:creationId xmlns:p14="http://schemas.microsoft.com/office/powerpoint/2010/main" val="2784182489"/>
+        <p14:creationId xmlns:p14="http://schemas.microsoft.com/office/powerpoint/2010/main" val="763702313"/>
       </p:ext>
     </p:extLst>
   </p:cSld>
@@ -29546,7 +31168,7 @@
 </p:sld>
 </file>
 
-<file path=ppt/slides/slide30.xml><?xml version="1.0" encoding="utf-8"?>
+<file path=ppt/slides/slide34.xml><?xml version="1.0" encoding="utf-8"?>
 <p:sld xmlns:a="http://schemas.openxmlformats.org/drawingml/2006/main" xmlns:r="http://schemas.openxmlformats.org/officeDocument/2006/relationships" xmlns:p="http://schemas.openxmlformats.org/presentationml/2006/main">
   <p:cSld>
     <p:spTree>
@@ -29576,29 +31198,14 @@
         <p:spPr/>
         <p:txBody>
           <a:bodyPr>
-            <a:normAutofit fontScale="90000"/>
+            <a:normAutofit/>
           </a:bodyPr>
           <a:lstStyle/>
           <a:p>
             <a:r>
               <a:rPr lang="en-US" dirty="0"/>
-              <a:t>Design a Database: </a:t>
-            </a:r>
-            <a:br>
-              <a:rPr lang="en-US" dirty="0"/>
-            </a:br>
-            <a:r>
-              <a:rPr lang="en-US" dirty="0"/>
-              <a:t> Feline Novelties Example</a:t>
-            </a:r>
-            <a:br>
-              <a:rPr lang="en-US" dirty="0"/>
-            </a:br>
-            <a:r>
-              <a:rPr lang="en-US" sz="2700" dirty="0"/>
-              <a:t>Variation of Case 1 from textbook</a:t>
-            </a:r>
-            <a:endParaRPr lang="en-US" dirty="0"/>
+              <a:t>Feline Novelties Example</a:t>
+            </a:r>
           </a:p>
         </p:txBody>
       </p:sp>
@@ -29612,15 +31219,10 @@
             <p:ph idx="1"/>
           </p:nvPr>
         </p:nvSpPr>
-        <p:spPr>
-          <a:xfrm>
-            <a:off x="457200" y="1917700"/>
-            <a:ext cx="8229600" cy="4559300"/>
-          </a:xfrm>
-        </p:spPr>
+        <p:spPr/>
         <p:txBody>
           <a:bodyPr>
-            <a:normAutofit/>
+            <a:normAutofit fontScale="92500" lnSpcReduction="10000"/>
           </a:bodyPr>
           <a:lstStyle/>
           <a:p>
@@ -29628,27 +31230,48 @@
               <a:buNone/>
             </a:pPr>
             <a:r>
+              <a:rPr lang="en-US" b="1" dirty="0"/>
+              <a:t>How the business works:</a:t>
+            </a:r>
+            <a:r>
               <a:rPr lang="en-US" dirty="0"/>
-              <a:t>We’ll follow this example for each step in the design process.  </a:t>
-            </a:r>
-          </a:p>
-          <a:p>
-            <a:pPr marL="0" indent="0">
-              <a:buNone/>
-            </a:pPr>
-            <a:endParaRPr lang="en-US" dirty="0"/>
-          </a:p>
-          <a:p>
-            <a:pPr marL="0" indent="0">
-              <a:buNone/>
-            </a:pPr>
-            <a:r>
-              <a:rPr lang="en-US" b="1" dirty="0"/>
-              <a:t>Background</a:t>
-            </a:r>
+              <a:t>  </a:t>
+            </a:r>
+          </a:p>
+          <a:p>
             <a:r>
               <a:rPr lang="en-US" dirty="0"/>
-              <a:t>:  Your friend, Michelle, has approached you about a start-up business she has created.  Michelle has always been a cat lover and knows that many of her friends share her love of felines.  She has always wanted to be her own boss and has begun to sell specialty cat toys and treats on a monthly basis to her friends locally.  The initial reaction to her business has been strong, and she has enlisted your help to computerize her ordering system.</a:t>
+              <a:t>Customers can sign up for monthly boxes to contain cat toys, treats, and other goodies geared towards cats.  </a:t>
+            </a:r>
+          </a:p>
+          <a:p>
+            <a:r>
+              <a:rPr lang="en-US" dirty="0"/>
+              <a:t>Customers pay a monthly fee that is debited to their credit cards and automatically receive a box of goodies.  </a:t>
+            </a:r>
+          </a:p>
+          <a:p>
+            <a:r>
+              <a:rPr lang="en-US" dirty="0"/>
+              <a:t>Cats have fickle natures, so the new toys and treats are a delight to them and hence to their owners.  </a:t>
+            </a:r>
+          </a:p>
+          <a:p>
+            <a:r>
+              <a:rPr lang="en-US" dirty="0"/>
+              <a:t>Currently, Michelle uses a third party that takes care of credit card payments.  </a:t>
+            </a:r>
+          </a:p>
+          <a:p>
+            <a:r>
+              <a:rPr lang="en-US" dirty="0"/>
+              <a:t>She wants you to concentrate on the ordering side of the business.  </a:t>
+            </a:r>
+          </a:p>
+          <a:p>
+            <a:r>
+              <a:rPr lang="en-US" dirty="0"/>
+              <a:t>You suggest creating an Access database to track and record all orders for her small business.  You have experience using the program from your IS coursework.</a:t>
             </a:r>
           </a:p>
         </p:txBody>
@@ -29673,156 +31296,7 @@
                 <a:latin typeface="Arial"/>
               </a:rPr>
               <a:pPr/>
-              <a:t>30</a:t>
-            </a:fld>
-            <a:endParaRPr lang="en-US">
-              <a:latin typeface="Arial"/>
-            </a:endParaRPr>
-          </a:p>
-        </p:txBody>
-      </p:sp>
-    </p:spTree>
-    <p:extLst>
-      <p:ext uri="{BB962C8B-B14F-4D97-AF65-F5344CB8AC3E}">
-        <p14:creationId xmlns:p14="http://schemas.microsoft.com/office/powerpoint/2010/main" val="763702313"/>
-      </p:ext>
-    </p:extLst>
-  </p:cSld>
-  <p:clrMapOvr>
-    <a:masterClrMapping/>
-  </p:clrMapOvr>
-</p:sld>
-</file>
-
-<file path=ppt/slides/slide31.xml><?xml version="1.0" encoding="utf-8"?>
-<p:sld xmlns:a="http://schemas.openxmlformats.org/drawingml/2006/main" xmlns:r="http://schemas.openxmlformats.org/officeDocument/2006/relationships" xmlns:p="http://schemas.openxmlformats.org/presentationml/2006/main">
-  <p:cSld>
-    <p:spTree>
-      <p:nvGrpSpPr>
-        <p:cNvPr id="1" name=""/>
-        <p:cNvGrpSpPr/>
-        <p:nvPr/>
-      </p:nvGrpSpPr>
-      <p:grpSpPr>
-        <a:xfrm>
-          <a:off x="0" y="0"/>
-          <a:ext cx="0" cy="0"/>
-          <a:chOff x="0" y="0"/>
-          <a:chExt cx="0" cy="0"/>
-        </a:xfrm>
-      </p:grpSpPr>
-      <p:sp>
-        <p:nvSpPr>
-          <p:cNvPr id="2" name="Title 1"/>
-          <p:cNvSpPr>
-            <a:spLocks noGrp="1"/>
-          </p:cNvSpPr>
-          <p:nvPr>
-            <p:ph type="title"/>
-          </p:nvPr>
-        </p:nvSpPr>
-        <p:spPr/>
-        <p:txBody>
-          <a:bodyPr>
-            <a:normAutofit/>
-          </a:bodyPr>
-          <a:lstStyle/>
-          <a:p>
-            <a:r>
-              <a:rPr lang="en-US" dirty="0"/>
-              <a:t>Feline Novelties Example</a:t>
-            </a:r>
-          </a:p>
-        </p:txBody>
-      </p:sp>
-      <p:sp>
-        <p:nvSpPr>
-          <p:cNvPr id="3" name="Content Placeholder 2"/>
-          <p:cNvSpPr>
-            <a:spLocks noGrp="1"/>
-          </p:cNvSpPr>
-          <p:nvPr>
-            <p:ph idx="1"/>
-          </p:nvPr>
-        </p:nvSpPr>
-        <p:spPr/>
-        <p:txBody>
-          <a:bodyPr>
-            <a:normAutofit fontScale="92500" lnSpcReduction="10000"/>
-          </a:bodyPr>
-          <a:lstStyle/>
-          <a:p>
-            <a:pPr marL="0" indent="0">
-              <a:buNone/>
-            </a:pPr>
-            <a:r>
-              <a:rPr lang="en-US" b="1" dirty="0"/>
-              <a:t>How the business works:</a:t>
-            </a:r>
-            <a:r>
-              <a:rPr lang="en-US" dirty="0"/>
-              <a:t>  </a:t>
-            </a:r>
-          </a:p>
-          <a:p>
-            <a:r>
-              <a:rPr lang="en-US" dirty="0"/>
-              <a:t>Customers can sign up for monthly boxes to contain cat toys, treats, and other goodies geared towards cats.  </a:t>
-            </a:r>
-          </a:p>
-          <a:p>
-            <a:r>
-              <a:rPr lang="en-US" dirty="0"/>
-              <a:t>Customers pay a monthly fee that is debited to their credit cards and automatically receive a box of goodies.  </a:t>
-            </a:r>
-          </a:p>
-          <a:p>
-            <a:r>
-              <a:rPr lang="en-US" dirty="0"/>
-              <a:t>Cats have fickle natures, so the new toys and treats are a delight to them and hence to their owners.  </a:t>
-            </a:r>
-          </a:p>
-          <a:p>
-            <a:r>
-              <a:rPr lang="en-US" dirty="0"/>
-              <a:t>Currently, Michelle uses a third party that takes care of credit card payments.  </a:t>
-            </a:r>
-          </a:p>
-          <a:p>
-            <a:r>
-              <a:rPr lang="en-US" dirty="0"/>
-              <a:t>She wants you to concentrate on the ordering side of the business.  </a:t>
-            </a:r>
-          </a:p>
-          <a:p>
-            <a:r>
-              <a:rPr lang="en-US" dirty="0"/>
-              <a:t>You suggest creating an Access database to track and record all orders for her small business.  You have experience using the program from your IS coursework.</a:t>
-            </a:r>
-          </a:p>
-        </p:txBody>
-      </p:sp>
-      <p:sp>
-        <p:nvSpPr>
-          <p:cNvPr id="4" name="Slide Number Placeholder 3"/>
-          <p:cNvSpPr>
-            <a:spLocks noGrp="1"/>
-          </p:cNvSpPr>
-          <p:nvPr>
-            <p:ph type="sldNum" sz="quarter" idx="12"/>
-          </p:nvPr>
-        </p:nvSpPr>
-        <p:spPr/>
-        <p:txBody>
-          <a:bodyPr/>
-          <a:lstStyle/>
-          <a:p>
-            <a:fld id="{E345EAD5-4C19-43E8-92AC-D4AD00C5745A}" type="slidenum">
-              <a:rPr lang="en-US" smtClean="0">
-                <a:latin typeface="Arial"/>
-              </a:rPr>
-              <a:pPr/>
-              <a:t>31</a:t>
+              <a:t>34</a:t>
             </a:fld>
             <a:endParaRPr lang="en-US">
               <a:latin typeface="Arial"/>
@@ -30208,7 +31682,7 @@
 </p:sld>
 </file>
 
-<file path=ppt/slides/slide32.xml><?xml version="1.0" encoding="utf-8"?>
+<file path=ppt/slides/slide35.xml><?xml version="1.0" encoding="utf-8"?>
 <p:sld xmlns:a="http://schemas.openxmlformats.org/drawingml/2006/main" xmlns:r="http://schemas.openxmlformats.org/officeDocument/2006/relationships" xmlns:p="http://schemas.openxmlformats.org/presentationml/2006/main">
   <p:cSld>
     <p:spTree>
@@ -30340,7 +31814,7 @@
                 <a:latin typeface="Arial"/>
               </a:rPr>
               <a:pPr/>
-              <a:t>32</a:t>
+              <a:t>35</a:t>
             </a:fld>
             <a:endParaRPr lang="en-US">
               <a:latin typeface="Arial"/>
@@ -30530,7 +32004,7 @@
 </p:sld>
 </file>
 
-<file path=ppt/slides/slide33.xml><?xml version="1.0" encoding="utf-8"?>
+<file path=ppt/slides/slide36.xml><?xml version="1.0" encoding="utf-8"?>
 <p:sld xmlns:a="http://schemas.openxmlformats.org/drawingml/2006/main" xmlns:r="http://schemas.openxmlformats.org/officeDocument/2006/relationships" xmlns:p="http://schemas.openxmlformats.org/presentationml/2006/main">
   <p:cSld>
     <p:spTree>
@@ -30760,7 +32234,7 @@
 </p:sld>
 </file>
 
-<file path=ppt/slides/slide34.xml><?xml version="1.0" encoding="utf-8"?>
+<file path=ppt/slides/slide37.xml><?xml version="1.0" encoding="utf-8"?>
 <p:sld xmlns:a="http://schemas.openxmlformats.org/drawingml/2006/main" xmlns:r="http://schemas.openxmlformats.org/officeDocument/2006/relationships" xmlns:p="http://schemas.openxmlformats.org/presentationml/2006/main">
   <p:cSld>
     <p:spTree>
@@ -30894,7 +32368,7 @@
                 <a:latin typeface="Arial"/>
               </a:rPr>
               <a:pPr/>
-              <a:t>34</a:t>
+              <a:t>37</a:t>
             </a:fld>
             <a:endParaRPr lang="en-US">
               <a:latin typeface="Arial"/>
@@ -31255,7 +32729,7 @@
 </p:sld>
 </file>
 
-<file path=ppt/slides/slide35.xml><?xml version="1.0" encoding="utf-8"?>
+<file path=ppt/slides/slide38.xml><?xml version="1.0" encoding="utf-8"?>
 <p:sld xmlns:a="http://schemas.openxmlformats.org/drawingml/2006/main" xmlns:r="http://schemas.openxmlformats.org/officeDocument/2006/relationships" xmlns:p="http://schemas.openxmlformats.org/presentationml/2006/main">
   <p:cSld>
     <p:spTree>
@@ -31381,7 +32855,7 @@
                 <a:latin typeface="Arial"/>
               </a:rPr>
               <a:pPr/>
-              <a:t>35</a:t>
+              <a:t>38</a:t>
             </a:fld>
             <a:endParaRPr lang="en-US">
               <a:latin typeface="Arial"/>
@@ -31742,7 +33216,7 @@
 </p:sld>
 </file>
 
-<file path=ppt/slides/slide36.xml><?xml version="1.0" encoding="utf-8"?>
+<file path=ppt/slides/slide39.xml><?xml version="1.0" encoding="utf-8"?>
 <p:sld xmlns:a="http://schemas.openxmlformats.org/drawingml/2006/main" xmlns:r="http://schemas.openxmlformats.org/officeDocument/2006/relationships" xmlns:p="http://schemas.openxmlformats.org/presentationml/2006/main">
   <p:cSld>
     <p:spTree>
@@ -31890,7 +33364,7 @@
                 <a:latin typeface="Arial"/>
               </a:rPr>
               <a:pPr/>
-              <a:t>36</a:t>
+              <a:t>39</a:t>
             </a:fld>
             <a:endParaRPr lang="en-US">
               <a:latin typeface="Arial"/>
@@ -32251,7 +33725,7 @@
 </p:sld>
 </file>
 
-<file path=ppt/slides/slide37.xml><?xml version="1.0" encoding="utf-8"?>
+<file path=ppt/slides/slide4.xml><?xml version="1.0" encoding="utf-8"?>
 <p:sld xmlns:a="http://schemas.openxmlformats.org/drawingml/2006/main" xmlns:r="http://schemas.openxmlformats.org/officeDocument/2006/relationships" xmlns:p="http://schemas.openxmlformats.org/presentationml/2006/main">
   <p:cSld>
     <p:spTree>
@@ -32270,6 +33744,271 @@
       </p:grpSpPr>
       <p:sp>
         <p:nvSpPr>
+          <p:cNvPr id="2" name="Title 1"/>
+          <p:cNvSpPr>
+            <a:spLocks noGrp="1"/>
+          </p:cNvSpPr>
+          <p:nvPr>
+            <p:ph type="title"/>
+          </p:nvPr>
+        </p:nvSpPr>
+        <p:spPr/>
+        <p:txBody>
+          <a:bodyPr>
+            <a:normAutofit/>
+          </a:bodyPr>
+          <a:lstStyle/>
+          <a:p>
+            <a:r>
+              <a:rPr lang="en-US" sz="3200" dirty="0"/>
+              <a:t>Designing a Relational Database: Overview</a:t>
+            </a:r>
+          </a:p>
+        </p:txBody>
+      </p:sp>
+      <p:sp>
+        <p:nvSpPr>
+          <p:cNvPr id="3" name="Content Placeholder 2"/>
+          <p:cNvSpPr>
+            <a:spLocks noGrp="1"/>
+          </p:cNvSpPr>
+          <p:nvPr>
+            <p:ph idx="1"/>
+          </p:nvPr>
+        </p:nvSpPr>
+        <p:spPr/>
+        <p:txBody>
+          <a:bodyPr>
+            <a:normAutofit/>
+          </a:bodyPr>
+          <a:lstStyle/>
+          <a:p>
+            <a:pPr marL="514350" indent="-514350">
+              <a:lnSpc>
+                <a:spcPct val="150000"/>
+              </a:lnSpc>
+              <a:buFont typeface="+mj-lt"/>
+              <a:buAutoNum type="romanUcPeriod"/>
+            </a:pPr>
+            <a:r>
+              <a:rPr lang="en-US" sz="2800" dirty="0"/>
+              <a:t>Determine </a:t>
+            </a:r>
+            <a:r>
+              <a:rPr lang="en-US" sz="2800" b="1" dirty="0"/>
+              <a:t>purpose </a:t>
+            </a:r>
+            <a:r>
+              <a:rPr lang="en-US" sz="2800" dirty="0"/>
+              <a:t>of database</a:t>
+            </a:r>
+          </a:p>
+          <a:p>
+            <a:pPr marL="514350" indent="-514350">
+              <a:lnSpc>
+                <a:spcPct val="150000"/>
+              </a:lnSpc>
+              <a:buFont typeface="+mj-lt"/>
+              <a:buAutoNum type="romanUcPeriod"/>
+            </a:pPr>
+            <a:r>
+              <a:rPr lang="en-US" sz="2800" dirty="0"/>
+              <a:t>Find &amp; organize </a:t>
+            </a:r>
+            <a:r>
+              <a:rPr lang="en-US" sz="2800" b="1" dirty="0"/>
+              <a:t>information </a:t>
+            </a:r>
+            <a:r>
+              <a:rPr lang="en-US" sz="2800" dirty="0"/>
+              <a:t>required</a:t>
+            </a:r>
+          </a:p>
+          <a:p>
+            <a:pPr marL="514350" indent="-514350">
+              <a:lnSpc>
+                <a:spcPct val="150000"/>
+              </a:lnSpc>
+              <a:buFont typeface="+mj-lt"/>
+              <a:buAutoNum type="romanUcPeriod"/>
+            </a:pPr>
+            <a:r>
+              <a:rPr lang="en-US" sz="2800" dirty="0"/>
+              <a:t>Create </a:t>
+            </a:r>
+            <a:r>
+              <a:rPr lang="en-US" sz="2800" b="1" dirty="0"/>
+              <a:t>Entity-Relationship </a:t>
+            </a:r>
+            <a:r>
+              <a:rPr lang="en-US" sz="2800" dirty="0"/>
+              <a:t>(E-R) diagram</a:t>
+            </a:r>
+          </a:p>
+          <a:p>
+            <a:pPr marL="514350" indent="-514350">
+              <a:lnSpc>
+                <a:spcPct val="150000"/>
+              </a:lnSpc>
+              <a:buFont typeface="+mj-lt"/>
+              <a:buAutoNum type="romanUcPeriod"/>
+            </a:pPr>
+            <a:r>
+              <a:rPr lang="en-US" sz="2800" b="1" dirty="0"/>
+              <a:t>Refine </a:t>
+            </a:r>
+            <a:r>
+              <a:rPr lang="en-US" sz="2800" dirty="0"/>
+              <a:t>design</a:t>
+            </a:r>
+          </a:p>
+          <a:p>
+            <a:pPr marL="514350" indent="-514350">
+              <a:lnSpc>
+                <a:spcPct val="150000"/>
+              </a:lnSpc>
+              <a:buFont typeface="+mj-lt"/>
+              <a:buAutoNum type="romanUcPeriod"/>
+            </a:pPr>
+            <a:r>
+              <a:rPr lang="en-US" sz="2800" dirty="0"/>
+              <a:t>Apply </a:t>
+            </a:r>
+            <a:r>
+              <a:rPr lang="en-US" sz="2800" b="1" dirty="0"/>
+              <a:t>normalization </a:t>
+            </a:r>
+            <a:r>
+              <a:rPr lang="en-US" sz="2800" dirty="0"/>
+              <a:t>rules</a:t>
+            </a:r>
+          </a:p>
+        </p:txBody>
+      </p:sp>
+      <p:sp>
+        <p:nvSpPr>
+          <p:cNvPr id="4" name="Slide Number Placeholder 3"/>
+          <p:cNvSpPr>
+            <a:spLocks noGrp="1"/>
+          </p:cNvSpPr>
+          <p:nvPr>
+            <p:ph type="sldNum" sz="quarter" idx="12"/>
+          </p:nvPr>
+        </p:nvSpPr>
+        <p:spPr/>
+        <p:txBody>
+          <a:bodyPr/>
+          <a:lstStyle/>
+          <a:p>
+            <a:fld id="{E345EAD5-4C19-43E8-92AC-D4AD00C5745A}" type="slidenum">
+              <a:rPr lang="en-US" smtClean="0">
+                <a:latin typeface="Arial"/>
+              </a:rPr>
+              <a:pPr/>
+              <a:t>4</a:t>
+            </a:fld>
+            <a:endParaRPr lang="en-US">
+              <a:latin typeface="Arial"/>
+            </a:endParaRPr>
+          </a:p>
+        </p:txBody>
+      </p:sp>
+      <p:sp>
+        <p:nvSpPr>
+          <p:cNvPr id="5" name="TextBox 4"/>
+          <p:cNvSpPr txBox="1"/>
+          <p:nvPr/>
+        </p:nvSpPr>
+        <p:spPr>
+          <a:xfrm>
+            <a:off x="228600" y="5905500"/>
+            <a:ext cx="8571577" cy="461665"/>
+          </a:xfrm>
+          <a:prstGeom prst="rect">
+            <a:avLst/>
+          </a:prstGeom>
+          <a:noFill/>
+        </p:spPr>
+        <p:txBody>
+          <a:bodyPr wrap="none" rtlCol="0">
+            <a:spAutoFit/>
+          </a:bodyPr>
+          <a:lstStyle/>
+          <a:p>
+            <a:r>
+              <a:rPr lang="en-US" sz="2400" i="1" dirty="0"/>
+              <a:t>Follow this process for the Library example on the homework.</a:t>
+            </a:r>
+          </a:p>
+        </p:txBody>
+      </p:sp>
+      <p:sp>
+        <p:nvSpPr>
+          <p:cNvPr id="6" name="TextBox 5"/>
+          <p:cNvSpPr txBox="1"/>
+          <p:nvPr/>
+        </p:nvSpPr>
+        <p:spPr>
+          <a:xfrm>
+            <a:off x="6639067" y="4996765"/>
+            <a:ext cx="1133644" cy="646331"/>
+          </a:xfrm>
+          <a:prstGeom prst="rect">
+            <a:avLst/>
+          </a:prstGeom>
+          <a:noFill/>
+        </p:spPr>
+        <p:txBody>
+          <a:bodyPr wrap="none" rtlCol="0">
+            <a:spAutoFit/>
+          </a:bodyPr>
+          <a:lstStyle/>
+          <a:p>
+            <a:r>
+              <a:rPr lang="en-US" b="1" dirty="0"/>
+              <a:t>PIER-RN</a:t>
+            </a:r>
+          </a:p>
+          <a:p>
+            <a:r>
+              <a:rPr lang="en-US" dirty="0"/>
+              <a:t> </a:t>
+            </a:r>
+          </a:p>
+        </p:txBody>
+      </p:sp>
+    </p:spTree>
+    <p:extLst>
+      <p:ext uri="{BB962C8B-B14F-4D97-AF65-F5344CB8AC3E}">
+        <p14:creationId xmlns:p14="http://schemas.microsoft.com/office/powerpoint/2010/main" val="3239075246"/>
+      </p:ext>
+    </p:extLst>
+  </p:cSld>
+  <p:clrMapOvr>
+    <a:masterClrMapping/>
+  </p:clrMapOvr>
+</p:sld>
+</file>
+
+<file path=ppt/slides/slide40.xml><?xml version="1.0" encoding="utf-8"?>
+<p:sld xmlns:a="http://schemas.openxmlformats.org/drawingml/2006/main" xmlns:r="http://schemas.openxmlformats.org/officeDocument/2006/relationships" xmlns:p="http://schemas.openxmlformats.org/presentationml/2006/main">
+  <p:cSld>
+    <p:spTree>
+      <p:nvGrpSpPr>
+        <p:cNvPr id="1" name=""/>
+        <p:cNvGrpSpPr/>
+        <p:nvPr/>
+      </p:nvGrpSpPr>
+      <p:grpSpPr>
+        <a:xfrm>
+          <a:off x="0" y="0"/>
+          <a:ext cx="0" cy="0"/>
+          <a:chOff x="0" y="0"/>
+          <a:chExt cx="0" cy="0"/>
+        </a:xfrm>
+      </p:grpSpPr>
+      <p:sp>
+        <p:nvSpPr>
           <p:cNvPr id="3" name="Content Placeholder 2"/>
           <p:cNvSpPr>
             <a:spLocks noGrp="1"/>
@@ -32326,7 +34065,7 @@
                 <a:latin typeface="Arial"/>
               </a:rPr>
               <a:pPr/>
-              <a:t>37</a:t>
+              <a:t>40</a:t>
             </a:fld>
             <a:endParaRPr lang="en-US">
               <a:latin typeface="Arial"/>
@@ -32754,7 +34493,7 @@
 </p:sld>
 </file>
 
-<file path=ppt/slides/slide38.xml><?xml version="1.0" encoding="utf-8"?>
+<file path=ppt/slides/slide41.xml><?xml version="1.0" encoding="utf-8"?>
 <p:sld xmlns:a="http://schemas.openxmlformats.org/drawingml/2006/main" xmlns:r="http://schemas.openxmlformats.org/officeDocument/2006/relationships" xmlns:p="http://schemas.openxmlformats.org/presentationml/2006/main">
   <p:cSld>
     <p:spTree>
@@ -32773,7 +34512,13 @@
       </p:grpSpPr>
       <p:sp>
         <p:nvSpPr>
-          <p:cNvPr id="2" name="Title 1"/>
+          <p:cNvPr id="2" name="Title 1">
+            <a:extLst>
+              <a:ext uri="{FF2B5EF4-FFF2-40B4-BE49-F238E27FC236}">
+                <a16:creationId xmlns:a16="http://schemas.microsoft.com/office/drawing/2014/main" id="{959F58F2-5FC2-7962-1707-9824743F302A}"/>
+              </a:ext>
+            </a:extLst>
+          </p:cNvPr>
           <p:cNvSpPr>
             <a:spLocks noGrp="1"/>
           </p:cNvSpPr>
@@ -32788,14 +34533,20 @@
           <a:p>
             <a:r>
               <a:rPr lang="en-US" dirty="0"/>
-              <a:t>Database Design</a:t>
+              <a:t>Feline Novelties Example</a:t>
             </a:r>
           </a:p>
         </p:txBody>
       </p:sp>
       <p:sp>
         <p:nvSpPr>
-          <p:cNvPr id="3" name="Content Placeholder 2"/>
+          <p:cNvPr id="3" name="Content Placeholder 2">
+            <a:extLst>
+              <a:ext uri="{FF2B5EF4-FFF2-40B4-BE49-F238E27FC236}">
+                <a16:creationId xmlns:a16="http://schemas.microsoft.com/office/drawing/2014/main" id="{54F74308-7247-2B5B-0181-75B75F9F1592}"/>
+              </a:ext>
+            </a:extLst>
+          </p:cNvPr>
           <p:cNvSpPr>
             <a:spLocks noGrp="1"/>
           </p:cNvSpPr>
@@ -32803,55 +34554,38 @@
             <p:ph idx="1"/>
           </p:nvPr>
         </p:nvSpPr>
-        <p:spPr/>
+        <p:spPr>
+          <a:xfrm>
+            <a:off x="457200" y="1600200"/>
+            <a:ext cx="8229600" cy="1045090"/>
+          </a:xfrm>
+        </p:spPr>
         <p:txBody>
           <a:bodyPr/>
           <a:lstStyle/>
           <a:p>
-            <a:endParaRPr lang="en-US" dirty="0"/>
-          </a:p>
-          <a:p>
             <a:r>
               <a:rPr lang="en-US" dirty="0"/>
-              <a:t>iterative process</a:t>
-            </a:r>
-          </a:p>
-          <a:p>
-            <a:endParaRPr lang="en-US" dirty="0"/>
+              <a:t>Build in Access – </a:t>
+            </a:r>
           </a:p>
           <a:p>
             <a:r>
               <a:rPr lang="en-US" dirty="0"/>
-              <a:t>create it, populate it, evaluate it, improve it</a:t>
-            </a:r>
-          </a:p>
-          <a:p>
-            <a:pPr marL="0" indent="0">
-              <a:buNone/>
-            </a:pPr>
-            <a:endParaRPr lang="en-US" dirty="0"/>
-          </a:p>
-          <a:p>
-            <a:r>
-              <a:rPr lang="en-US" dirty="0"/>
-              <a:t>Some examples in slides from and more information available at:  </a:t>
-            </a:r>
-            <a:r>
-              <a:rPr lang="en-US" dirty="0">
-                <a:hlinkClick r:id="rId2"/>
-              </a:rPr>
-              <a:t>https://www.1keydata.com/database-normalization/</a:t>
-            </a:r>
-            <a:endParaRPr lang="en-US" dirty="0"/>
-          </a:p>
-          <a:p>
-            <a:endParaRPr lang="en-US" dirty="0"/>
+              <a:t>  see feline-blank.accdb, feline_data.xlsx, etc.</a:t>
+            </a:r>
           </a:p>
         </p:txBody>
       </p:sp>
       <p:sp>
         <p:nvSpPr>
-          <p:cNvPr id="4" name="Slide Number Placeholder 3"/>
+          <p:cNvPr id="4" name="Slide Number Placeholder 3">
+            <a:extLst>
+              <a:ext uri="{FF2B5EF4-FFF2-40B4-BE49-F238E27FC236}">
+                <a16:creationId xmlns:a16="http://schemas.microsoft.com/office/drawing/2014/main" id="{9AF9EE57-1A1E-4917-C899-5B5112C012C3}"/>
+              </a:ext>
+            </a:extLst>
+          </p:cNvPr>
           <p:cNvSpPr>
             <a:spLocks noGrp="1"/>
           </p:cNvSpPr>
@@ -32869,7 +34603,7 @@
                 <a:latin typeface="Arial"/>
               </a:rPr>
               <a:pPr/>
-              <a:t>38</a:t>
+              <a:t>41</a:t>
             </a:fld>
             <a:endParaRPr lang="en-US">
               <a:latin typeface="Arial"/>
@@ -32877,10 +34611,366 @@
           </a:p>
         </p:txBody>
       </p:sp>
+      <p:pic>
+        <p:nvPicPr>
+          <p:cNvPr id="6" name="Picture 2" descr="Image result for grumpy cat">
+            <a:extLst>
+              <a:ext uri="{FF2B5EF4-FFF2-40B4-BE49-F238E27FC236}">
+                <a16:creationId xmlns:a16="http://schemas.microsoft.com/office/drawing/2014/main" id="{D3AFD333-2840-C627-1A0A-9C9720FFC923}"/>
+              </a:ext>
+            </a:extLst>
+          </p:cNvPr>
+          <p:cNvPicPr>
+            <a:picLocks noChangeAspect="1" noChangeArrowheads="1"/>
+          </p:cNvPicPr>
+          <p:nvPr/>
+        </p:nvPicPr>
+        <p:blipFill>
+          <a:blip r:embed="rId2">
+            <a:extLst>
+              <a:ext uri="{28A0092B-C50C-407E-A947-70E740481C1C}">
+                <a14:useLocalDpi xmlns:a14="http://schemas.microsoft.com/office/drawing/2010/main" val="0"/>
+              </a:ext>
+            </a:extLst>
+          </a:blip>
+          <a:srcRect/>
+          <a:stretch>
+            <a:fillRect/>
+          </a:stretch>
+        </p:blipFill>
+        <p:spPr bwMode="auto">
+          <a:xfrm>
+            <a:off x="7275566" y="533400"/>
+            <a:ext cx="1508838" cy="1508838"/>
+          </a:xfrm>
+          <a:prstGeom prst="rect">
+            <a:avLst/>
+          </a:prstGeom>
+          <a:noFill/>
+          <a:extLst>
+            <a:ext uri="{909E8E84-426E-40DD-AFC4-6F175D3DCCD1}">
+              <a14:hiddenFill xmlns:a14="http://schemas.microsoft.com/office/drawing/2010/main">
+                <a:solidFill>
+                  <a:srgbClr val="FFFFFF"/>
+                </a:solidFill>
+              </a14:hiddenFill>
+            </a:ext>
+          </a:extLst>
+        </p:spPr>
+      </p:pic>
+      <p:pic>
+        <p:nvPicPr>
+          <p:cNvPr id="7" name="Picture 6">
+            <a:extLst>
+              <a:ext uri="{FF2B5EF4-FFF2-40B4-BE49-F238E27FC236}">
+                <a16:creationId xmlns:a16="http://schemas.microsoft.com/office/drawing/2014/main" id="{36061E42-F6E8-2F9D-EE6E-E5DBC13FDD7B}"/>
+              </a:ext>
+            </a:extLst>
+          </p:cNvPr>
+          <p:cNvPicPr>
+            <a:picLocks noChangeAspect="1"/>
+          </p:cNvPicPr>
+          <p:nvPr/>
+        </p:nvPicPr>
+        <p:blipFill>
+          <a:blip r:embed="rId3"/>
+          <a:stretch>
+            <a:fillRect/>
+          </a:stretch>
+        </p:blipFill>
+        <p:spPr>
+          <a:xfrm>
+            <a:off x="4848045" y="3487306"/>
+            <a:ext cx="4161571" cy="2421170"/>
+          </a:xfrm>
+          <a:prstGeom prst="rect">
+            <a:avLst/>
+          </a:prstGeom>
+        </p:spPr>
+      </p:pic>
+      <p:sp>
+        <p:nvSpPr>
+          <p:cNvPr id="8" name="Content Placeholder 2">
+            <a:extLst>
+              <a:ext uri="{FF2B5EF4-FFF2-40B4-BE49-F238E27FC236}">
+                <a16:creationId xmlns:a16="http://schemas.microsoft.com/office/drawing/2014/main" id="{CADD2F10-FA97-9DAD-652B-9AE781B21A7D}"/>
+              </a:ext>
+            </a:extLst>
+          </p:cNvPr>
+          <p:cNvSpPr txBox="1">
+            <a:spLocks/>
+          </p:cNvSpPr>
+          <p:nvPr/>
+        </p:nvSpPr>
+        <p:spPr>
+          <a:xfrm>
+            <a:off x="253774" y="2763162"/>
+            <a:ext cx="4594271" cy="3723902"/>
+          </a:xfrm>
+          <a:prstGeom prst="rect">
+            <a:avLst/>
+          </a:prstGeom>
+        </p:spPr>
+        <p:txBody>
+          <a:bodyPr vert="horz" lIns="91440" tIns="45720" rIns="91440" bIns="45720" rtlCol="0">
+            <a:normAutofit fontScale="92500" lnSpcReduction="20000"/>
+          </a:bodyPr>
+          <a:lstStyle>
+            <a:lvl1pPr marL="182880" indent="-182880" algn="l" defTabSz="914400" rtl="0" eaLnBrk="1" latinLnBrk="0" hangingPunct="1">
+              <a:spcBef>
+                <a:spcPct val="20000"/>
+              </a:spcBef>
+              <a:buClr>
+                <a:schemeClr val="accent1"/>
+              </a:buClr>
+              <a:buSzPct val="85000"/>
+              <a:buFont typeface="Arial" pitchFamily="34" charset="0"/>
+              <a:buChar char="•"/>
+              <a:defRPr sz="2400" kern="1200">
+                <a:solidFill>
+                  <a:schemeClr val="tx1"/>
+                </a:solidFill>
+                <a:latin typeface="+mn-lt"/>
+                <a:ea typeface="+mn-ea"/>
+                <a:cs typeface="+mn-cs"/>
+              </a:defRPr>
+            </a:lvl1pPr>
+            <a:lvl2pPr marL="457200" indent="-182880" algn="l" defTabSz="914400" rtl="0" eaLnBrk="1" latinLnBrk="0" hangingPunct="1">
+              <a:spcBef>
+                <a:spcPct val="20000"/>
+              </a:spcBef>
+              <a:buClr>
+                <a:schemeClr val="accent1"/>
+              </a:buClr>
+              <a:buSzPct val="85000"/>
+              <a:buFont typeface="Arial" pitchFamily="34" charset="0"/>
+              <a:buChar char="•"/>
+              <a:defRPr sz="2000" kern="1200">
+                <a:solidFill>
+                  <a:schemeClr val="tx1"/>
+                </a:solidFill>
+                <a:latin typeface="+mn-lt"/>
+                <a:ea typeface="+mn-ea"/>
+                <a:cs typeface="+mn-cs"/>
+              </a:defRPr>
+            </a:lvl2pPr>
+            <a:lvl3pPr marL="731520" indent="-182880" algn="l" defTabSz="914400" rtl="0" eaLnBrk="1" latinLnBrk="0" hangingPunct="1">
+              <a:spcBef>
+                <a:spcPct val="20000"/>
+              </a:spcBef>
+              <a:buClr>
+                <a:schemeClr val="accent1"/>
+              </a:buClr>
+              <a:buSzPct val="90000"/>
+              <a:buFont typeface="Arial" pitchFamily="34" charset="0"/>
+              <a:buChar char="•"/>
+              <a:defRPr sz="1800" kern="1200">
+                <a:solidFill>
+                  <a:schemeClr val="tx1"/>
+                </a:solidFill>
+                <a:latin typeface="+mn-lt"/>
+                <a:ea typeface="+mn-ea"/>
+                <a:cs typeface="+mn-cs"/>
+              </a:defRPr>
+            </a:lvl3pPr>
+            <a:lvl4pPr marL="1005840" indent="-182880" algn="l" defTabSz="914400" rtl="0" eaLnBrk="1" latinLnBrk="0" hangingPunct="1">
+              <a:spcBef>
+                <a:spcPct val="20000"/>
+              </a:spcBef>
+              <a:buClr>
+                <a:schemeClr val="accent1"/>
+              </a:buClr>
+              <a:buFont typeface="Arial" pitchFamily="34" charset="0"/>
+              <a:buChar char="•"/>
+              <a:defRPr sz="1600" kern="1200">
+                <a:solidFill>
+                  <a:schemeClr val="tx1"/>
+                </a:solidFill>
+                <a:latin typeface="+mn-lt"/>
+                <a:ea typeface="+mn-ea"/>
+                <a:cs typeface="+mn-cs"/>
+              </a:defRPr>
+            </a:lvl4pPr>
+            <a:lvl5pPr marL="1188720" indent="-137160" algn="l" defTabSz="914400" rtl="0" eaLnBrk="1" latinLnBrk="0" hangingPunct="1">
+              <a:spcBef>
+                <a:spcPct val="20000"/>
+              </a:spcBef>
+              <a:buClr>
+                <a:schemeClr val="accent1"/>
+              </a:buClr>
+              <a:buSzPct val="100000"/>
+              <a:buFont typeface="Arial" pitchFamily="34" charset="0"/>
+              <a:buChar char="•"/>
+              <a:defRPr sz="1400" kern="1200" baseline="0">
+                <a:solidFill>
+                  <a:schemeClr val="tx1"/>
+                </a:solidFill>
+                <a:latin typeface="+mn-lt"/>
+                <a:ea typeface="+mn-ea"/>
+                <a:cs typeface="+mn-cs"/>
+              </a:defRPr>
+            </a:lvl5pPr>
+            <a:lvl6pPr marL="1371600" indent="-182880" algn="l" defTabSz="914400" rtl="0" eaLnBrk="1" latinLnBrk="0" hangingPunct="1">
+              <a:spcBef>
+                <a:spcPct val="20000"/>
+              </a:spcBef>
+              <a:buClr>
+                <a:schemeClr val="accent1"/>
+              </a:buClr>
+              <a:buFont typeface="Arial" pitchFamily="34" charset="0"/>
+              <a:buChar char="•"/>
+              <a:defRPr sz="1300" kern="1200">
+                <a:solidFill>
+                  <a:schemeClr val="tx1"/>
+                </a:solidFill>
+                <a:latin typeface="+mn-lt"/>
+                <a:ea typeface="+mn-ea"/>
+                <a:cs typeface="+mn-cs"/>
+              </a:defRPr>
+            </a:lvl6pPr>
+            <a:lvl7pPr marL="1554480" indent="-182880" algn="l" defTabSz="914400" rtl="0" eaLnBrk="1" latinLnBrk="0" hangingPunct="1">
+              <a:spcBef>
+                <a:spcPct val="20000"/>
+              </a:spcBef>
+              <a:buClr>
+                <a:schemeClr val="accent1"/>
+              </a:buClr>
+              <a:buFont typeface="Arial" pitchFamily="34" charset="0"/>
+              <a:buChar char="•"/>
+              <a:defRPr sz="1300" kern="1200">
+                <a:solidFill>
+                  <a:schemeClr val="tx1"/>
+                </a:solidFill>
+                <a:latin typeface="+mn-lt"/>
+                <a:ea typeface="+mn-ea"/>
+                <a:cs typeface="+mn-cs"/>
+              </a:defRPr>
+            </a:lvl7pPr>
+            <a:lvl8pPr marL="1737360" indent="-182880" algn="l" defTabSz="914400" rtl="0" eaLnBrk="1" latinLnBrk="0" hangingPunct="1">
+              <a:spcBef>
+                <a:spcPct val="20000"/>
+              </a:spcBef>
+              <a:buClr>
+                <a:schemeClr val="accent1"/>
+              </a:buClr>
+              <a:buFont typeface="Arial" pitchFamily="34" charset="0"/>
+              <a:buChar char="•"/>
+              <a:defRPr sz="1300" kern="1200">
+                <a:solidFill>
+                  <a:schemeClr val="tx1"/>
+                </a:solidFill>
+                <a:latin typeface="+mn-lt"/>
+                <a:ea typeface="+mn-ea"/>
+                <a:cs typeface="+mn-cs"/>
+              </a:defRPr>
+            </a:lvl8pPr>
+            <a:lvl9pPr marL="1920240" indent="-182880" algn="l" defTabSz="914400" rtl="0" eaLnBrk="1" latinLnBrk="0" hangingPunct="1">
+              <a:spcBef>
+                <a:spcPct val="20000"/>
+              </a:spcBef>
+              <a:buClr>
+                <a:schemeClr val="accent1"/>
+              </a:buClr>
+              <a:buFont typeface="Arial" pitchFamily="34" charset="0"/>
+              <a:buChar char="•"/>
+              <a:defRPr sz="1300" kern="1200">
+                <a:solidFill>
+                  <a:schemeClr val="tx1"/>
+                </a:solidFill>
+                <a:latin typeface="+mn-lt"/>
+                <a:ea typeface="+mn-ea"/>
+                <a:cs typeface="+mn-cs"/>
+              </a:defRPr>
+            </a:lvl9pPr>
+          </a:lstStyle>
+          <a:p>
+            <a:r>
+              <a:rPr lang="en-US" dirty="0"/>
+              <a:t>Try to build simple queries:</a:t>
+            </a:r>
+          </a:p>
+          <a:p>
+            <a:pPr lvl="1"/>
+            <a:r>
+              <a:rPr lang="en-US" dirty="0"/>
+              <a:t>List of customer names (requires one table)</a:t>
+            </a:r>
+          </a:p>
+          <a:p>
+            <a:pPr lvl="1"/>
+            <a:r>
+              <a:rPr lang="en-US" dirty="0"/>
+              <a:t>List of customer names who are female (requires one table with one criterion)</a:t>
+            </a:r>
+          </a:p>
+          <a:p>
+            <a:pPr lvl="1"/>
+            <a:r>
+              <a:rPr lang="en-US" dirty="0"/>
+              <a:t>List of customer names and items they have ordered (requires more than one table)</a:t>
+            </a:r>
+          </a:p>
+          <a:p>
+            <a:r>
+              <a:rPr lang="en-US" dirty="0"/>
+              <a:t>Select desired fields from desired tables</a:t>
+            </a:r>
+          </a:p>
+          <a:p>
+            <a:r>
+              <a:rPr lang="en-US" dirty="0"/>
+              <a:t>Add criteria as necessary, e.g. Gender is ‘M’</a:t>
+            </a:r>
+          </a:p>
+          <a:p>
+            <a:pPr lvl="1"/>
+            <a:endParaRPr lang="en-US" dirty="0"/>
+          </a:p>
+        </p:txBody>
+      </p:sp>
+      <p:sp>
+        <p:nvSpPr>
+          <p:cNvPr id="10" name="TextBox 9">
+            <a:extLst>
+              <a:ext uri="{FF2B5EF4-FFF2-40B4-BE49-F238E27FC236}">
+                <a16:creationId xmlns:a16="http://schemas.microsoft.com/office/drawing/2014/main" id="{3D92904E-C31A-76F4-04CA-CE6C1D63E92F}"/>
+              </a:ext>
+            </a:extLst>
+          </p:cNvPr>
+          <p:cNvSpPr txBox="1"/>
+          <p:nvPr/>
+        </p:nvSpPr>
+        <p:spPr>
+          <a:xfrm>
+            <a:off x="5334000" y="2884254"/>
+            <a:ext cx="4572000" cy="369332"/>
+          </a:xfrm>
+          <a:prstGeom prst="rect">
+            <a:avLst/>
+          </a:prstGeom>
+          <a:noFill/>
+        </p:spPr>
+        <p:txBody>
+          <a:bodyPr wrap="square">
+            <a:spAutoFit/>
+          </a:bodyPr>
+          <a:lstStyle/>
+          <a:p>
+            <a:r>
+              <a:rPr lang="en-US" sz="1800" dirty="0"/>
+              <a:t>Choose </a:t>
+            </a:r>
+            <a:r>
+              <a:rPr lang="en-US" sz="1800" b="1" dirty="0"/>
+              <a:t>Create : Query Design</a:t>
+            </a:r>
+          </a:p>
+        </p:txBody>
+      </p:sp>
     </p:spTree>
     <p:extLst>
       <p:ext uri="{BB962C8B-B14F-4D97-AF65-F5344CB8AC3E}">
-        <p14:creationId xmlns:p14="http://schemas.microsoft.com/office/powerpoint/2010/main" val="85010229"/>
+        <p14:creationId xmlns:p14="http://schemas.microsoft.com/office/powerpoint/2010/main" val="2160823425"/>
       </p:ext>
     </p:extLst>
   </p:cSld>
@@ -32890,7 +34980,7 @@
 </p:sld>
 </file>
 
-<file path=ppt/slides/slide4.xml><?xml version="1.0" encoding="utf-8"?>
+<file path=ppt/slides/slide42.xml><?xml version="1.0" encoding="utf-8"?>
 <p:sld xmlns:a="http://schemas.openxmlformats.org/drawingml/2006/main" xmlns:r="http://schemas.openxmlformats.org/officeDocument/2006/relationships" xmlns:p="http://schemas.openxmlformats.org/presentationml/2006/main">
   <p:cSld>
     <p:spTree>
@@ -32919,14 +35009,12 @@
         </p:nvSpPr>
         <p:spPr/>
         <p:txBody>
-          <a:bodyPr>
-            <a:normAutofit/>
-          </a:bodyPr>
+          <a:bodyPr/>
           <a:lstStyle/>
           <a:p>
             <a:r>
-              <a:rPr lang="en-US" sz="3200" dirty="0"/>
-              <a:t>Designing a Relational Database: Overview</a:t>
+              <a:rPr lang="en-US" dirty="0"/>
+              <a:t>Database Design</a:t>
             </a:r>
           </a:p>
         </p:txBody>
@@ -32943,110 +35031,47 @@
         </p:nvSpPr>
         <p:spPr/>
         <p:txBody>
-          <a:bodyPr>
-            <a:normAutofit/>
-          </a:bodyPr>
+          <a:bodyPr/>
           <a:lstStyle/>
           <a:p>
-            <a:pPr marL="514350" indent="-514350">
-              <a:lnSpc>
-                <a:spcPct val="150000"/>
-              </a:lnSpc>
-              <a:buFont typeface="+mj-lt"/>
-              <a:buAutoNum type="romanUcPeriod"/>
+            <a:endParaRPr lang="en-US" dirty="0"/>
+          </a:p>
+          <a:p>
+            <a:r>
+              <a:rPr lang="en-US" dirty="0"/>
+              <a:t>iterative process</a:t>
+            </a:r>
+          </a:p>
+          <a:p>
+            <a:endParaRPr lang="en-US" dirty="0"/>
+          </a:p>
+          <a:p>
+            <a:r>
+              <a:rPr lang="en-US" dirty="0"/>
+              <a:t>create it, populate it, evaluate it, improve it</a:t>
+            </a:r>
+          </a:p>
+          <a:p>
+            <a:pPr marL="0" indent="0">
+              <a:buNone/>
             </a:pPr>
-            <a:r>
-              <a:rPr lang="en-US" sz="2800" dirty="0"/>
-              <a:t>Determine </a:t>
-            </a:r>
-            <a:r>
-              <a:rPr lang="en-US" sz="2800" b="1" dirty="0"/>
-              <a:t>purpose </a:t>
-            </a:r>
-            <a:r>
-              <a:rPr lang="en-US" sz="2800" dirty="0"/>
-              <a:t>of database</a:t>
-            </a:r>
-          </a:p>
-          <a:p>
-            <a:pPr marL="514350" indent="-514350">
-              <a:lnSpc>
-                <a:spcPct val="150000"/>
-              </a:lnSpc>
-              <a:buFont typeface="+mj-lt"/>
-              <a:buAutoNum type="romanUcPeriod"/>
-            </a:pPr>
-            <a:r>
-              <a:rPr lang="en-US" sz="2800" dirty="0"/>
-              <a:t>Find &amp; organize </a:t>
-            </a:r>
-            <a:r>
-              <a:rPr lang="en-US" sz="2800" b="1" dirty="0"/>
-              <a:t>information </a:t>
-            </a:r>
-            <a:r>
-              <a:rPr lang="en-US" sz="2800" dirty="0"/>
-              <a:t>required</a:t>
-            </a:r>
-          </a:p>
-          <a:p>
-            <a:pPr marL="514350" indent="-514350">
-              <a:lnSpc>
-                <a:spcPct val="150000"/>
-              </a:lnSpc>
-              <a:buFont typeface="+mj-lt"/>
-              <a:buAutoNum type="romanUcPeriod"/>
-            </a:pPr>
-            <a:r>
-              <a:rPr lang="en-US" sz="2800" dirty="0"/>
-              <a:t>Create </a:t>
-            </a:r>
-            <a:r>
-              <a:rPr lang="en-US" sz="2800" b="1" dirty="0"/>
-              <a:t>Entity-Relationship </a:t>
-            </a:r>
-            <a:r>
-              <a:rPr lang="en-US" sz="2800" dirty="0"/>
-              <a:t>(E-R) diagram</a:t>
-            </a:r>
-          </a:p>
-          <a:p>
-            <a:pPr marL="514350" indent="-514350">
-              <a:lnSpc>
-                <a:spcPct val="150000"/>
-              </a:lnSpc>
-              <a:buFont typeface="+mj-lt"/>
-              <a:buAutoNum type="romanUcPeriod"/>
-            </a:pPr>
-            <a:r>
-              <a:rPr lang="en-US" sz="2800" b="1" dirty="0"/>
-              <a:t>Refine </a:t>
-            </a:r>
-            <a:r>
-              <a:rPr lang="en-US" sz="2800" dirty="0"/>
-              <a:t>design</a:t>
-            </a:r>
-          </a:p>
-          <a:p>
-            <a:pPr marL="514350" indent="-514350">
-              <a:lnSpc>
-                <a:spcPct val="150000"/>
-              </a:lnSpc>
-              <a:buFont typeface="+mj-lt"/>
-              <a:buAutoNum type="romanUcPeriod"/>
-            </a:pPr>
-            <a:r>
-              <a:rPr lang="en-US" sz="2800" dirty="0"/>
-              <a:t>Apply </a:t>
-            </a:r>
-            <a:r>
-              <a:rPr lang="en-US" sz="2800" b="1" dirty="0"/>
-              <a:t>normalization </a:t>
-            </a:r>
-            <a:r>
-              <a:rPr lang="en-US" sz="2800" dirty="0"/>
-              <a:t>rules</a:t>
-            </a:r>
+            <a:endParaRPr lang="en-US" dirty="0"/>
+          </a:p>
+          <a:p>
+            <a:r>
+              <a:rPr lang="en-US" dirty="0"/>
+              <a:t>Some examples in slides from and more information available at:  </a:t>
+            </a:r>
+            <a:r>
+              <a:rPr lang="en-US" dirty="0">
+                <a:hlinkClick r:id="rId2"/>
+              </a:rPr>
+              <a:t>https://www.1keydata.com/database-normalization/</a:t>
+            </a:r>
+            <a:endParaRPr lang="en-US" dirty="0"/>
+          </a:p>
+          <a:p>
+            <a:endParaRPr lang="en-US" dirty="0"/>
           </a:p>
         </p:txBody>
       </p:sp>
@@ -33070,7 +35095,7 @@
                 <a:latin typeface="Arial"/>
               </a:rPr>
               <a:pPr/>
-              <a:t>4</a:t>
+              <a:t>42</a:t>
             </a:fld>
             <a:endParaRPr lang="en-US">
               <a:latin typeface="Arial"/>
@@ -33078,74 +35103,10 @@
           </a:p>
         </p:txBody>
       </p:sp>
-      <p:sp>
-        <p:nvSpPr>
-          <p:cNvPr id="5" name="TextBox 4"/>
-          <p:cNvSpPr txBox="1"/>
-          <p:nvPr/>
-        </p:nvSpPr>
-        <p:spPr>
-          <a:xfrm>
-            <a:off x="228600" y="5905500"/>
-            <a:ext cx="8571577" cy="461665"/>
-          </a:xfrm>
-          <a:prstGeom prst="rect">
-            <a:avLst/>
-          </a:prstGeom>
-          <a:noFill/>
-        </p:spPr>
-        <p:txBody>
-          <a:bodyPr wrap="none" rtlCol="0">
-            <a:spAutoFit/>
-          </a:bodyPr>
-          <a:lstStyle/>
-          <a:p>
-            <a:r>
-              <a:rPr lang="en-US" sz="2400" i="1" dirty="0"/>
-              <a:t>Follow this process for the Library example on the homework.</a:t>
-            </a:r>
-          </a:p>
-        </p:txBody>
-      </p:sp>
-      <p:sp>
-        <p:nvSpPr>
-          <p:cNvPr id="6" name="TextBox 5"/>
-          <p:cNvSpPr txBox="1"/>
-          <p:nvPr/>
-        </p:nvSpPr>
-        <p:spPr>
-          <a:xfrm>
-            <a:off x="6639067" y="4996765"/>
-            <a:ext cx="1133644" cy="646331"/>
-          </a:xfrm>
-          <a:prstGeom prst="rect">
-            <a:avLst/>
-          </a:prstGeom>
-          <a:noFill/>
-        </p:spPr>
-        <p:txBody>
-          <a:bodyPr wrap="none" rtlCol="0">
-            <a:spAutoFit/>
-          </a:bodyPr>
-          <a:lstStyle/>
-          <a:p>
-            <a:r>
-              <a:rPr lang="en-US" b="1" dirty="0"/>
-              <a:t>PIER-RN</a:t>
-            </a:r>
-          </a:p>
-          <a:p>
-            <a:r>
-              <a:rPr lang="en-US" dirty="0"/>
-              <a:t> </a:t>
-            </a:r>
-          </a:p>
-        </p:txBody>
-      </p:sp>
     </p:spTree>
     <p:extLst>
       <p:ext uri="{BB962C8B-B14F-4D97-AF65-F5344CB8AC3E}">
-        <p14:creationId xmlns:p14="http://schemas.microsoft.com/office/powerpoint/2010/main" val="3239075246"/>
+        <p14:creationId xmlns:p14="http://schemas.microsoft.com/office/powerpoint/2010/main" val="85010229"/>
       </p:ext>
     </p:extLst>
   </p:cSld>
